--- a/sprint review.pptx
+++ b/sprint review.pptx
@@ -19,6 +19,16 @@
     <p:sldId id="267" r:id="rId13"/>
     <p:sldId id="266" r:id="rId14"/>
     <p:sldId id="270" r:id="rId15"/>
+    <p:sldId id="271" r:id="rId16"/>
+    <p:sldId id="272" r:id="rId17"/>
+    <p:sldId id="275" r:id="rId18"/>
+    <p:sldId id="276" r:id="rId19"/>
+    <p:sldId id="274" r:id="rId20"/>
+    <p:sldId id="277" r:id="rId21"/>
+    <p:sldId id="273" r:id="rId22"/>
+    <p:sldId id="278" r:id="rId23"/>
+    <p:sldId id="279" r:id="rId24"/>
+    <p:sldId id="280" r:id="rId25"/>
   </p:sldIdLst>
   <p:sldSz cx="12192000" cy="6858000"/>
   <p:notesSz cx="6858000" cy="9144000"/>
@@ -117,6 +127,11 @@
       </a:defRPr>
     </a:lvl9pPr>
   </p:defaultTextStyle>
+  <p:extLst>
+    <p:ext uri="{EFAFB233-063F-42B5-8137-9DF3F51BA10A}">
+      <p15:sldGuideLst xmlns:p15="http://schemas.microsoft.com/office/powerpoint/2012/main"/>
+    </p:ext>
+  </p:extLst>
 </p:presentation>
 </file>
 
@@ -681,6 +696,2443 @@
 </pc:chgInfo>
 </file>
 
+<file path=ppt/diagrams/colors1.xml><?xml version="1.0" encoding="utf-8"?>
+<dgm:colorsDef xmlns:dgm="http://schemas.openxmlformats.org/drawingml/2006/diagram" xmlns:a="http://schemas.openxmlformats.org/drawingml/2006/main" uniqueId="urn:microsoft.com/office/officeart/2005/8/colors/accent1_2">
+  <dgm:title val=""/>
+  <dgm:desc val=""/>
+  <dgm:catLst>
+    <dgm:cat type="accent1" pri="11200"/>
+  </dgm:catLst>
+  <dgm:styleLbl name="node0">
+    <dgm:fillClrLst meth="repeat">
+      <a:schemeClr val="accent1"/>
+    </dgm:fillClrLst>
+    <dgm:linClrLst meth="repeat">
+      <a:schemeClr val="lt1"/>
+    </dgm:linClrLst>
+    <dgm:effectClrLst/>
+    <dgm:txLinClrLst/>
+    <dgm:txFillClrLst/>
+    <dgm:txEffectClrLst/>
+  </dgm:styleLbl>
+  <dgm:styleLbl name="alignNode1">
+    <dgm:fillClrLst meth="repeat">
+      <a:schemeClr val="accent1"/>
+    </dgm:fillClrLst>
+    <dgm:linClrLst meth="repeat">
+      <a:schemeClr val="accent1"/>
+    </dgm:linClrLst>
+    <dgm:effectClrLst/>
+    <dgm:txLinClrLst/>
+    <dgm:txFillClrLst/>
+    <dgm:txEffectClrLst/>
+  </dgm:styleLbl>
+  <dgm:styleLbl name="node1">
+    <dgm:fillClrLst meth="repeat">
+      <a:schemeClr val="accent1"/>
+    </dgm:fillClrLst>
+    <dgm:linClrLst meth="repeat">
+      <a:schemeClr val="lt1"/>
+    </dgm:linClrLst>
+    <dgm:effectClrLst/>
+    <dgm:txLinClrLst/>
+    <dgm:txFillClrLst/>
+    <dgm:txEffectClrLst/>
+  </dgm:styleLbl>
+  <dgm:styleLbl name="lnNode1">
+    <dgm:fillClrLst meth="repeat">
+      <a:schemeClr val="accent1"/>
+    </dgm:fillClrLst>
+    <dgm:linClrLst meth="repeat">
+      <a:schemeClr val="lt1"/>
+    </dgm:linClrLst>
+    <dgm:effectClrLst/>
+    <dgm:txLinClrLst/>
+    <dgm:txFillClrLst/>
+    <dgm:txEffectClrLst/>
+  </dgm:styleLbl>
+  <dgm:styleLbl name="vennNode1">
+    <dgm:fillClrLst meth="repeat">
+      <a:schemeClr val="accent1">
+        <a:alpha val="50000"/>
+      </a:schemeClr>
+    </dgm:fillClrLst>
+    <dgm:linClrLst meth="repeat">
+      <a:schemeClr val="lt1"/>
+    </dgm:linClrLst>
+    <dgm:effectClrLst/>
+    <dgm:txLinClrLst/>
+    <dgm:txFillClrLst/>
+    <dgm:txEffectClrLst/>
+  </dgm:styleLbl>
+  <dgm:styleLbl name="node2">
+    <dgm:fillClrLst meth="repeat">
+      <a:schemeClr val="accent1"/>
+    </dgm:fillClrLst>
+    <dgm:linClrLst meth="repeat">
+      <a:schemeClr val="lt1"/>
+    </dgm:linClrLst>
+    <dgm:effectClrLst/>
+    <dgm:txLinClrLst/>
+    <dgm:txFillClrLst/>
+    <dgm:txEffectClrLst/>
+  </dgm:styleLbl>
+  <dgm:styleLbl name="node3">
+    <dgm:fillClrLst meth="repeat">
+      <a:schemeClr val="accent1"/>
+    </dgm:fillClrLst>
+    <dgm:linClrLst meth="repeat">
+      <a:schemeClr val="lt1"/>
+    </dgm:linClrLst>
+    <dgm:effectClrLst/>
+    <dgm:txLinClrLst/>
+    <dgm:txFillClrLst/>
+    <dgm:txEffectClrLst/>
+  </dgm:styleLbl>
+  <dgm:styleLbl name="node4">
+    <dgm:fillClrLst meth="repeat">
+      <a:schemeClr val="accent1"/>
+    </dgm:fillClrLst>
+    <dgm:linClrLst meth="repeat">
+      <a:schemeClr val="lt1"/>
+    </dgm:linClrLst>
+    <dgm:effectClrLst/>
+    <dgm:txLinClrLst/>
+    <dgm:txFillClrLst/>
+    <dgm:txEffectClrLst/>
+  </dgm:styleLbl>
+  <dgm:styleLbl name="fgImgPlace1">
+    <dgm:fillClrLst meth="repeat">
+      <a:schemeClr val="accent1">
+        <a:tint val="50000"/>
+      </a:schemeClr>
+    </dgm:fillClrLst>
+    <dgm:linClrLst meth="repeat">
+      <a:schemeClr val="lt1"/>
+    </dgm:linClrLst>
+    <dgm:effectClrLst/>
+    <dgm:txLinClrLst/>
+    <dgm:txFillClrLst meth="repeat">
+      <a:schemeClr val="lt1"/>
+    </dgm:txFillClrLst>
+    <dgm:txEffectClrLst/>
+  </dgm:styleLbl>
+  <dgm:styleLbl name="alignImgPlace1">
+    <dgm:fillClrLst meth="repeat">
+      <a:schemeClr val="accent1">
+        <a:tint val="50000"/>
+      </a:schemeClr>
+    </dgm:fillClrLst>
+    <dgm:linClrLst meth="repeat">
+      <a:schemeClr val="lt1"/>
+    </dgm:linClrLst>
+    <dgm:effectClrLst/>
+    <dgm:txLinClrLst/>
+    <dgm:txFillClrLst meth="repeat">
+      <a:schemeClr val="lt1"/>
+    </dgm:txFillClrLst>
+    <dgm:txEffectClrLst/>
+  </dgm:styleLbl>
+  <dgm:styleLbl name="bgImgPlace1">
+    <dgm:fillClrLst meth="repeat">
+      <a:schemeClr val="accent1">
+        <a:tint val="50000"/>
+      </a:schemeClr>
+    </dgm:fillClrLst>
+    <dgm:linClrLst meth="repeat">
+      <a:schemeClr val="lt1"/>
+    </dgm:linClrLst>
+    <dgm:effectClrLst/>
+    <dgm:txLinClrLst/>
+    <dgm:txFillClrLst meth="repeat">
+      <a:schemeClr val="lt1"/>
+    </dgm:txFillClrLst>
+    <dgm:txEffectClrLst/>
+  </dgm:styleLbl>
+  <dgm:styleLbl name="sibTrans2D1">
+    <dgm:fillClrLst meth="repeat">
+      <a:schemeClr val="accent1">
+        <a:tint val="60000"/>
+      </a:schemeClr>
+    </dgm:fillClrLst>
+    <dgm:linClrLst meth="repeat">
+      <a:schemeClr val="accent1">
+        <a:tint val="60000"/>
+      </a:schemeClr>
+    </dgm:linClrLst>
+    <dgm:effectClrLst/>
+    <dgm:txLinClrLst/>
+    <dgm:txFillClrLst/>
+    <dgm:txEffectClrLst/>
+  </dgm:styleLbl>
+  <dgm:styleLbl name="fgSibTrans2D1">
+    <dgm:fillClrLst meth="repeat">
+      <a:schemeClr val="accent1">
+        <a:tint val="60000"/>
+      </a:schemeClr>
+    </dgm:fillClrLst>
+    <dgm:linClrLst meth="repeat">
+      <a:schemeClr val="accent1">
+        <a:tint val="60000"/>
+      </a:schemeClr>
+    </dgm:linClrLst>
+    <dgm:effectClrLst/>
+    <dgm:txLinClrLst/>
+    <dgm:txFillClrLst/>
+    <dgm:txEffectClrLst/>
+  </dgm:styleLbl>
+  <dgm:styleLbl name="bgSibTrans2D1">
+    <dgm:fillClrLst meth="repeat">
+      <a:schemeClr val="accent1">
+        <a:tint val="60000"/>
+      </a:schemeClr>
+    </dgm:fillClrLst>
+    <dgm:linClrLst meth="repeat">
+      <a:schemeClr val="accent1">
+        <a:tint val="60000"/>
+      </a:schemeClr>
+    </dgm:linClrLst>
+    <dgm:effectClrLst/>
+    <dgm:txLinClrLst/>
+    <dgm:txFillClrLst/>
+    <dgm:txEffectClrLst/>
+  </dgm:styleLbl>
+  <dgm:styleLbl name="sibTrans1D1">
+    <dgm:fillClrLst meth="repeat">
+      <a:schemeClr val="accent1"/>
+    </dgm:fillClrLst>
+    <dgm:linClrLst meth="repeat">
+      <a:schemeClr val="accent1"/>
+    </dgm:linClrLst>
+    <dgm:effectClrLst/>
+    <dgm:txLinClrLst/>
+    <dgm:txFillClrLst meth="repeat">
+      <a:schemeClr val="tx1"/>
+    </dgm:txFillClrLst>
+    <dgm:txEffectClrLst/>
+  </dgm:styleLbl>
+  <dgm:styleLbl name="callout">
+    <dgm:fillClrLst meth="repeat">
+      <a:schemeClr val="accent1"/>
+    </dgm:fillClrLst>
+    <dgm:linClrLst meth="repeat">
+      <a:schemeClr val="accent1">
+        <a:tint val="50000"/>
+      </a:schemeClr>
+    </dgm:linClrLst>
+    <dgm:effectClrLst/>
+    <dgm:txLinClrLst/>
+    <dgm:txFillClrLst meth="repeat">
+      <a:schemeClr val="tx1"/>
+    </dgm:txFillClrLst>
+    <dgm:txEffectClrLst/>
+  </dgm:styleLbl>
+  <dgm:styleLbl name="asst0">
+    <dgm:fillClrLst meth="repeat">
+      <a:schemeClr val="accent1"/>
+    </dgm:fillClrLst>
+    <dgm:linClrLst meth="repeat">
+      <a:schemeClr val="lt1"/>
+    </dgm:linClrLst>
+    <dgm:effectClrLst/>
+    <dgm:txLinClrLst/>
+    <dgm:txFillClrLst/>
+    <dgm:txEffectClrLst/>
+  </dgm:styleLbl>
+  <dgm:styleLbl name="asst1">
+    <dgm:fillClrLst meth="repeat">
+      <a:schemeClr val="accent1"/>
+    </dgm:fillClrLst>
+    <dgm:linClrLst meth="repeat">
+      <a:schemeClr val="lt1"/>
+    </dgm:linClrLst>
+    <dgm:effectClrLst/>
+    <dgm:txLinClrLst/>
+    <dgm:txFillClrLst/>
+    <dgm:txEffectClrLst/>
+  </dgm:styleLbl>
+  <dgm:styleLbl name="asst2">
+    <dgm:fillClrLst meth="repeat">
+      <a:schemeClr val="accent1"/>
+    </dgm:fillClrLst>
+    <dgm:linClrLst meth="repeat">
+      <a:schemeClr val="lt1"/>
+    </dgm:linClrLst>
+    <dgm:effectClrLst/>
+    <dgm:txLinClrLst/>
+    <dgm:txFillClrLst/>
+    <dgm:txEffectClrLst/>
+  </dgm:styleLbl>
+  <dgm:styleLbl name="asst3">
+    <dgm:fillClrLst meth="repeat">
+      <a:schemeClr val="accent1"/>
+    </dgm:fillClrLst>
+    <dgm:linClrLst meth="repeat">
+      <a:schemeClr val="lt1"/>
+    </dgm:linClrLst>
+    <dgm:effectClrLst/>
+    <dgm:txLinClrLst/>
+    <dgm:txFillClrLst/>
+    <dgm:txEffectClrLst/>
+  </dgm:styleLbl>
+  <dgm:styleLbl name="asst4">
+    <dgm:fillClrLst meth="repeat">
+      <a:schemeClr val="accent1"/>
+    </dgm:fillClrLst>
+    <dgm:linClrLst meth="repeat">
+      <a:schemeClr val="lt1"/>
+    </dgm:linClrLst>
+    <dgm:effectClrLst/>
+    <dgm:txLinClrLst/>
+    <dgm:txFillClrLst/>
+    <dgm:txEffectClrLst/>
+  </dgm:styleLbl>
+  <dgm:styleLbl name="parChTrans2D1">
+    <dgm:fillClrLst meth="repeat">
+      <a:schemeClr val="accent1">
+        <a:tint val="60000"/>
+      </a:schemeClr>
+    </dgm:fillClrLst>
+    <dgm:linClrLst meth="repeat">
+      <a:schemeClr val="accent1">
+        <a:tint val="60000"/>
+      </a:schemeClr>
+    </dgm:linClrLst>
+    <dgm:effectClrLst/>
+    <dgm:txLinClrLst/>
+    <dgm:txFillClrLst meth="repeat">
+      <a:schemeClr val="lt1"/>
+    </dgm:txFillClrLst>
+    <dgm:txEffectClrLst/>
+  </dgm:styleLbl>
+  <dgm:styleLbl name="parChTrans2D2">
+    <dgm:fillClrLst meth="repeat">
+      <a:schemeClr val="accent1"/>
+    </dgm:fillClrLst>
+    <dgm:linClrLst meth="repeat">
+      <a:schemeClr val="accent1"/>
+    </dgm:linClrLst>
+    <dgm:effectClrLst/>
+    <dgm:txLinClrLst/>
+    <dgm:txFillClrLst meth="repeat">
+      <a:schemeClr val="lt1"/>
+    </dgm:txFillClrLst>
+    <dgm:txEffectClrLst/>
+  </dgm:styleLbl>
+  <dgm:styleLbl name="parChTrans2D3">
+    <dgm:fillClrLst meth="repeat">
+      <a:schemeClr val="accent1"/>
+    </dgm:fillClrLst>
+    <dgm:linClrLst meth="repeat">
+      <a:schemeClr val="accent1"/>
+    </dgm:linClrLst>
+    <dgm:effectClrLst/>
+    <dgm:txLinClrLst/>
+    <dgm:txFillClrLst meth="repeat">
+      <a:schemeClr val="lt1"/>
+    </dgm:txFillClrLst>
+    <dgm:txEffectClrLst/>
+  </dgm:styleLbl>
+  <dgm:styleLbl name="parChTrans2D4">
+    <dgm:fillClrLst meth="repeat">
+      <a:schemeClr val="accent1"/>
+    </dgm:fillClrLst>
+    <dgm:linClrLst meth="repeat">
+      <a:schemeClr val="accent1"/>
+    </dgm:linClrLst>
+    <dgm:effectClrLst/>
+    <dgm:txLinClrLst/>
+    <dgm:txFillClrLst meth="repeat">
+      <a:schemeClr val="lt1"/>
+    </dgm:txFillClrLst>
+    <dgm:txEffectClrLst/>
+  </dgm:styleLbl>
+  <dgm:styleLbl name="parChTrans1D1">
+    <dgm:fillClrLst meth="repeat">
+      <a:schemeClr val="accent1"/>
+    </dgm:fillClrLst>
+    <dgm:linClrLst meth="repeat">
+      <a:schemeClr val="accent1">
+        <a:shade val="60000"/>
+      </a:schemeClr>
+    </dgm:linClrLst>
+    <dgm:effectClrLst/>
+    <dgm:txLinClrLst/>
+    <dgm:txFillClrLst meth="repeat">
+      <a:schemeClr val="tx1"/>
+    </dgm:txFillClrLst>
+    <dgm:txEffectClrLst/>
+  </dgm:styleLbl>
+  <dgm:styleLbl name="parChTrans1D2">
+    <dgm:fillClrLst meth="repeat">
+      <a:schemeClr val="accent1"/>
+    </dgm:fillClrLst>
+    <dgm:linClrLst meth="repeat">
+      <a:schemeClr val="accent1">
+        <a:shade val="60000"/>
+      </a:schemeClr>
+    </dgm:linClrLst>
+    <dgm:effectClrLst/>
+    <dgm:txLinClrLst/>
+    <dgm:txFillClrLst meth="repeat">
+      <a:schemeClr val="tx1"/>
+    </dgm:txFillClrLst>
+    <dgm:txEffectClrLst/>
+  </dgm:styleLbl>
+  <dgm:styleLbl name="parChTrans1D3">
+    <dgm:fillClrLst meth="repeat">
+      <a:schemeClr val="accent1"/>
+    </dgm:fillClrLst>
+    <dgm:linClrLst meth="repeat">
+      <a:schemeClr val="accent1">
+        <a:shade val="80000"/>
+      </a:schemeClr>
+    </dgm:linClrLst>
+    <dgm:effectClrLst/>
+    <dgm:txLinClrLst/>
+    <dgm:txFillClrLst meth="repeat">
+      <a:schemeClr val="tx1"/>
+    </dgm:txFillClrLst>
+    <dgm:txEffectClrLst/>
+  </dgm:styleLbl>
+  <dgm:styleLbl name="parChTrans1D4">
+    <dgm:fillClrLst meth="repeat">
+      <a:schemeClr val="accent1"/>
+    </dgm:fillClrLst>
+    <dgm:linClrLst meth="repeat">
+      <a:schemeClr val="accent1">
+        <a:shade val="80000"/>
+      </a:schemeClr>
+    </dgm:linClrLst>
+    <dgm:effectClrLst/>
+    <dgm:txLinClrLst/>
+    <dgm:txFillClrLst meth="repeat">
+      <a:schemeClr val="tx1"/>
+    </dgm:txFillClrLst>
+    <dgm:txEffectClrLst/>
+  </dgm:styleLbl>
+  <dgm:styleLbl name="fgAcc1">
+    <dgm:fillClrLst meth="repeat">
+      <a:schemeClr val="lt1">
+        <a:alpha val="90000"/>
+      </a:schemeClr>
+    </dgm:fillClrLst>
+    <dgm:linClrLst meth="repeat">
+      <a:schemeClr val="accent1"/>
+    </dgm:linClrLst>
+    <dgm:effectClrLst/>
+    <dgm:txLinClrLst/>
+    <dgm:txFillClrLst meth="repeat">
+      <a:schemeClr val="dk1"/>
+    </dgm:txFillClrLst>
+    <dgm:txEffectClrLst/>
+  </dgm:styleLbl>
+  <dgm:styleLbl name="conFgAcc1">
+    <dgm:fillClrLst meth="repeat">
+      <a:schemeClr val="lt1">
+        <a:alpha val="90000"/>
+      </a:schemeClr>
+    </dgm:fillClrLst>
+    <dgm:linClrLst meth="repeat">
+      <a:schemeClr val="accent1"/>
+    </dgm:linClrLst>
+    <dgm:effectClrLst/>
+    <dgm:txLinClrLst/>
+    <dgm:txFillClrLst meth="repeat">
+      <a:schemeClr val="dk1"/>
+    </dgm:txFillClrLst>
+    <dgm:txEffectClrLst/>
+  </dgm:styleLbl>
+  <dgm:styleLbl name="alignAcc1">
+    <dgm:fillClrLst meth="repeat">
+      <a:schemeClr val="lt1">
+        <a:alpha val="90000"/>
+      </a:schemeClr>
+    </dgm:fillClrLst>
+    <dgm:linClrLst meth="repeat">
+      <a:schemeClr val="accent1"/>
+    </dgm:linClrLst>
+    <dgm:effectClrLst/>
+    <dgm:txLinClrLst/>
+    <dgm:txFillClrLst meth="repeat">
+      <a:schemeClr val="dk1"/>
+    </dgm:txFillClrLst>
+    <dgm:txEffectClrLst/>
+  </dgm:styleLbl>
+  <dgm:styleLbl name="trAlignAcc1">
+    <dgm:fillClrLst meth="repeat">
+      <a:schemeClr val="lt1">
+        <a:alpha val="40000"/>
+      </a:schemeClr>
+    </dgm:fillClrLst>
+    <dgm:linClrLst meth="repeat">
+      <a:schemeClr val="accent1"/>
+    </dgm:linClrLst>
+    <dgm:effectClrLst/>
+    <dgm:txLinClrLst/>
+    <dgm:txFillClrLst meth="repeat">
+      <a:schemeClr val="dk1"/>
+    </dgm:txFillClrLst>
+    <dgm:txEffectClrLst/>
+  </dgm:styleLbl>
+  <dgm:styleLbl name="bgAcc1">
+    <dgm:fillClrLst meth="repeat">
+      <a:schemeClr val="lt1">
+        <a:alpha val="90000"/>
+      </a:schemeClr>
+    </dgm:fillClrLst>
+    <dgm:linClrLst meth="repeat">
+      <a:schemeClr val="accent1"/>
+    </dgm:linClrLst>
+    <dgm:effectClrLst/>
+    <dgm:txLinClrLst/>
+    <dgm:txFillClrLst meth="repeat">
+      <a:schemeClr val="dk1"/>
+    </dgm:txFillClrLst>
+    <dgm:txEffectClrLst/>
+  </dgm:styleLbl>
+  <dgm:styleLbl name="solidFgAcc1">
+    <dgm:fillClrLst meth="repeat">
+      <a:schemeClr val="lt1"/>
+    </dgm:fillClrLst>
+    <dgm:linClrLst meth="repeat">
+      <a:schemeClr val="accent1"/>
+    </dgm:linClrLst>
+    <dgm:effectClrLst/>
+    <dgm:txLinClrLst/>
+    <dgm:txFillClrLst meth="repeat">
+      <a:schemeClr val="dk1"/>
+    </dgm:txFillClrLst>
+    <dgm:txEffectClrLst/>
+  </dgm:styleLbl>
+  <dgm:styleLbl name="solidAlignAcc1">
+    <dgm:fillClrLst meth="repeat">
+      <a:schemeClr val="lt1"/>
+    </dgm:fillClrLst>
+    <dgm:linClrLst meth="repeat">
+      <a:schemeClr val="accent1"/>
+    </dgm:linClrLst>
+    <dgm:effectClrLst/>
+    <dgm:txLinClrLst/>
+    <dgm:txFillClrLst meth="repeat">
+      <a:schemeClr val="dk1"/>
+    </dgm:txFillClrLst>
+    <dgm:txEffectClrLst/>
+  </dgm:styleLbl>
+  <dgm:styleLbl name="solidBgAcc1">
+    <dgm:fillClrLst meth="repeat">
+      <a:schemeClr val="lt1"/>
+    </dgm:fillClrLst>
+    <dgm:linClrLst meth="repeat">
+      <a:schemeClr val="accent1"/>
+    </dgm:linClrLst>
+    <dgm:effectClrLst/>
+    <dgm:txLinClrLst/>
+    <dgm:txFillClrLst meth="repeat">
+      <a:schemeClr val="dk1"/>
+    </dgm:txFillClrLst>
+    <dgm:txEffectClrLst/>
+  </dgm:styleLbl>
+  <dgm:styleLbl name="fgAccFollowNode1">
+    <dgm:fillClrLst meth="repeat">
+      <a:schemeClr val="accent1">
+        <a:alpha val="90000"/>
+        <a:tint val="40000"/>
+      </a:schemeClr>
+    </dgm:fillClrLst>
+    <dgm:linClrLst meth="repeat">
+      <a:schemeClr val="accent1">
+        <a:alpha val="90000"/>
+        <a:tint val="40000"/>
+      </a:schemeClr>
+    </dgm:linClrLst>
+    <dgm:effectClrLst/>
+    <dgm:txLinClrLst/>
+    <dgm:txFillClrLst meth="repeat">
+      <a:schemeClr val="dk1"/>
+    </dgm:txFillClrLst>
+    <dgm:txEffectClrLst/>
+  </dgm:styleLbl>
+  <dgm:styleLbl name="alignAccFollowNode1">
+    <dgm:fillClrLst meth="repeat">
+      <a:schemeClr val="accent1">
+        <a:alpha val="90000"/>
+        <a:tint val="40000"/>
+      </a:schemeClr>
+    </dgm:fillClrLst>
+    <dgm:linClrLst meth="repeat">
+      <a:schemeClr val="accent1">
+        <a:alpha val="90000"/>
+        <a:tint val="40000"/>
+      </a:schemeClr>
+    </dgm:linClrLst>
+    <dgm:effectClrLst/>
+    <dgm:txLinClrLst/>
+    <dgm:txFillClrLst meth="repeat">
+      <a:schemeClr val="dk1"/>
+    </dgm:txFillClrLst>
+    <dgm:txEffectClrLst/>
+  </dgm:styleLbl>
+  <dgm:styleLbl name="bgAccFollowNode1">
+    <dgm:fillClrLst meth="repeat">
+      <a:schemeClr val="accent1">
+        <a:alpha val="90000"/>
+        <a:tint val="40000"/>
+      </a:schemeClr>
+    </dgm:fillClrLst>
+    <dgm:linClrLst meth="repeat">
+      <a:schemeClr val="accent1">
+        <a:alpha val="90000"/>
+        <a:tint val="40000"/>
+      </a:schemeClr>
+    </dgm:linClrLst>
+    <dgm:effectClrLst/>
+    <dgm:txLinClrLst/>
+    <dgm:txFillClrLst meth="repeat">
+      <a:schemeClr val="dk1"/>
+    </dgm:txFillClrLst>
+    <dgm:txEffectClrLst/>
+  </dgm:styleLbl>
+  <dgm:styleLbl name="fgAcc0">
+    <dgm:fillClrLst meth="repeat">
+      <a:schemeClr val="lt1">
+        <a:alpha val="90000"/>
+      </a:schemeClr>
+    </dgm:fillClrLst>
+    <dgm:linClrLst meth="repeat">
+      <a:schemeClr val="accent1"/>
+    </dgm:linClrLst>
+    <dgm:effectClrLst/>
+    <dgm:txLinClrLst/>
+    <dgm:txFillClrLst meth="repeat">
+      <a:schemeClr val="dk1"/>
+    </dgm:txFillClrLst>
+    <dgm:txEffectClrLst/>
+  </dgm:styleLbl>
+  <dgm:styleLbl name="fgAcc2">
+    <dgm:fillClrLst meth="repeat">
+      <a:schemeClr val="lt1">
+        <a:alpha val="90000"/>
+      </a:schemeClr>
+    </dgm:fillClrLst>
+    <dgm:linClrLst meth="repeat">
+      <a:schemeClr val="accent1"/>
+    </dgm:linClrLst>
+    <dgm:effectClrLst/>
+    <dgm:txLinClrLst/>
+    <dgm:txFillClrLst meth="repeat">
+      <a:schemeClr val="dk1"/>
+    </dgm:txFillClrLst>
+    <dgm:txEffectClrLst/>
+  </dgm:styleLbl>
+  <dgm:styleLbl name="fgAcc3">
+    <dgm:fillClrLst meth="repeat">
+      <a:schemeClr val="lt1">
+        <a:alpha val="90000"/>
+      </a:schemeClr>
+    </dgm:fillClrLst>
+    <dgm:linClrLst meth="repeat">
+      <a:schemeClr val="accent1"/>
+    </dgm:linClrLst>
+    <dgm:effectClrLst/>
+    <dgm:txLinClrLst/>
+    <dgm:txFillClrLst meth="repeat">
+      <a:schemeClr val="dk1"/>
+    </dgm:txFillClrLst>
+    <dgm:txEffectClrLst/>
+  </dgm:styleLbl>
+  <dgm:styleLbl name="fgAcc4">
+    <dgm:fillClrLst meth="repeat">
+      <a:schemeClr val="lt1">
+        <a:alpha val="90000"/>
+      </a:schemeClr>
+    </dgm:fillClrLst>
+    <dgm:linClrLst meth="repeat">
+      <a:schemeClr val="accent1"/>
+    </dgm:linClrLst>
+    <dgm:effectClrLst/>
+    <dgm:txLinClrLst/>
+    <dgm:txFillClrLst meth="repeat">
+      <a:schemeClr val="dk1"/>
+    </dgm:txFillClrLst>
+    <dgm:txEffectClrLst/>
+  </dgm:styleLbl>
+  <dgm:styleLbl name="bgShp">
+    <dgm:fillClrLst meth="repeat">
+      <a:schemeClr val="accent1">
+        <a:tint val="40000"/>
+      </a:schemeClr>
+    </dgm:fillClrLst>
+    <dgm:linClrLst meth="repeat">
+      <a:schemeClr val="accent1"/>
+    </dgm:linClrLst>
+    <dgm:effectClrLst/>
+    <dgm:txLinClrLst/>
+    <dgm:txFillClrLst meth="repeat">
+      <a:schemeClr val="dk1"/>
+    </dgm:txFillClrLst>
+    <dgm:txEffectClrLst/>
+  </dgm:styleLbl>
+  <dgm:styleLbl name="dkBgShp">
+    <dgm:fillClrLst meth="repeat">
+      <a:schemeClr val="accent1">
+        <a:shade val="80000"/>
+      </a:schemeClr>
+    </dgm:fillClrLst>
+    <dgm:linClrLst meth="repeat">
+      <a:schemeClr val="accent1"/>
+    </dgm:linClrLst>
+    <dgm:effectClrLst/>
+    <dgm:txLinClrLst/>
+    <dgm:txFillClrLst meth="repeat">
+      <a:schemeClr val="lt1"/>
+    </dgm:txFillClrLst>
+    <dgm:txEffectClrLst/>
+  </dgm:styleLbl>
+  <dgm:styleLbl name="trBgShp">
+    <dgm:fillClrLst meth="repeat">
+      <a:schemeClr val="accent1">
+        <a:tint val="50000"/>
+        <a:alpha val="40000"/>
+      </a:schemeClr>
+    </dgm:fillClrLst>
+    <dgm:linClrLst meth="repeat">
+      <a:schemeClr val="accent1"/>
+    </dgm:linClrLst>
+    <dgm:effectClrLst/>
+    <dgm:txLinClrLst/>
+    <dgm:txFillClrLst meth="repeat">
+      <a:schemeClr val="lt1"/>
+    </dgm:txFillClrLst>
+    <dgm:txEffectClrLst/>
+  </dgm:styleLbl>
+  <dgm:styleLbl name="fgShp">
+    <dgm:fillClrLst meth="repeat">
+      <a:schemeClr val="accent1">
+        <a:tint val="60000"/>
+      </a:schemeClr>
+    </dgm:fillClrLst>
+    <dgm:linClrLst meth="repeat">
+      <a:schemeClr val="lt1"/>
+    </dgm:linClrLst>
+    <dgm:effectClrLst/>
+    <dgm:txLinClrLst/>
+    <dgm:txFillClrLst meth="repeat">
+      <a:schemeClr val="dk1"/>
+    </dgm:txFillClrLst>
+    <dgm:txEffectClrLst/>
+  </dgm:styleLbl>
+  <dgm:styleLbl name="revTx">
+    <dgm:fillClrLst meth="repeat">
+      <a:schemeClr val="lt1">
+        <a:alpha val="0"/>
+      </a:schemeClr>
+    </dgm:fillClrLst>
+    <dgm:linClrLst meth="repeat">
+      <a:schemeClr val="dk1">
+        <a:alpha val="0"/>
+      </a:schemeClr>
+    </dgm:linClrLst>
+    <dgm:effectClrLst/>
+    <dgm:txLinClrLst/>
+    <dgm:txFillClrLst meth="repeat">
+      <a:schemeClr val="tx1"/>
+    </dgm:txFillClrLst>
+    <dgm:txEffectClrLst/>
+  </dgm:styleLbl>
+</dgm:colorsDef>
+</file>
+
+<file path=ppt/diagrams/data1.xml><?xml version="1.0" encoding="utf-8"?>
+<dgm:dataModel xmlns:dgm="http://schemas.openxmlformats.org/drawingml/2006/diagram" xmlns:a="http://schemas.openxmlformats.org/drawingml/2006/main">
+  <dgm:ptLst>
+    <dgm:pt modelId="{5A4D45CF-631C-4226-A974-26D4550DF39C}" type="doc">
+      <dgm:prSet loTypeId="urn:microsoft.com/office/officeart/2018/2/layout/IconLabelList" loCatId="icon" qsTypeId="urn:microsoft.com/office/officeart/2005/8/quickstyle/simple1" qsCatId="simple" csTypeId="urn:microsoft.com/office/officeart/2005/8/colors/accent1_2" csCatId="accent1" phldr="1"/>
+      <dgm:spPr/>
+      <dgm:t>
+        <a:bodyPr/>
+        <a:lstStyle/>
+        <a:p>
+          <a:endParaRPr lang="en-US"/>
+        </a:p>
+      </dgm:t>
+    </dgm:pt>
+    <dgm:pt modelId="{AF7F1088-D2AD-4611-9A04-4F9AF9706E11}">
+      <dgm:prSet/>
+      <dgm:spPr/>
+      <dgm:t>
+        <a:bodyPr/>
+        <a:lstStyle/>
+        <a:p>
+          <a:pPr>
+            <a:lnSpc>
+              <a:spcPct val="100000"/>
+            </a:lnSpc>
+          </a:pPr>
+          <a:r>
+            <a:rPr lang="en-US"/>
+            <a:t>Admins kunnen quizen maken.</a:t>
+          </a:r>
+        </a:p>
+      </dgm:t>
+    </dgm:pt>
+    <dgm:pt modelId="{1BEC6A4B-2D58-4504-8ABE-2BBB7727DF66}" type="parTrans" cxnId="{5BF24F16-4FEB-4F47-83D4-B7A49AB566A7}">
+      <dgm:prSet/>
+      <dgm:spPr/>
+      <dgm:t>
+        <a:bodyPr/>
+        <a:lstStyle/>
+        <a:p>
+          <a:endParaRPr lang="en-US"/>
+        </a:p>
+      </dgm:t>
+    </dgm:pt>
+    <dgm:pt modelId="{B5CAE8D6-3409-4C29-AC1C-B7DB72637DD3}" type="sibTrans" cxnId="{5BF24F16-4FEB-4F47-83D4-B7A49AB566A7}">
+      <dgm:prSet/>
+      <dgm:spPr/>
+      <dgm:t>
+        <a:bodyPr/>
+        <a:lstStyle/>
+        <a:p>
+          <a:endParaRPr lang="en-US"/>
+        </a:p>
+      </dgm:t>
+    </dgm:pt>
+    <dgm:pt modelId="{47F056FA-24F5-49BE-9B90-60B744D59CAC}">
+      <dgm:prSet/>
+      <dgm:spPr/>
+      <dgm:t>
+        <a:bodyPr/>
+        <a:lstStyle/>
+        <a:p>
+          <a:pPr>
+            <a:lnSpc>
+              <a:spcPct val="100000"/>
+            </a:lnSpc>
+          </a:pPr>
+          <a:r>
+            <a:rPr lang="en-US"/>
+            <a:t>Admins kunnen gemaakte quizen aanpassen en of verwijderen.</a:t>
+          </a:r>
+        </a:p>
+      </dgm:t>
+    </dgm:pt>
+    <dgm:pt modelId="{27AB0806-A4B8-4387-96F3-CD8B8D83D576}" type="parTrans" cxnId="{C55C5DCC-6089-4265-8D2D-6FDEC3C46CC0}">
+      <dgm:prSet/>
+      <dgm:spPr/>
+      <dgm:t>
+        <a:bodyPr/>
+        <a:lstStyle/>
+        <a:p>
+          <a:endParaRPr lang="en-US"/>
+        </a:p>
+      </dgm:t>
+    </dgm:pt>
+    <dgm:pt modelId="{FB07B7D5-13E7-44FA-8F4D-D1AC080BEF4D}" type="sibTrans" cxnId="{C55C5DCC-6089-4265-8D2D-6FDEC3C46CC0}">
+      <dgm:prSet/>
+      <dgm:spPr/>
+      <dgm:t>
+        <a:bodyPr/>
+        <a:lstStyle/>
+        <a:p>
+          <a:endParaRPr lang="en-US"/>
+        </a:p>
+      </dgm:t>
+    </dgm:pt>
+    <dgm:pt modelId="{BD8134ED-F098-4613-ACFF-175B5B4209B9}" type="pres">
+      <dgm:prSet presAssocID="{5A4D45CF-631C-4226-A974-26D4550DF39C}" presName="root" presStyleCnt="0">
+        <dgm:presLayoutVars>
+          <dgm:dir/>
+          <dgm:resizeHandles val="exact"/>
+        </dgm:presLayoutVars>
+      </dgm:prSet>
+      <dgm:spPr/>
+    </dgm:pt>
+    <dgm:pt modelId="{5852BCD8-F379-428E-A7EC-725ABE102F0C}" type="pres">
+      <dgm:prSet presAssocID="{AF7F1088-D2AD-4611-9A04-4F9AF9706E11}" presName="compNode" presStyleCnt="0"/>
+      <dgm:spPr/>
+    </dgm:pt>
+    <dgm:pt modelId="{D097A405-0AE3-49ED-8247-AF2090D2F247}" type="pres">
+      <dgm:prSet presAssocID="{AF7F1088-D2AD-4611-9A04-4F9AF9706E11}" presName="iconRect" presStyleLbl="node1" presStyleIdx="0" presStyleCnt="2"/>
+      <dgm:spPr>
+        <a:blipFill>
+          <a:blip xmlns:r="http://schemas.openxmlformats.org/officeDocument/2006/relationships" r:embed="rId1">
+            <a:extLst>
+              <a:ext uri="{28A0092B-C50C-407E-A947-70E740481C1C}">
+                <a14:useLocalDpi xmlns:a14="http://schemas.microsoft.com/office/drawing/2010/main" val="0"/>
+              </a:ext>
+              <a:ext uri="{96DAC541-7B7A-43D3-8B79-37D633B846F1}">
+                <asvg:svgBlip xmlns:asvg="http://schemas.microsoft.com/office/drawing/2016/SVG/main" r:embed="rId2"/>
+              </a:ext>
+            </a:extLst>
+          </a:blip>
+          <a:stretch>
+            <a:fillRect/>
+          </a:stretch>
+        </a:blipFill>
+      </dgm:spPr>
+      <dgm:extLst>
+        <a:ext uri="{E40237B7-FDA0-4F09-8148-C483321AD2D9}">
+          <dgm14:cNvPr xmlns:dgm14="http://schemas.microsoft.com/office/drawing/2010/diagram" id="0" name="" descr="Share With Person"/>
+        </a:ext>
+      </dgm:extLst>
+    </dgm:pt>
+    <dgm:pt modelId="{378CFC4C-BA0E-46DB-B670-A13FB2CE0184}" type="pres">
+      <dgm:prSet presAssocID="{AF7F1088-D2AD-4611-9A04-4F9AF9706E11}" presName="spaceRect" presStyleCnt="0"/>
+      <dgm:spPr/>
+    </dgm:pt>
+    <dgm:pt modelId="{269580B7-634F-4010-A755-BEF22689975A}" type="pres">
+      <dgm:prSet presAssocID="{AF7F1088-D2AD-4611-9A04-4F9AF9706E11}" presName="textRect" presStyleLbl="revTx" presStyleIdx="0" presStyleCnt="2">
+        <dgm:presLayoutVars>
+          <dgm:chMax val="1"/>
+          <dgm:chPref val="1"/>
+        </dgm:presLayoutVars>
+      </dgm:prSet>
+      <dgm:spPr/>
+    </dgm:pt>
+    <dgm:pt modelId="{DF9B1551-66FC-455B-B608-966A3F99E1DF}" type="pres">
+      <dgm:prSet presAssocID="{B5CAE8D6-3409-4C29-AC1C-B7DB72637DD3}" presName="sibTrans" presStyleCnt="0"/>
+      <dgm:spPr/>
+    </dgm:pt>
+    <dgm:pt modelId="{F131A7E6-B0D4-40A0-8764-559470062CBE}" type="pres">
+      <dgm:prSet presAssocID="{47F056FA-24F5-49BE-9B90-60B744D59CAC}" presName="compNode" presStyleCnt="0"/>
+      <dgm:spPr/>
+    </dgm:pt>
+    <dgm:pt modelId="{0B6B4423-B703-47DB-B5FB-0B106FF99355}" type="pres">
+      <dgm:prSet presAssocID="{47F056FA-24F5-49BE-9B90-60B744D59CAC}" presName="iconRect" presStyleLbl="node1" presStyleIdx="1" presStyleCnt="2"/>
+      <dgm:spPr>
+        <a:blipFill>
+          <a:blip xmlns:r="http://schemas.openxmlformats.org/officeDocument/2006/relationships" r:embed="rId3">
+            <a:extLst>
+              <a:ext uri="{28A0092B-C50C-407E-A947-70E740481C1C}">
+                <a14:useLocalDpi xmlns:a14="http://schemas.microsoft.com/office/drawing/2010/main" val="0"/>
+              </a:ext>
+              <a:ext uri="{96DAC541-7B7A-43D3-8B79-37D633B846F1}">
+                <asvg:svgBlip xmlns:asvg="http://schemas.microsoft.com/office/drawing/2016/SVG/main" r:embed="rId4"/>
+              </a:ext>
+            </a:extLst>
+          </a:blip>
+          <a:stretch>
+            <a:fillRect/>
+          </a:stretch>
+        </a:blipFill>
+      </dgm:spPr>
+      <dgm:extLst>
+        <a:ext uri="{E40237B7-FDA0-4F09-8148-C483321AD2D9}">
+          <dgm14:cNvPr xmlns:dgm14="http://schemas.microsoft.com/office/drawing/2010/diagram" id="0" name="" descr="Web Design"/>
+        </a:ext>
+      </dgm:extLst>
+    </dgm:pt>
+    <dgm:pt modelId="{1FC2F058-990D-45AF-A9CC-3C16AD7277D5}" type="pres">
+      <dgm:prSet presAssocID="{47F056FA-24F5-49BE-9B90-60B744D59CAC}" presName="spaceRect" presStyleCnt="0"/>
+      <dgm:spPr/>
+    </dgm:pt>
+    <dgm:pt modelId="{3C37B81A-F44C-4CE6-814D-E07F4D69124B}" type="pres">
+      <dgm:prSet presAssocID="{47F056FA-24F5-49BE-9B90-60B744D59CAC}" presName="textRect" presStyleLbl="revTx" presStyleIdx="1" presStyleCnt="2">
+        <dgm:presLayoutVars>
+          <dgm:chMax val="1"/>
+          <dgm:chPref val="1"/>
+        </dgm:presLayoutVars>
+      </dgm:prSet>
+      <dgm:spPr/>
+    </dgm:pt>
+  </dgm:ptLst>
+  <dgm:cxnLst>
+    <dgm:cxn modelId="{5BF24F16-4FEB-4F47-83D4-B7A49AB566A7}" srcId="{5A4D45CF-631C-4226-A974-26D4550DF39C}" destId="{AF7F1088-D2AD-4611-9A04-4F9AF9706E11}" srcOrd="0" destOrd="0" parTransId="{1BEC6A4B-2D58-4504-8ABE-2BBB7727DF66}" sibTransId="{B5CAE8D6-3409-4C29-AC1C-B7DB72637DD3}"/>
+    <dgm:cxn modelId="{4A7BD621-B869-4680-A9E3-E1AB2C3339AA}" type="presOf" srcId="{47F056FA-24F5-49BE-9B90-60B744D59CAC}" destId="{3C37B81A-F44C-4CE6-814D-E07F4D69124B}" srcOrd="0" destOrd="0" presId="urn:microsoft.com/office/officeart/2018/2/layout/IconLabelList"/>
+    <dgm:cxn modelId="{E4FEC066-A292-4888-975D-A8B600760ED0}" type="presOf" srcId="{AF7F1088-D2AD-4611-9A04-4F9AF9706E11}" destId="{269580B7-634F-4010-A755-BEF22689975A}" srcOrd="0" destOrd="0" presId="urn:microsoft.com/office/officeart/2018/2/layout/IconLabelList"/>
+    <dgm:cxn modelId="{C55C5DCC-6089-4265-8D2D-6FDEC3C46CC0}" srcId="{5A4D45CF-631C-4226-A974-26D4550DF39C}" destId="{47F056FA-24F5-49BE-9B90-60B744D59CAC}" srcOrd="1" destOrd="0" parTransId="{27AB0806-A4B8-4387-96F3-CD8B8D83D576}" sibTransId="{FB07B7D5-13E7-44FA-8F4D-D1AC080BEF4D}"/>
+    <dgm:cxn modelId="{9E5FCADA-A34A-4889-8182-E9B71D8F1AE2}" type="presOf" srcId="{5A4D45CF-631C-4226-A974-26D4550DF39C}" destId="{BD8134ED-F098-4613-ACFF-175B5B4209B9}" srcOrd="0" destOrd="0" presId="urn:microsoft.com/office/officeart/2018/2/layout/IconLabelList"/>
+    <dgm:cxn modelId="{93FB51D7-6337-4227-A9CF-86DBFA50B143}" type="presParOf" srcId="{BD8134ED-F098-4613-ACFF-175B5B4209B9}" destId="{5852BCD8-F379-428E-A7EC-725ABE102F0C}" srcOrd="0" destOrd="0" presId="urn:microsoft.com/office/officeart/2018/2/layout/IconLabelList"/>
+    <dgm:cxn modelId="{6CDF6188-7481-449A-B61D-33BFF8899318}" type="presParOf" srcId="{5852BCD8-F379-428E-A7EC-725ABE102F0C}" destId="{D097A405-0AE3-49ED-8247-AF2090D2F247}" srcOrd="0" destOrd="0" presId="urn:microsoft.com/office/officeart/2018/2/layout/IconLabelList"/>
+    <dgm:cxn modelId="{BF29BC54-0006-4803-9CED-E2EEA746C915}" type="presParOf" srcId="{5852BCD8-F379-428E-A7EC-725ABE102F0C}" destId="{378CFC4C-BA0E-46DB-B670-A13FB2CE0184}" srcOrd="1" destOrd="0" presId="urn:microsoft.com/office/officeart/2018/2/layout/IconLabelList"/>
+    <dgm:cxn modelId="{E00629D1-5D39-4812-8E20-61AC41BEB4B0}" type="presParOf" srcId="{5852BCD8-F379-428E-A7EC-725ABE102F0C}" destId="{269580B7-634F-4010-A755-BEF22689975A}" srcOrd="2" destOrd="0" presId="urn:microsoft.com/office/officeart/2018/2/layout/IconLabelList"/>
+    <dgm:cxn modelId="{6342B2D6-51ED-437E-AC6E-D9E7BBAF37B3}" type="presParOf" srcId="{BD8134ED-F098-4613-ACFF-175B5B4209B9}" destId="{DF9B1551-66FC-455B-B608-966A3F99E1DF}" srcOrd="1" destOrd="0" presId="urn:microsoft.com/office/officeart/2018/2/layout/IconLabelList"/>
+    <dgm:cxn modelId="{1A0A249A-ADFC-481C-B80F-DFAB2FB11A6D}" type="presParOf" srcId="{BD8134ED-F098-4613-ACFF-175B5B4209B9}" destId="{F131A7E6-B0D4-40A0-8764-559470062CBE}" srcOrd="2" destOrd="0" presId="urn:microsoft.com/office/officeart/2018/2/layout/IconLabelList"/>
+    <dgm:cxn modelId="{5144F4D1-E54F-48E5-9C25-9971E1918C74}" type="presParOf" srcId="{F131A7E6-B0D4-40A0-8764-559470062CBE}" destId="{0B6B4423-B703-47DB-B5FB-0B106FF99355}" srcOrd="0" destOrd="0" presId="urn:microsoft.com/office/officeart/2018/2/layout/IconLabelList"/>
+    <dgm:cxn modelId="{30D8D1E2-A4B0-4986-884C-AFC51FF188D5}" type="presParOf" srcId="{F131A7E6-B0D4-40A0-8764-559470062CBE}" destId="{1FC2F058-990D-45AF-A9CC-3C16AD7277D5}" srcOrd="1" destOrd="0" presId="urn:microsoft.com/office/officeart/2018/2/layout/IconLabelList"/>
+    <dgm:cxn modelId="{DA479D7C-0AD2-45AA-AD1F-A6184193545E}" type="presParOf" srcId="{F131A7E6-B0D4-40A0-8764-559470062CBE}" destId="{3C37B81A-F44C-4CE6-814D-E07F4D69124B}" srcOrd="2" destOrd="0" presId="urn:microsoft.com/office/officeart/2018/2/layout/IconLabelList"/>
+  </dgm:cxnLst>
+  <dgm:bg/>
+  <dgm:whole/>
+  <dgm:extLst>
+    <a:ext uri="http://schemas.microsoft.com/office/drawing/2008/diagram">
+      <dsp:dataModelExt xmlns:dsp="http://schemas.microsoft.com/office/drawing/2008/diagram" relId="rId6" minVer="http://schemas.openxmlformats.org/drawingml/2006/diagram"/>
+    </a:ext>
+  </dgm:extLst>
+</dgm:dataModel>
+</file>
+
+<file path=ppt/diagrams/drawing1.xml><?xml version="1.0" encoding="utf-8"?>
+<dsp:drawing xmlns:dgm="http://schemas.openxmlformats.org/drawingml/2006/diagram" xmlns:dsp="http://schemas.microsoft.com/office/drawing/2008/diagram" xmlns:a="http://schemas.openxmlformats.org/drawingml/2006/main">
+  <dsp:spTree>
+    <dsp:nvGrpSpPr>
+      <dsp:cNvPr id="0" name=""/>
+      <dsp:cNvGrpSpPr/>
+    </dsp:nvGrpSpPr>
+    <dsp:grpSpPr/>
+    <dsp:sp modelId="{D097A405-0AE3-49ED-8247-AF2090D2F247}">
+      <dsp:nvSpPr>
+        <dsp:cNvPr id="0" name=""/>
+        <dsp:cNvSpPr/>
+      </dsp:nvSpPr>
+      <dsp:spPr>
+        <a:xfrm>
+          <a:off x="1854162" y="46442"/>
+          <a:ext cx="1944000" cy="1944000"/>
+        </a:xfrm>
+        <a:prstGeom prst="rect">
+          <a:avLst/>
+        </a:prstGeom>
+        <a:blipFill>
+          <a:blip xmlns:r="http://schemas.openxmlformats.org/officeDocument/2006/relationships" r:embed="rId1">
+            <a:extLst>
+              <a:ext uri="{28A0092B-C50C-407E-A947-70E740481C1C}">
+                <a14:useLocalDpi xmlns:a14="http://schemas.microsoft.com/office/drawing/2010/main" val="0"/>
+              </a:ext>
+              <a:ext uri="{96DAC541-7B7A-43D3-8B79-37D633B846F1}">
+                <asvg:svgBlip xmlns:asvg="http://schemas.microsoft.com/office/drawing/2016/SVG/main" r:embed="rId2"/>
+              </a:ext>
+            </a:extLst>
+          </a:blip>
+          <a:stretch>
+            <a:fillRect/>
+          </a:stretch>
+        </a:blipFill>
+        <a:ln w="12700" cap="flat" cmpd="sng" algn="ctr">
+          <a:solidFill>
+            <a:schemeClr val="lt1">
+              <a:hueOff val="0"/>
+              <a:satOff val="0"/>
+              <a:lumOff val="0"/>
+              <a:alphaOff val="0"/>
+            </a:schemeClr>
+          </a:solidFill>
+          <a:prstDash val="solid"/>
+          <a:miter lim="800000"/>
+        </a:ln>
+        <a:effectLst/>
+      </dsp:spPr>
+      <dsp:style>
+        <a:lnRef idx="2">
+          <a:scrgbClr r="0" g="0" b="0"/>
+        </a:lnRef>
+        <a:fillRef idx="1">
+          <a:scrgbClr r="0" g="0" b="0"/>
+        </a:fillRef>
+        <a:effectRef idx="0">
+          <a:scrgbClr r="0" g="0" b="0"/>
+        </a:effectRef>
+        <a:fontRef idx="minor">
+          <a:schemeClr val="lt1"/>
+        </a:fontRef>
+      </dsp:style>
+    </dsp:sp>
+    <dsp:sp modelId="{269580B7-634F-4010-A755-BEF22689975A}">
+      <dsp:nvSpPr>
+        <dsp:cNvPr id="0" name=""/>
+        <dsp:cNvSpPr/>
+      </dsp:nvSpPr>
+      <dsp:spPr>
+        <a:xfrm>
+          <a:off x="666162" y="2460932"/>
+          <a:ext cx="4320000" cy="720000"/>
+        </a:xfrm>
+        <a:prstGeom prst="rect">
+          <a:avLst/>
+        </a:prstGeom>
+        <a:noFill/>
+        <a:ln>
+          <a:noFill/>
+        </a:ln>
+        <a:effectLst/>
+      </dsp:spPr>
+      <dsp:style>
+        <a:lnRef idx="0">
+          <a:scrgbClr r="0" g="0" b="0"/>
+        </a:lnRef>
+        <a:fillRef idx="0">
+          <a:scrgbClr r="0" g="0" b="0"/>
+        </a:fillRef>
+        <a:effectRef idx="0">
+          <a:scrgbClr r="0" g="0" b="0"/>
+        </a:effectRef>
+        <a:fontRef idx="minor"/>
+      </dsp:style>
+      <dsp:txBody>
+        <a:bodyPr spcFirstLastPara="0" vert="horz" wrap="square" lIns="0" tIns="0" rIns="0" bIns="0" numCol="1" spcCol="1270" anchor="t" anchorCtr="0">
+          <a:noAutofit/>
+        </a:bodyPr>
+        <a:lstStyle/>
+        <a:p>
+          <a:pPr marL="0" lvl="0" indent="0" algn="ctr" defTabSz="977900">
+            <a:lnSpc>
+              <a:spcPct val="100000"/>
+            </a:lnSpc>
+            <a:spcBef>
+              <a:spcPct val="0"/>
+            </a:spcBef>
+            <a:spcAft>
+              <a:spcPct val="35000"/>
+            </a:spcAft>
+            <a:buNone/>
+          </a:pPr>
+          <a:r>
+            <a:rPr lang="en-US" sz="2200" kern="1200"/>
+            <a:t>Admins kunnen quizen maken.</a:t>
+          </a:r>
+        </a:p>
+      </dsp:txBody>
+      <dsp:txXfrm>
+        <a:off x="666162" y="2460932"/>
+        <a:ext cx="4320000" cy="720000"/>
+      </dsp:txXfrm>
+    </dsp:sp>
+    <dsp:sp modelId="{0B6B4423-B703-47DB-B5FB-0B106FF99355}">
+      <dsp:nvSpPr>
+        <dsp:cNvPr id="0" name=""/>
+        <dsp:cNvSpPr/>
+      </dsp:nvSpPr>
+      <dsp:spPr>
+        <a:xfrm>
+          <a:off x="6930162" y="46442"/>
+          <a:ext cx="1944000" cy="1944000"/>
+        </a:xfrm>
+        <a:prstGeom prst="rect">
+          <a:avLst/>
+        </a:prstGeom>
+        <a:blipFill>
+          <a:blip xmlns:r="http://schemas.openxmlformats.org/officeDocument/2006/relationships" r:embed="rId3">
+            <a:extLst>
+              <a:ext uri="{28A0092B-C50C-407E-A947-70E740481C1C}">
+                <a14:useLocalDpi xmlns:a14="http://schemas.microsoft.com/office/drawing/2010/main" val="0"/>
+              </a:ext>
+              <a:ext uri="{96DAC541-7B7A-43D3-8B79-37D633B846F1}">
+                <asvg:svgBlip xmlns:asvg="http://schemas.microsoft.com/office/drawing/2016/SVG/main" r:embed="rId4"/>
+              </a:ext>
+            </a:extLst>
+          </a:blip>
+          <a:stretch>
+            <a:fillRect/>
+          </a:stretch>
+        </a:blipFill>
+        <a:ln w="12700" cap="flat" cmpd="sng" algn="ctr">
+          <a:solidFill>
+            <a:schemeClr val="lt1">
+              <a:hueOff val="0"/>
+              <a:satOff val="0"/>
+              <a:lumOff val="0"/>
+              <a:alphaOff val="0"/>
+            </a:schemeClr>
+          </a:solidFill>
+          <a:prstDash val="solid"/>
+          <a:miter lim="800000"/>
+        </a:ln>
+        <a:effectLst/>
+      </dsp:spPr>
+      <dsp:style>
+        <a:lnRef idx="2">
+          <a:scrgbClr r="0" g="0" b="0"/>
+        </a:lnRef>
+        <a:fillRef idx="1">
+          <a:scrgbClr r="0" g="0" b="0"/>
+        </a:fillRef>
+        <a:effectRef idx="0">
+          <a:scrgbClr r="0" g="0" b="0"/>
+        </a:effectRef>
+        <a:fontRef idx="minor">
+          <a:schemeClr val="lt1"/>
+        </a:fontRef>
+      </dsp:style>
+    </dsp:sp>
+    <dsp:sp modelId="{3C37B81A-F44C-4CE6-814D-E07F4D69124B}">
+      <dsp:nvSpPr>
+        <dsp:cNvPr id="0" name=""/>
+        <dsp:cNvSpPr/>
+      </dsp:nvSpPr>
+      <dsp:spPr>
+        <a:xfrm>
+          <a:off x="5742162" y="2460932"/>
+          <a:ext cx="4320000" cy="720000"/>
+        </a:xfrm>
+        <a:prstGeom prst="rect">
+          <a:avLst/>
+        </a:prstGeom>
+        <a:noFill/>
+        <a:ln>
+          <a:noFill/>
+        </a:ln>
+        <a:effectLst/>
+      </dsp:spPr>
+      <dsp:style>
+        <a:lnRef idx="0">
+          <a:scrgbClr r="0" g="0" b="0"/>
+        </a:lnRef>
+        <a:fillRef idx="0">
+          <a:scrgbClr r="0" g="0" b="0"/>
+        </a:fillRef>
+        <a:effectRef idx="0">
+          <a:scrgbClr r="0" g="0" b="0"/>
+        </a:effectRef>
+        <a:fontRef idx="minor"/>
+      </dsp:style>
+      <dsp:txBody>
+        <a:bodyPr spcFirstLastPara="0" vert="horz" wrap="square" lIns="0" tIns="0" rIns="0" bIns="0" numCol="1" spcCol="1270" anchor="t" anchorCtr="0">
+          <a:noAutofit/>
+        </a:bodyPr>
+        <a:lstStyle/>
+        <a:p>
+          <a:pPr marL="0" lvl="0" indent="0" algn="ctr" defTabSz="977900">
+            <a:lnSpc>
+              <a:spcPct val="100000"/>
+            </a:lnSpc>
+            <a:spcBef>
+              <a:spcPct val="0"/>
+            </a:spcBef>
+            <a:spcAft>
+              <a:spcPct val="35000"/>
+            </a:spcAft>
+            <a:buNone/>
+          </a:pPr>
+          <a:r>
+            <a:rPr lang="en-US" sz="2200" kern="1200"/>
+            <a:t>Admins kunnen gemaakte quizen aanpassen en of verwijderen.</a:t>
+          </a:r>
+        </a:p>
+      </dsp:txBody>
+      <dsp:txXfrm>
+        <a:off x="5742162" y="2460932"/>
+        <a:ext cx="4320000" cy="720000"/>
+      </dsp:txXfrm>
+    </dsp:sp>
+  </dsp:spTree>
+</dsp:drawing>
+</file>
+
+<file path=ppt/diagrams/layout1.xml><?xml version="1.0" encoding="utf-8"?>
+<dgm:layoutDef xmlns:dgm="http://schemas.openxmlformats.org/drawingml/2006/diagram" xmlns:a="http://schemas.openxmlformats.org/drawingml/2006/main" uniqueId="urn:microsoft.com/office/officeart/2018/2/layout/IconLabelList">
+  <dgm:title val="Icon Label List"/>
+  <dgm:desc val="Use to show non-sequential or grouped chunks of information accompanied by a related visuals. Works best with icons or small pictures with short text captions."/>
+  <dgm:catLst>
+    <dgm:cat type="icon" pri="500"/>
+  </dgm:catLst>
+  <dgm:sampData useDef="1">
+    <dgm:dataModel>
+      <dgm:ptLst/>
+      <dgm:bg/>
+      <dgm:whole/>
+    </dgm:dataModel>
+  </dgm:sampData>
+  <dgm:styleData useDef="1">
+    <dgm:dataModel>
+      <dgm:ptLst/>
+      <dgm:bg/>
+      <dgm:whole/>
+    </dgm:dataModel>
+  </dgm:styleData>
+  <dgm:clrData useDef="1">
+    <dgm:dataModel>
+      <dgm:ptLst/>
+      <dgm:bg/>
+      <dgm:whole/>
+    </dgm:dataModel>
+  </dgm:clrData>
+  <dgm:layoutNode name="root">
+    <dgm:varLst>
+      <dgm:dir/>
+      <dgm:resizeHandles val="exact"/>
+    </dgm:varLst>
+    <dgm:choose name="Name0">
+      <dgm:if name="Name1" axis="self" func="var" arg="dir" op="equ" val="norm">
+        <dgm:alg type="snake">
+          <dgm:param type="grDir" val="tL"/>
+          <dgm:param type="flowDir" val="row"/>
+          <dgm:param type="contDir" val="sameDir"/>
+          <dgm:param type="off" val="ctr"/>
+          <dgm:param type="vertAlign" val="mid"/>
+          <dgm:param type="horzAlign" val="ctr"/>
+        </dgm:alg>
+      </dgm:if>
+      <dgm:else name="Name2">
+        <dgm:alg type="snake">
+          <dgm:param type="grDir" val="tR"/>
+          <dgm:param type="flowDir" val="row"/>
+          <dgm:param type="contDir" val="sameDir"/>
+          <dgm:param type="off" val="ctr"/>
+          <dgm:param type="vertAlign" val="mid"/>
+          <dgm:param type="horzAlign" val="ctr"/>
+        </dgm:alg>
+      </dgm:else>
+    </dgm:choose>
+    <dgm:shape xmlns:r="http://schemas.openxmlformats.org/officeDocument/2006/relationships" r:blip="">
+      <dgm:adjLst/>
+    </dgm:shape>
+    <dgm:presOf/>
+    <dgm:choose name="Name3">
+      <dgm:if name="Name4" axis="ch" ptType="node" func="cnt" op="lte" val="2">
+        <dgm:constrLst>
+          <dgm:constr type="h" for="ch" forName="compNode" refType="h" fact="0.4"/>
+          <dgm:constr type="w" for="ch" forName="compNode" val="120"/>
+          <dgm:constr type="w" for="ch" forName="sibTrans" refType="w" refFor="ch" refForName="compNode" fact="0.175"/>
+          <dgm:constr type="sp" refType="w" refFor="ch" refForName="compNode" op="equ" fact="0.25"/>
+          <dgm:constr type="primFontSz" for="des" ptType="node" op="equ" val="50"/>
+          <dgm:constr type="h" for="des" forName="compNode" op="equ"/>
+          <dgm:constr type="h" for="des" forName="textRect" op="equ"/>
+        </dgm:constrLst>
+      </dgm:if>
+      <dgm:if name="Name5" axis="ch" ptType="node" func="cnt" op="lte" val="4">
+        <dgm:constrLst>
+          <dgm:constr type="h" for="ch" forName="compNode" refType="h" fact="0.4"/>
+          <dgm:constr type="w" for="ch" forName="compNode" refType="w"/>
+          <dgm:constr type="w" for="ch" forName="sibTrans" refType="w" refFor="ch" refForName="compNode" fact="0.175"/>
+          <dgm:constr type="sp" refType="w" refFor="ch" refForName="compNode" op="equ" fact="0.25"/>
+          <dgm:constr type="primFontSz" for="des" ptType="node" op="equ" val="36"/>
+          <dgm:constr type="h" for="des" forName="compNode" op="equ"/>
+          <dgm:constr type="h" for="des" forName="textRect" op="equ"/>
+        </dgm:constrLst>
+      </dgm:if>
+      <dgm:else name="Name6">
+        <dgm:constrLst>
+          <dgm:constr type="h" for="ch" forName="compNode" refType="h" fact="0.4"/>
+          <dgm:constr type="w" for="ch" forName="compNode" refType="w"/>
+          <dgm:constr type="w" for="ch" forName="sibTrans" refType="w" refFor="ch" refForName="compNode" fact="0.175"/>
+          <dgm:constr type="sp" refType="w" refFor="ch" refForName="compNode" op="equ" fact="0.25"/>
+          <dgm:constr type="primFontSz" for="des" ptType="node" op="equ" val="24"/>
+          <dgm:constr type="h" for="des" forName="compNode" op="equ"/>
+          <dgm:constr type="h" for="des" forName="textRect" op="equ"/>
+        </dgm:constrLst>
+      </dgm:else>
+    </dgm:choose>
+    <dgm:ruleLst>
+      <dgm:rule type="w" for="ch" forName="compNode" val="50" fact="NaN" max="NaN"/>
+    </dgm:ruleLst>
+    <dgm:forEach name="Name7" axis="ch" ptType="node">
+      <dgm:layoutNode name="compNode">
+        <dgm:alg type="composite"/>
+        <dgm:shape xmlns:r="http://schemas.openxmlformats.org/officeDocument/2006/relationships" r:blip="">
+          <dgm:adjLst/>
+        </dgm:shape>
+        <dgm:presOf axis="self"/>
+        <dgm:constrLst>
+          <dgm:constr type="w" for="ch" forName="iconRect" refType="w" fact="0.45"/>
+          <dgm:constr type="h" for="ch" forName="iconRect" refType="w" refFor="ch" refForName="iconRect"/>
+          <dgm:constr type="ctrX" for="ch" forName="iconRect" refType="w" fact="0.5"/>
+          <dgm:constr type="t" for="ch" forName="iconRect"/>
+          <dgm:constr type="h" for="ch" forName="spaceRect" refType="h" fact="0.15"/>
+          <dgm:constr type="w" for="ch" forName="spaceRect" refType="w"/>
+          <dgm:constr type="l" for="ch" forName="spaceRect"/>
+          <dgm:constr type="t" for="ch" forName="spaceRect" refType="b" refFor="ch" refForName="iconRect"/>
+          <dgm:constr type="h" for="ch" forName="textRect" val="20"/>
+          <dgm:constr type="w" for="ch" forName="textRect" refType="w"/>
+          <dgm:constr type="l" for="ch" forName="textRect"/>
+          <dgm:constr type="t" for="ch" forName="textRect" refType="b" refFor="ch" refForName="spaceRect"/>
+        </dgm:constrLst>
+        <dgm:ruleLst>
+          <dgm:rule type="h" val="INF" fact="NaN" max="NaN"/>
+        </dgm:ruleLst>
+        <dgm:layoutNode name="iconRect" styleLbl="node1">
+          <dgm:alg type="sp"/>
+          <dgm:shape xmlns:r="http://schemas.openxmlformats.org/officeDocument/2006/relationships" type="rect" r:blip="" blipPhldr="1">
+            <dgm:adjLst/>
+          </dgm:shape>
+          <dgm:presOf/>
+          <dgm:constrLst/>
+          <dgm:ruleLst/>
+        </dgm:layoutNode>
+        <dgm:layoutNode name="spaceRect">
+          <dgm:alg type="sp"/>
+          <dgm:shape xmlns:r="http://schemas.openxmlformats.org/officeDocument/2006/relationships" r:blip="">
+            <dgm:adjLst/>
+          </dgm:shape>
+          <dgm:presOf/>
+          <dgm:constrLst/>
+          <dgm:ruleLst/>
+        </dgm:layoutNode>
+        <dgm:layoutNode name="textRect" styleLbl="revTx">
+          <dgm:varLst>
+            <dgm:chMax val="1"/>
+            <dgm:chPref val="1"/>
+          </dgm:varLst>
+          <dgm:alg type="tx">
+            <dgm:param type="txAnchorVert" val="t"/>
+          </dgm:alg>
+          <dgm:shape xmlns:r="http://schemas.openxmlformats.org/officeDocument/2006/relationships" type="rect" r:blip="">
+            <dgm:adjLst/>
+          </dgm:shape>
+          <dgm:presOf axis="self" ptType="node"/>
+          <dgm:constrLst>
+            <dgm:constr type="lMarg"/>
+            <dgm:constr type="rMarg"/>
+            <dgm:constr type="tMarg"/>
+            <dgm:constr type="bMarg"/>
+          </dgm:constrLst>
+          <dgm:ruleLst>
+            <dgm:rule type="primFontSz" val="11" fact="NaN" max="NaN"/>
+            <dgm:rule type="h" val="INF" fact="NaN" max="NaN"/>
+          </dgm:ruleLst>
+        </dgm:layoutNode>
+      </dgm:layoutNode>
+      <dgm:forEach name="Name8" axis="followSib" ptType="sibTrans" cnt="1">
+        <dgm:layoutNode name="sibTrans">
+          <dgm:alg type="sp"/>
+          <dgm:shape xmlns:r="http://schemas.openxmlformats.org/officeDocument/2006/relationships" r:blip="">
+            <dgm:adjLst/>
+          </dgm:shape>
+          <dgm:presOf axis="self"/>
+          <dgm:constrLst/>
+          <dgm:ruleLst/>
+        </dgm:layoutNode>
+      </dgm:forEach>
+    </dgm:forEach>
+  </dgm:layoutNode>
+  <dgm:extLst>
+    <a:ext uri="{68A01E43-0DF5-4B5B-8FA6-DAF915123BFB}">
+      <dgm1612:lstStyle xmlns:dgm1612="http://schemas.microsoft.com/office/drawing/2016/12/diagram">
+        <a:lvl1pPr>
+          <a:lnSpc>
+            <a:spcPct val="100000"/>
+          </a:lnSpc>
+        </a:lvl1pPr>
+      </dgm1612:lstStyle>
+    </a:ext>
+  </dgm:extLst>
+</dgm:layoutDef>
+</file>
+
+<file path=ppt/diagrams/quickStyle1.xml><?xml version="1.0" encoding="utf-8"?>
+<dgm:styleDef xmlns:dgm="http://schemas.openxmlformats.org/drawingml/2006/diagram" xmlns:a="http://schemas.openxmlformats.org/drawingml/2006/main" uniqueId="urn:microsoft.com/office/officeart/2005/8/quickstyle/simple1">
+  <dgm:title val=""/>
+  <dgm:desc val=""/>
+  <dgm:catLst>
+    <dgm:cat type="simple" pri="10100"/>
+  </dgm:catLst>
+  <dgm:scene3d>
+    <a:camera prst="orthographicFront"/>
+    <a:lightRig rig="threePt" dir="t"/>
+  </dgm:scene3d>
+  <dgm:styleLbl name="node0">
+    <dgm:scene3d>
+      <a:camera prst="orthographicFront"/>
+      <a:lightRig rig="threePt" dir="t"/>
+    </dgm:scene3d>
+    <dgm:sp3d/>
+    <dgm:txPr/>
+    <dgm:style>
+      <a:lnRef idx="2">
+        <a:scrgbClr r="0" g="0" b="0"/>
+      </a:lnRef>
+      <a:fillRef idx="1">
+        <a:scrgbClr r="0" g="0" b="0"/>
+      </a:fillRef>
+      <a:effectRef idx="0">
+        <a:scrgbClr r="0" g="0" b="0"/>
+      </a:effectRef>
+      <a:fontRef idx="minor">
+        <a:schemeClr val="lt1"/>
+      </a:fontRef>
+    </dgm:style>
+  </dgm:styleLbl>
+  <dgm:styleLbl name="lnNode1">
+    <dgm:scene3d>
+      <a:camera prst="orthographicFront"/>
+      <a:lightRig rig="threePt" dir="t"/>
+    </dgm:scene3d>
+    <dgm:sp3d/>
+    <dgm:txPr/>
+    <dgm:style>
+      <a:lnRef idx="2">
+        <a:scrgbClr r="0" g="0" b="0"/>
+      </a:lnRef>
+      <a:fillRef idx="1">
+        <a:scrgbClr r="0" g="0" b="0"/>
+      </a:fillRef>
+      <a:effectRef idx="0">
+        <a:scrgbClr r="0" g="0" b="0"/>
+      </a:effectRef>
+      <a:fontRef idx="minor">
+        <a:schemeClr val="lt1"/>
+      </a:fontRef>
+    </dgm:style>
+  </dgm:styleLbl>
+  <dgm:styleLbl name="vennNode1">
+    <dgm:scene3d>
+      <a:camera prst="orthographicFront"/>
+      <a:lightRig rig="threePt" dir="t"/>
+    </dgm:scene3d>
+    <dgm:sp3d/>
+    <dgm:txPr/>
+    <dgm:style>
+      <a:lnRef idx="2">
+        <a:scrgbClr r="0" g="0" b="0"/>
+      </a:lnRef>
+      <a:fillRef idx="1">
+        <a:scrgbClr r="0" g="0" b="0"/>
+      </a:fillRef>
+      <a:effectRef idx="0">
+        <a:scrgbClr r="0" g="0" b="0"/>
+      </a:effectRef>
+      <a:fontRef idx="minor">
+        <a:schemeClr val="tx1"/>
+      </a:fontRef>
+    </dgm:style>
+  </dgm:styleLbl>
+  <dgm:styleLbl name="alignNode1">
+    <dgm:scene3d>
+      <a:camera prst="orthographicFront"/>
+      <a:lightRig rig="threePt" dir="t"/>
+    </dgm:scene3d>
+    <dgm:sp3d/>
+    <dgm:txPr/>
+    <dgm:style>
+      <a:lnRef idx="2">
+        <a:scrgbClr r="0" g="0" b="0"/>
+      </a:lnRef>
+      <a:fillRef idx="1">
+        <a:scrgbClr r="0" g="0" b="0"/>
+      </a:fillRef>
+      <a:effectRef idx="0">
+        <a:scrgbClr r="0" g="0" b="0"/>
+      </a:effectRef>
+      <a:fontRef idx="minor">
+        <a:schemeClr val="lt1"/>
+      </a:fontRef>
+    </dgm:style>
+  </dgm:styleLbl>
+  <dgm:styleLbl name="node1">
+    <dgm:scene3d>
+      <a:camera prst="orthographicFront"/>
+      <a:lightRig rig="threePt" dir="t"/>
+    </dgm:scene3d>
+    <dgm:sp3d/>
+    <dgm:txPr/>
+    <dgm:style>
+      <a:lnRef idx="2">
+        <a:scrgbClr r="0" g="0" b="0"/>
+      </a:lnRef>
+      <a:fillRef idx="1">
+        <a:scrgbClr r="0" g="0" b="0"/>
+      </a:fillRef>
+      <a:effectRef idx="0">
+        <a:scrgbClr r="0" g="0" b="0"/>
+      </a:effectRef>
+      <a:fontRef idx="minor">
+        <a:schemeClr val="lt1"/>
+      </a:fontRef>
+    </dgm:style>
+  </dgm:styleLbl>
+  <dgm:styleLbl name="node2">
+    <dgm:scene3d>
+      <a:camera prst="orthographicFront"/>
+      <a:lightRig rig="threePt" dir="t"/>
+    </dgm:scene3d>
+    <dgm:sp3d/>
+    <dgm:txPr/>
+    <dgm:style>
+      <a:lnRef idx="2">
+        <a:scrgbClr r="0" g="0" b="0"/>
+      </a:lnRef>
+      <a:fillRef idx="1">
+        <a:scrgbClr r="0" g="0" b="0"/>
+      </a:fillRef>
+      <a:effectRef idx="0">
+        <a:scrgbClr r="0" g="0" b="0"/>
+      </a:effectRef>
+      <a:fontRef idx="minor">
+        <a:schemeClr val="lt1"/>
+      </a:fontRef>
+    </dgm:style>
+  </dgm:styleLbl>
+  <dgm:styleLbl name="node3">
+    <dgm:scene3d>
+      <a:camera prst="orthographicFront"/>
+      <a:lightRig rig="threePt" dir="t"/>
+    </dgm:scene3d>
+    <dgm:sp3d/>
+    <dgm:txPr/>
+    <dgm:style>
+      <a:lnRef idx="2">
+        <a:scrgbClr r="0" g="0" b="0"/>
+      </a:lnRef>
+      <a:fillRef idx="1">
+        <a:scrgbClr r="0" g="0" b="0"/>
+      </a:fillRef>
+      <a:effectRef idx="0">
+        <a:scrgbClr r="0" g="0" b="0"/>
+      </a:effectRef>
+      <a:fontRef idx="minor">
+        <a:schemeClr val="lt1"/>
+      </a:fontRef>
+    </dgm:style>
+  </dgm:styleLbl>
+  <dgm:styleLbl name="node4">
+    <dgm:scene3d>
+      <a:camera prst="orthographicFront"/>
+      <a:lightRig rig="threePt" dir="t"/>
+    </dgm:scene3d>
+    <dgm:sp3d/>
+    <dgm:txPr/>
+    <dgm:style>
+      <a:lnRef idx="2">
+        <a:scrgbClr r="0" g="0" b="0"/>
+      </a:lnRef>
+      <a:fillRef idx="1">
+        <a:scrgbClr r="0" g="0" b="0"/>
+      </a:fillRef>
+      <a:effectRef idx="0">
+        <a:scrgbClr r="0" g="0" b="0"/>
+      </a:effectRef>
+      <a:fontRef idx="minor">
+        <a:schemeClr val="lt1"/>
+      </a:fontRef>
+    </dgm:style>
+  </dgm:styleLbl>
+  <dgm:styleLbl name="fgImgPlace1">
+    <dgm:scene3d>
+      <a:camera prst="orthographicFront"/>
+      <a:lightRig rig="threePt" dir="t"/>
+    </dgm:scene3d>
+    <dgm:sp3d/>
+    <dgm:txPr/>
+    <dgm:style>
+      <a:lnRef idx="2">
+        <a:scrgbClr r="0" g="0" b="0"/>
+      </a:lnRef>
+      <a:fillRef idx="1">
+        <a:scrgbClr r="0" g="0" b="0"/>
+      </a:fillRef>
+      <a:effectRef idx="0">
+        <a:scrgbClr r="0" g="0" b="0"/>
+      </a:effectRef>
+      <a:fontRef idx="minor"/>
+    </dgm:style>
+  </dgm:styleLbl>
+  <dgm:styleLbl name="alignImgPlace1">
+    <dgm:scene3d>
+      <a:camera prst="orthographicFront"/>
+      <a:lightRig rig="threePt" dir="t"/>
+    </dgm:scene3d>
+    <dgm:sp3d/>
+    <dgm:txPr/>
+    <dgm:style>
+      <a:lnRef idx="2">
+        <a:scrgbClr r="0" g="0" b="0"/>
+      </a:lnRef>
+      <a:fillRef idx="1">
+        <a:scrgbClr r="0" g="0" b="0"/>
+      </a:fillRef>
+      <a:effectRef idx="0">
+        <a:scrgbClr r="0" g="0" b="0"/>
+      </a:effectRef>
+      <a:fontRef idx="minor"/>
+    </dgm:style>
+  </dgm:styleLbl>
+  <dgm:styleLbl name="bgImgPlace1">
+    <dgm:scene3d>
+      <a:camera prst="orthographicFront"/>
+      <a:lightRig rig="threePt" dir="t"/>
+    </dgm:scene3d>
+    <dgm:sp3d/>
+    <dgm:txPr/>
+    <dgm:style>
+      <a:lnRef idx="2">
+        <a:scrgbClr r="0" g="0" b="0"/>
+      </a:lnRef>
+      <a:fillRef idx="1">
+        <a:scrgbClr r="0" g="0" b="0"/>
+      </a:fillRef>
+      <a:effectRef idx="0">
+        <a:scrgbClr r="0" g="0" b="0"/>
+      </a:effectRef>
+      <a:fontRef idx="minor"/>
+    </dgm:style>
+  </dgm:styleLbl>
+  <dgm:styleLbl name="sibTrans2D1">
+    <dgm:scene3d>
+      <a:camera prst="orthographicFront"/>
+      <a:lightRig rig="threePt" dir="t"/>
+    </dgm:scene3d>
+    <dgm:sp3d/>
+    <dgm:txPr/>
+    <dgm:style>
+      <a:lnRef idx="0">
+        <a:scrgbClr r="0" g="0" b="0"/>
+      </a:lnRef>
+      <a:fillRef idx="1">
+        <a:scrgbClr r="0" g="0" b="0"/>
+      </a:fillRef>
+      <a:effectRef idx="0">
+        <a:scrgbClr r="0" g="0" b="0"/>
+      </a:effectRef>
+      <a:fontRef idx="minor">
+        <a:schemeClr val="lt1"/>
+      </a:fontRef>
+    </dgm:style>
+  </dgm:styleLbl>
+  <dgm:styleLbl name="fgSibTrans2D1">
+    <dgm:scene3d>
+      <a:camera prst="orthographicFront"/>
+      <a:lightRig rig="threePt" dir="t"/>
+    </dgm:scene3d>
+    <dgm:sp3d/>
+    <dgm:txPr/>
+    <dgm:style>
+      <a:lnRef idx="0">
+        <a:scrgbClr r="0" g="0" b="0"/>
+      </a:lnRef>
+      <a:fillRef idx="1">
+        <a:scrgbClr r="0" g="0" b="0"/>
+      </a:fillRef>
+      <a:effectRef idx="0">
+        <a:scrgbClr r="0" g="0" b="0"/>
+      </a:effectRef>
+      <a:fontRef idx="minor">
+        <a:schemeClr val="lt1"/>
+      </a:fontRef>
+    </dgm:style>
+  </dgm:styleLbl>
+  <dgm:styleLbl name="bgSibTrans2D1">
+    <dgm:scene3d>
+      <a:camera prst="orthographicFront"/>
+      <a:lightRig rig="threePt" dir="t"/>
+    </dgm:scene3d>
+    <dgm:sp3d/>
+    <dgm:txPr/>
+    <dgm:style>
+      <a:lnRef idx="0">
+        <a:scrgbClr r="0" g="0" b="0"/>
+      </a:lnRef>
+      <a:fillRef idx="1">
+        <a:scrgbClr r="0" g="0" b="0"/>
+      </a:fillRef>
+      <a:effectRef idx="0">
+        <a:scrgbClr r="0" g="0" b="0"/>
+      </a:effectRef>
+      <a:fontRef idx="minor">
+        <a:schemeClr val="lt1"/>
+      </a:fontRef>
+    </dgm:style>
+  </dgm:styleLbl>
+  <dgm:styleLbl name="sibTrans1D1">
+    <dgm:scene3d>
+      <a:camera prst="orthographicFront"/>
+      <a:lightRig rig="threePt" dir="t"/>
+    </dgm:scene3d>
+    <dgm:sp3d/>
+    <dgm:txPr/>
+    <dgm:style>
+      <a:lnRef idx="1">
+        <a:scrgbClr r="0" g="0" b="0"/>
+      </a:lnRef>
+      <a:fillRef idx="0">
+        <a:scrgbClr r="0" g="0" b="0"/>
+      </a:fillRef>
+      <a:effectRef idx="0">
+        <a:scrgbClr r="0" g="0" b="0"/>
+      </a:effectRef>
+      <a:fontRef idx="minor"/>
+    </dgm:style>
+  </dgm:styleLbl>
+  <dgm:styleLbl name="callout">
+    <dgm:scene3d>
+      <a:camera prst="orthographicFront"/>
+      <a:lightRig rig="threePt" dir="t"/>
+    </dgm:scene3d>
+    <dgm:sp3d/>
+    <dgm:txPr/>
+    <dgm:style>
+      <a:lnRef idx="2">
+        <a:scrgbClr r="0" g="0" b="0"/>
+      </a:lnRef>
+      <a:fillRef idx="1">
+        <a:scrgbClr r="0" g="0" b="0"/>
+      </a:fillRef>
+      <a:effectRef idx="0">
+        <a:scrgbClr r="0" g="0" b="0"/>
+      </a:effectRef>
+      <a:fontRef idx="minor"/>
+    </dgm:style>
+  </dgm:styleLbl>
+  <dgm:styleLbl name="asst0">
+    <dgm:scene3d>
+      <a:camera prst="orthographicFront"/>
+      <a:lightRig rig="threePt" dir="t"/>
+    </dgm:scene3d>
+    <dgm:sp3d/>
+    <dgm:txPr/>
+    <dgm:style>
+      <a:lnRef idx="2">
+        <a:scrgbClr r="0" g="0" b="0"/>
+      </a:lnRef>
+      <a:fillRef idx="1">
+        <a:scrgbClr r="0" g="0" b="0"/>
+      </a:fillRef>
+      <a:effectRef idx="0">
+        <a:scrgbClr r="0" g="0" b="0"/>
+      </a:effectRef>
+      <a:fontRef idx="minor">
+        <a:schemeClr val="lt1"/>
+      </a:fontRef>
+    </dgm:style>
+  </dgm:styleLbl>
+  <dgm:styleLbl name="asst1">
+    <dgm:scene3d>
+      <a:camera prst="orthographicFront"/>
+      <a:lightRig rig="threePt" dir="t"/>
+    </dgm:scene3d>
+    <dgm:sp3d/>
+    <dgm:txPr/>
+    <dgm:style>
+      <a:lnRef idx="2">
+        <a:scrgbClr r="0" g="0" b="0"/>
+      </a:lnRef>
+      <a:fillRef idx="1">
+        <a:scrgbClr r="0" g="0" b="0"/>
+      </a:fillRef>
+      <a:effectRef idx="0">
+        <a:scrgbClr r="0" g="0" b="0"/>
+      </a:effectRef>
+      <a:fontRef idx="minor">
+        <a:schemeClr val="lt1"/>
+      </a:fontRef>
+    </dgm:style>
+  </dgm:styleLbl>
+  <dgm:styleLbl name="asst2">
+    <dgm:scene3d>
+      <a:camera prst="orthographicFront"/>
+      <a:lightRig rig="threePt" dir="t"/>
+    </dgm:scene3d>
+    <dgm:sp3d/>
+    <dgm:txPr/>
+    <dgm:style>
+      <a:lnRef idx="2">
+        <a:scrgbClr r="0" g="0" b="0"/>
+      </a:lnRef>
+      <a:fillRef idx="1">
+        <a:scrgbClr r="0" g="0" b="0"/>
+      </a:fillRef>
+      <a:effectRef idx="0">
+        <a:scrgbClr r="0" g="0" b="0"/>
+      </a:effectRef>
+      <a:fontRef idx="minor">
+        <a:schemeClr val="lt1"/>
+      </a:fontRef>
+    </dgm:style>
+  </dgm:styleLbl>
+  <dgm:styleLbl name="asst3">
+    <dgm:scene3d>
+      <a:camera prst="orthographicFront"/>
+      <a:lightRig rig="threePt" dir="t"/>
+    </dgm:scene3d>
+    <dgm:sp3d/>
+    <dgm:txPr/>
+    <dgm:style>
+      <a:lnRef idx="2">
+        <a:scrgbClr r="0" g="0" b="0"/>
+      </a:lnRef>
+      <a:fillRef idx="1">
+        <a:scrgbClr r="0" g="0" b="0"/>
+      </a:fillRef>
+      <a:effectRef idx="0">
+        <a:scrgbClr r="0" g="0" b="0"/>
+      </a:effectRef>
+      <a:fontRef idx="minor">
+        <a:schemeClr val="lt1"/>
+      </a:fontRef>
+    </dgm:style>
+  </dgm:styleLbl>
+  <dgm:styleLbl name="asst4">
+    <dgm:scene3d>
+      <a:camera prst="orthographicFront"/>
+      <a:lightRig rig="threePt" dir="t"/>
+    </dgm:scene3d>
+    <dgm:sp3d/>
+    <dgm:txPr/>
+    <dgm:style>
+      <a:lnRef idx="2">
+        <a:scrgbClr r="0" g="0" b="0"/>
+      </a:lnRef>
+      <a:fillRef idx="1">
+        <a:scrgbClr r="0" g="0" b="0"/>
+      </a:fillRef>
+      <a:effectRef idx="0">
+        <a:scrgbClr r="0" g="0" b="0"/>
+      </a:effectRef>
+      <a:fontRef idx="minor">
+        <a:schemeClr val="lt1"/>
+      </a:fontRef>
+    </dgm:style>
+  </dgm:styleLbl>
+  <dgm:styleLbl name="parChTrans2D1">
+    <dgm:scene3d>
+      <a:camera prst="orthographicFront"/>
+      <a:lightRig rig="threePt" dir="t"/>
+    </dgm:scene3d>
+    <dgm:sp3d/>
+    <dgm:txPr/>
+    <dgm:style>
+      <a:lnRef idx="2">
+        <a:scrgbClr r="0" g="0" b="0"/>
+      </a:lnRef>
+      <a:fillRef idx="1">
+        <a:scrgbClr r="0" g="0" b="0"/>
+      </a:fillRef>
+      <a:effectRef idx="0">
+        <a:scrgbClr r="0" g="0" b="0"/>
+      </a:effectRef>
+      <a:fontRef idx="minor">
+        <a:schemeClr val="lt1"/>
+      </a:fontRef>
+    </dgm:style>
+  </dgm:styleLbl>
+  <dgm:styleLbl name="parChTrans2D2">
+    <dgm:scene3d>
+      <a:camera prst="orthographicFront"/>
+      <a:lightRig rig="threePt" dir="t"/>
+    </dgm:scene3d>
+    <dgm:sp3d/>
+    <dgm:txPr/>
+    <dgm:style>
+      <a:lnRef idx="2">
+        <a:scrgbClr r="0" g="0" b="0"/>
+      </a:lnRef>
+      <a:fillRef idx="1">
+        <a:scrgbClr r="0" g="0" b="0"/>
+      </a:fillRef>
+      <a:effectRef idx="0">
+        <a:scrgbClr r="0" g="0" b="0"/>
+      </a:effectRef>
+      <a:fontRef idx="minor">
+        <a:schemeClr val="lt1"/>
+      </a:fontRef>
+    </dgm:style>
+  </dgm:styleLbl>
+  <dgm:styleLbl name="parChTrans2D3">
+    <dgm:scene3d>
+      <a:camera prst="orthographicFront"/>
+      <a:lightRig rig="threePt" dir="t"/>
+    </dgm:scene3d>
+    <dgm:sp3d/>
+    <dgm:txPr/>
+    <dgm:style>
+      <a:lnRef idx="2">
+        <a:scrgbClr r="0" g="0" b="0"/>
+      </a:lnRef>
+      <a:fillRef idx="1">
+        <a:scrgbClr r="0" g="0" b="0"/>
+      </a:fillRef>
+      <a:effectRef idx="0">
+        <a:scrgbClr r="0" g="0" b="0"/>
+      </a:effectRef>
+      <a:fontRef idx="minor">
+        <a:schemeClr val="lt1"/>
+      </a:fontRef>
+    </dgm:style>
+  </dgm:styleLbl>
+  <dgm:styleLbl name="parChTrans2D4">
+    <dgm:scene3d>
+      <a:camera prst="orthographicFront"/>
+      <a:lightRig rig="threePt" dir="t"/>
+    </dgm:scene3d>
+    <dgm:sp3d/>
+    <dgm:txPr/>
+    <dgm:style>
+      <a:lnRef idx="2">
+        <a:scrgbClr r="0" g="0" b="0"/>
+      </a:lnRef>
+      <a:fillRef idx="1">
+        <a:scrgbClr r="0" g="0" b="0"/>
+      </a:fillRef>
+      <a:effectRef idx="0">
+        <a:scrgbClr r="0" g="0" b="0"/>
+      </a:effectRef>
+      <a:fontRef idx="minor">
+        <a:schemeClr val="lt1"/>
+      </a:fontRef>
+    </dgm:style>
+  </dgm:styleLbl>
+  <dgm:styleLbl name="parChTrans1D1">
+    <dgm:scene3d>
+      <a:camera prst="orthographicFront"/>
+      <a:lightRig rig="threePt" dir="t"/>
+    </dgm:scene3d>
+    <dgm:sp3d/>
+    <dgm:txPr/>
+    <dgm:style>
+      <a:lnRef idx="2">
+        <a:scrgbClr r="0" g="0" b="0"/>
+      </a:lnRef>
+      <a:fillRef idx="0">
+        <a:scrgbClr r="0" g="0" b="0"/>
+      </a:fillRef>
+      <a:effectRef idx="0">
+        <a:scrgbClr r="0" g="0" b="0"/>
+      </a:effectRef>
+      <a:fontRef idx="minor"/>
+    </dgm:style>
+  </dgm:styleLbl>
+  <dgm:styleLbl name="parChTrans1D2">
+    <dgm:scene3d>
+      <a:camera prst="orthographicFront"/>
+      <a:lightRig rig="threePt" dir="t"/>
+    </dgm:scene3d>
+    <dgm:sp3d/>
+    <dgm:txPr/>
+    <dgm:style>
+      <a:lnRef idx="2">
+        <a:scrgbClr r="0" g="0" b="0"/>
+      </a:lnRef>
+      <a:fillRef idx="0">
+        <a:scrgbClr r="0" g="0" b="0"/>
+      </a:fillRef>
+      <a:effectRef idx="0">
+        <a:scrgbClr r="0" g="0" b="0"/>
+      </a:effectRef>
+      <a:fontRef idx="minor"/>
+    </dgm:style>
+  </dgm:styleLbl>
+  <dgm:styleLbl name="parChTrans1D3">
+    <dgm:scene3d>
+      <a:camera prst="orthographicFront"/>
+      <a:lightRig rig="threePt" dir="t"/>
+    </dgm:scene3d>
+    <dgm:sp3d/>
+    <dgm:txPr/>
+    <dgm:style>
+      <a:lnRef idx="2">
+        <a:scrgbClr r="0" g="0" b="0"/>
+      </a:lnRef>
+      <a:fillRef idx="0">
+        <a:scrgbClr r="0" g="0" b="0"/>
+      </a:fillRef>
+      <a:effectRef idx="0">
+        <a:scrgbClr r="0" g="0" b="0"/>
+      </a:effectRef>
+      <a:fontRef idx="minor"/>
+    </dgm:style>
+  </dgm:styleLbl>
+  <dgm:styleLbl name="parChTrans1D4">
+    <dgm:scene3d>
+      <a:camera prst="orthographicFront"/>
+      <a:lightRig rig="threePt" dir="t"/>
+    </dgm:scene3d>
+    <dgm:sp3d/>
+    <dgm:txPr/>
+    <dgm:style>
+      <a:lnRef idx="2">
+        <a:scrgbClr r="0" g="0" b="0"/>
+      </a:lnRef>
+      <a:fillRef idx="0">
+        <a:scrgbClr r="0" g="0" b="0"/>
+      </a:fillRef>
+      <a:effectRef idx="0">
+        <a:scrgbClr r="0" g="0" b="0"/>
+      </a:effectRef>
+      <a:fontRef idx="minor"/>
+    </dgm:style>
+  </dgm:styleLbl>
+  <dgm:styleLbl name="fgAcc1">
+    <dgm:scene3d>
+      <a:camera prst="orthographicFront"/>
+      <a:lightRig rig="threePt" dir="t"/>
+    </dgm:scene3d>
+    <dgm:sp3d/>
+    <dgm:txPr/>
+    <dgm:style>
+      <a:lnRef idx="2">
+        <a:scrgbClr r="0" g="0" b="0"/>
+      </a:lnRef>
+      <a:fillRef idx="1">
+        <a:scrgbClr r="0" g="0" b="0"/>
+      </a:fillRef>
+      <a:effectRef idx="0">
+        <a:scrgbClr r="0" g="0" b="0"/>
+      </a:effectRef>
+      <a:fontRef idx="minor"/>
+    </dgm:style>
+  </dgm:styleLbl>
+  <dgm:styleLbl name="conFgAcc1">
+    <dgm:scene3d>
+      <a:camera prst="orthographicFront"/>
+      <a:lightRig rig="threePt" dir="t"/>
+    </dgm:scene3d>
+    <dgm:sp3d/>
+    <dgm:txPr/>
+    <dgm:style>
+      <a:lnRef idx="2">
+        <a:scrgbClr r="0" g="0" b="0"/>
+      </a:lnRef>
+      <a:fillRef idx="1">
+        <a:scrgbClr r="0" g="0" b="0"/>
+      </a:fillRef>
+      <a:effectRef idx="0">
+        <a:scrgbClr r="0" g="0" b="0"/>
+      </a:effectRef>
+      <a:fontRef idx="minor"/>
+    </dgm:style>
+  </dgm:styleLbl>
+  <dgm:styleLbl name="alignAcc1">
+    <dgm:scene3d>
+      <a:camera prst="orthographicFront"/>
+      <a:lightRig rig="threePt" dir="t"/>
+    </dgm:scene3d>
+    <dgm:sp3d/>
+    <dgm:txPr/>
+    <dgm:style>
+      <a:lnRef idx="2">
+        <a:scrgbClr r="0" g="0" b="0"/>
+      </a:lnRef>
+      <a:fillRef idx="1">
+        <a:scrgbClr r="0" g="0" b="0"/>
+      </a:fillRef>
+      <a:effectRef idx="0">
+        <a:scrgbClr r="0" g="0" b="0"/>
+      </a:effectRef>
+      <a:fontRef idx="minor"/>
+    </dgm:style>
+  </dgm:styleLbl>
+  <dgm:styleLbl name="trAlignAcc1">
+    <dgm:scene3d>
+      <a:camera prst="orthographicFront"/>
+      <a:lightRig rig="threePt" dir="t"/>
+    </dgm:scene3d>
+    <dgm:sp3d/>
+    <dgm:txPr/>
+    <dgm:style>
+      <a:lnRef idx="1">
+        <a:scrgbClr r="0" g="0" b="0"/>
+      </a:lnRef>
+      <a:fillRef idx="1">
+        <a:scrgbClr r="0" g="0" b="0"/>
+      </a:fillRef>
+      <a:effectRef idx="0">
+        <a:scrgbClr r="0" g="0" b="0"/>
+      </a:effectRef>
+      <a:fontRef idx="minor"/>
+    </dgm:style>
+  </dgm:styleLbl>
+  <dgm:styleLbl name="bgAcc1">
+    <dgm:scene3d>
+      <a:camera prst="orthographicFront"/>
+      <a:lightRig rig="threePt" dir="t"/>
+    </dgm:scene3d>
+    <dgm:sp3d/>
+    <dgm:txPr/>
+    <dgm:style>
+      <a:lnRef idx="2">
+        <a:scrgbClr r="0" g="0" b="0"/>
+      </a:lnRef>
+      <a:fillRef idx="1">
+        <a:scrgbClr r="0" g="0" b="0"/>
+      </a:fillRef>
+      <a:effectRef idx="0">
+        <a:scrgbClr r="0" g="0" b="0"/>
+      </a:effectRef>
+      <a:fontRef idx="minor"/>
+    </dgm:style>
+  </dgm:styleLbl>
+  <dgm:styleLbl name="solidFgAcc1">
+    <dgm:scene3d>
+      <a:camera prst="orthographicFront"/>
+      <a:lightRig rig="threePt" dir="t"/>
+    </dgm:scene3d>
+    <dgm:sp3d/>
+    <dgm:txPr/>
+    <dgm:style>
+      <a:lnRef idx="2">
+        <a:scrgbClr r="0" g="0" b="0"/>
+      </a:lnRef>
+      <a:fillRef idx="1">
+        <a:scrgbClr r="0" g="0" b="0"/>
+      </a:fillRef>
+      <a:effectRef idx="0">
+        <a:scrgbClr r="0" g="0" b="0"/>
+      </a:effectRef>
+      <a:fontRef idx="minor"/>
+    </dgm:style>
+  </dgm:styleLbl>
+  <dgm:styleLbl name="solidAlignAcc1">
+    <dgm:scene3d>
+      <a:camera prst="orthographicFront"/>
+      <a:lightRig rig="threePt" dir="t"/>
+    </dgm:scene3d>
+    <dgm:sp3d/>
+    <dgm:txPr/>
+    <dgm:style>
+      <a:lnRef idx="2">
+        <a:scrgbClr r="0" g="0" b="0"/>
+      </a:lnRef>
+      <a:fillRef idx="1">
+        <a:scrgbClr r="0" g="0" b="0"/>
+      </a:fillRef>
+      <a:effectRef idx="0">
+        <a:scrgbClr r="0" g="0" b="0"/>
+      </a:effectRef>
+      <a:fontRef idx="minor"/>
+    </dgm:style>
+  </dgm:styleLbl>
+  <dgm:styleLbl name="solidBgAcc1">
+    <dgm:scene3d>
+      <a:camera prst="orthographicFront"/>
+      <a:lightRig rig="threePt" dir="t"/>
+    </dgm:scene3d>
+    <dgm:sp3d/>
+    <dgm:txPr/>
+    <dgm:style>
+      <a:lnRef idx="2">
+        <a:scrgbClr r="0" g="0" b="0"/>
+      </a:lnRef>
+      <a:fillRef idx="1">
+        <a:scrgbClr r="0" g="0" b="0"/>
+      </a:fillRef>
+      <a:effectRef idx="0">
+        <a:scrgbClr r="0" g="0" b="0"/>
+      </a:effectRef>
+      <a:fontRef idx="minor"/>
+    </dgm:style>
+  </dgm:styleLbl>
+  <dgm:styleLbl name="fgAccFollowNode1">
+    <dgm:scene3d>
+      <a:camera prst="orthographicFront"/>
+      <a:lightRig rig="threePt" dir="t"/>
+    </dgm:scene3d>
+    <dgm:sp3d/>
+    <dgm:txPr/>
+    <dgm:style>
+      <a:lnRef idx="2">
+        <a:scrgbClr r="0" g="0" b="0"/>
+      </a:lnRef>
+      <a:fillRef idx="1">
+        <a:scrgbClr r="0" g="0" b="0"/>
+      </a:fillRef>
+      <a:effectRef idx="0">
+        <a:scrgbClr r="0" g="0" b="0"/>
+      </a:effectRef>
+      <a:fontRef idx="minor"/>
+    </dgm:style>
+  </dgm:styleLbl>
+  <dgm:styleLbl name="alignAccFollowNode1">
+    <dgm:scene3d>
+      <a:camera prst="orthographicFront"/>
+      <a:lightRig rig="threePt" dir="t"/>
+    </dgm:scene3d>
+    <dgm:sp3d/>
+    <dgm:txPr/>
+    <dgm:style>
+      <a:lnRef idx="2">
+        <a:scrgbClr r="0" g="0" b="0"/>
+      </a:lnRef>
+      <a:fillRef idx="1">
+        <a:scrgbClr r="0" g="0" b="0"/>
+      </a:fillRef>
+      <a:effectRef idx="0">
+        <a:scrgbClr r="0" g="0" b="0"/>
+      </a:effectRef>
+      <a:fontRef idx="minor"/>
+    </dgm:style>
+  </dgm:styleLbl>
+  <dgm:styleLbl name="bgAccFollowNode1">
+    <dgm:scene3d>
+      <a:camera prst="orthographicFront"/>
+      <a:lightRig rig="threePt" dir="t"/>
+    </dgm:scene3d>
+    <dgm:sp3d/>
+    <dgm:txPr/>
+    <dgm:style>
+      <a:lnRef idx="2">
+        <a:scrgbClr r="0" g="0" b="0"/>
+      </a:lnRef>
+      <a:fillRef idx="1">
+        <a:scrgbClr r="0" g="0" b="0"/>
+      </a:fillRef>
+      <a:effectRef idx="0">
+        <a:scrgbClr r="0" g="0" b="0"/>
+      </a:effectRef>
+      <a:fontRef idx="minor"/>
+    </dgm:style>
+  </dgm:styleLbl>
+  <dgm:styleLbl name="fgAcc0">
+    <dgm:scene3d>
+      <a:camera prst="orthographicFront"/>
+      <a:lightRig rig="threePt" dir="t"/>
+    </dgm:scene3d>
+    <dgm:sp3d/>
+    <dgm:txPr/>
+    <dgm:style>
+      <a:lnRef idx="2">
+        <a:scrgbClr r="0" g="0" b="0"/>
+      </a:lnRef>
+      <a:fillRef idx="1">
+        <a:scrgbClr r="0" g="0" b="0"/>
+      </a:fillRef>
+      <a:effectRef idx="0">
+        <a:scrgbClr r="0" g="0" b="0"/>
+      </a:effectRef>
+      <a:fontRef idx="minor"/>
+    </dgm:style>
+  </dgm:styleLbl>
+  <dgm:styleLbl name="fgAcc2">
+    <dgm:scene3d>
+      <a:camera prst="orthographicFront"/>
+      <a:lightRig rig="threePt" dir="t"/>
+    </dgm:scene3d>
+    <dgm:sp3d/>
+    <dgm:txPr/>
+    <dgm:style>
+      <a:lnRef idx="2">
+        <a:scrgbClr r="0" g="0" b="0"/>
+      </a:lnRef>
+      <a:fillRef idx="1">
+        <a:scrgbClr r="0" g="0" b="0"/>
+      </a:fillRef>
+      <a:effectRef idx="0">
+        <a:scrgbClr r="0" g="0" b="0"/>
+      </a:effectRef>
+      <a:fontRef idx="minor"/>
+    </dgm:style>
+  </dgm:styleLbl>
+  <dgm:styleLbl name="fgAcc3">
+    <dgm:scene3d>
+      <a:camera prst="orthographicFront"/>
+      <a:lightRig rig="threePt" dir="t"/>
+    </dgm:scene3d>
+    <dgm:sp3d/>
+    <dgm:txPr/>
+    <dgm:style>
+      <a:lnRef idx="2">
+        <a:scrgbClr r="0" g="0" b="0"/>
+      </a:lnRef>
+      <a:fillRef idx="1">
+        <a:scrgbClr r="0" g="0" b="0"/>
+      </a:fillRef>
+      <a:effectRef idx="0">
+        <a:scrgbClr r="0" g="0" b="0"/>
+      </a:effectRef>
+      <a:fontRef idx="minor"/>
+    </dgm:style>
+  </dgm:styleLbl>
+  <dgm:styleLbl name="fgAcc4">
+    <dgm:scene3d>
+      <a:camera prst="orthographicFront"/>
+      <a:lightRig rig="threePt" dir="t"/>
+    </dgm:scene3d>
+    <dgm:sp3d/>
+    <dgm:txPr/>
+    <dgm:style>
+      <a:lnRef idx="2">
+        <a:scrgbClr r="0" g="0" b="0"/>
+      </a:lnRef>
+      <a:fillRef idx="1">
+        <a:scrgbClr r="0" g="0" b="0"/>
+      </a:fillRef>
+      <a:effectRef idx="0">
+        <a:scrgbClr r="0" g="0" b="0"/>
+      </a:effectRef>
+      <a:fontRef idx="minor"/>
+    </dgm:style>
+  </dgm:styleLbl>
+  <dgm:styleLbl name="bgShp">
+    <dgm:scene3d>
+      <a:camera prst="orthographicFront"/>
+      <a:lightRig rig="threePt" dir="t"/>
+    </dgm:scene3d>
+    <dgm:sp3d/>
+    <dgm:txPr/>
+    <dgm:style>
+      <a:lnRef idx="0">
+        <a:scrgbClr r="0" g="0" b="0"/>
+      </a:lnRef>
+      <a:fillRef idx="1">
+        <a:scrgbClr r="0" g="0" b="0"/>
+      </a:fillRef>
+      <a:effectRef idx="0">
+        <a:scrgbClr r="0" g="0" b="0"/>
+      </a:effectRef>
+      <a:fontRef idx="minor"/>
+    </dgm:style>
+  </dgm:styleLbl>
+  <dgm:styleLbl name="dkBgShp">
+    <dgm:scene3d>
+      <a:camera prst="orthographicFront"/>
+      <a:lightRig rig="threePt" dir="t"/>
+    </dgm:scene3d>
+    <dgm:sp3d/>
+    <dgm:txPr/>
+    <dgm:style>
+      <a:lnRef idx="0">
+        <a:scrgbClr r="0" g="0" b="0"/>
+      </a:lnRef>
+      <a:fillRef idx="1">
+        <a:scrgbClr r="0" g="0" b="0"/>
+      </a:fillRef>
+      <a:effectRef idx="0">
+        <a:scrgbClr r="0" g="0" b="0"/>
+      </a:effectRef>
+      <a:fontRef idx="minor"/>
+    </dgm:style>
+  </dgm:styleLbl>
+  <dgm:styleLbl name="trBgShp">
+    <dgm:scene3d>
+      <a:camera prst="orthographicFront"/>
+      <a:lightRig rig="threePt" dir="t"/>
+    </dgm:scene3d>
+    <dgm:sp3d/>
+    <dgm:txPr/>
+    <dgm:style>
+      <a:lnRef idx="0">
+        <a:scrgbClr r="0" g="0" b="0"/>
+      </a:lnRef>
+      <a:fillRef idx="1">
+        <a:scrgbClr r="0" g="0" b="0"/>
+      </a:fillRef>
+      <a:effectRef idx="0">
+        <a:scrgbClr r="0" g="0" b="0"/>
+      </a:effectRef>
+      <a:fontRef idx="minor"/>
+    </dgm:style>
+  </dgm:styleLbl>
+  <dgm:styleLbl name="fgShp">
+    <dgm:scene3d>
+      <a:camera prst="orthographicFront"/>
+      <a:lightRig rig="threePt" dir="t"/>
+    </dgm:scene3d>
+    <dgm:sp3d/>
+    <dgm:txPr/>
+    <dgm:style>
+      <a:lnRef idx="2">
+        <a:scrgbClr r="0" g="0" b="0"/>
+      </a:lnRef>
+      <a:fillRef idx="1">
+        <a:scrgbClr r="0" g="0" b="0"/>
+      </a:fillRef>
+      <a:effectRef idx="0">
+        <a:scrgbClr r="0" g="0" b="0"/>
+      </a:effectRef>
+      <a:fontRef idx="minor"/>
+    </dgm:style>
+  </dgm:styleLbl>
+  <dgm:styleLbl name="revTx">
+    <dgm:scene3d>
+      <a:camera prst="orthographicFront"/>
+      <a:lightRig rig="threePt" dir="t"/>
+    </dgm:scene3d>
+    <dgm:sp3d/>
+    <dgm:txPr/>
+    <dgm:style>
+      <a:lnRef idx="0">
+        <a:scrgbClr r="0" g="0" b="0"/>
+      </a:lnRef>
+      <a:fillRef idx="0">
+        <a:scrgbClr r="0" g="0" b="0"/>
+      </a:fillRef>
+      <a:effectRef idx="0">
+        <a:scrgbClr r="0" g="0" b="0"/>
+      </a:effectRef>
+      <a:fontRef idx="minor"/>
+    </dgm:style>
+  </dgm:styleLbl>
+</dgm:styleDef>
+</file>
+
 <file path=ppt/slideLayouts/slideLayout1.xml><?xml version="1.0" encoding="utf-8"?>
 <p:sldLayout xmlns:a="http://schemas.openxmlformats.org/drawingml/2006/main" xmlns:r="http://schemas.openxmlformats.org/officeDocument/2006/relationships" xmlns:p="http://schemas.openxmlformats.org/presentationml/2006/main" type="title" preserve="1">
   <p:cSld name="Title Slide">
@@ -822,7 +3274,7 @@
           <a:p>
             <a:fld id="{2395C5C9-164C-46B3-A87E-7660D39D3106}" type="datetime2">
               <a:rPr lang="en-US" smtClean="0"/>
-              <a:t>Tuesday, March 10, 2026</a:t>
+              <a:t>Wednesday, March 11, 2026</a:t>
             </a:fld>
             <a:endParaRPr lang="en-US"/>
           </a:p>
@@ -1023,7 +3475,7 @@
           <a:p>
             <a:fld id="{5B75179A-1E2B-41AB-B400-4F1B4022FAEE}" type="datetime2">
               <a:rPr lang="en-US" smtClean="0"/>
-              <a:t>Tuesday, March 10, 2026</a:t>
+              <a:t>Wednesday, March 11, 2026</a:t>
             </a:fld>
             <a:endParaRPr lang="en-US"/>
           </a:p>
@@ -1234,7 +3686,7 @@
           <a:p>
             <a:fld id="{05681D0F-6595-4F14-8EF3-954CD87C797B}" type="datetime2">
               <a:rPr lang="en-US" smtClean="0"/>
-              <a:t>Tuesday, March 10, 2026</a:t>
+              <a:t>Wednesday, March 11, 2026</a:t>
             </a:fld>
             <a:endParaRPr lang="en-US"/>
           </a:p>
@@ -1434,7 +3886,7 @@
           <a:p>
             <a:fld id="{4DDCFF8A-AAF8-4A12-8A91-9CA0EAF6CBB9}" type="datetime2">
               <a:rPr lang="en-US" smtClean="0"/>
-              <a:t>Tuesday, March 10, 2026</a:t>
+              <a:t>Wednesday, March 11, 2026</a:t>
             </a:fld>
             <a:endParaRPr lang="en-US"/>
           </a:p>
@@ -1712,7 +4164,7 @@
           <a:p>
             <a:fld id="{ABCC25C3-021A-4B0B-8F70-0C181FE1CF45}" type="datetime2">
               <a:rPr lang="en-US" smtClean="0"/>
-              <a:t>Tuesday, March 10, 2026</a:t>
+              <a:t>Wednesday, March 11, 2026</a:t>
             </a:fld>
             <a:endParaRPr lang="en-US"/>
           </a:p>
@@ -1969,7 +4421,7 @@
           <a:p>
             <a:fld id="{0C23D88D-8CEC-4ED9-A53B-5596187D9A16}" type="datetime2">
               <a:rPr lang="en-US" smtClean="0"/>
-              <a:t>Tuesday, March 10, 2026</a:t>
+              <a:t>Wednesday, March 11, 2026</a:t>
             </a:fld>
             <a:endParaRPr lang="en-US"/>
           </a:p>
@@ -2382,7 +4834,7 @@
           <a:p>
             <a:fld id="{D2CCD382-DFDA-4722-A27A-59C21AD112F2}" type="datetime2">
               <a:rPr lang="en-US" smtClean="0"/>
-              <a:t>Tuesday, March 10, 2026</a:t>
+              <a:t>Wednesday, March 11, 2026</a:t>
             </a:fld>
             <a:endParaRPr lang="en-US"/>
           </a:p>
@@ -2526,7 +4978,7 @@
           <a:p>
             <a:fld id="{22F2A30D-1C09-413F-AAB1-38F366000715}" type="datetime2">
               <a:rPr lang="en-US" smtClean="0"/>
-              <a:t>Tuesday, March 10, 2026</a:t>
+              <a:t>Wednesday, March 11, 2026</a:t>
             </a:fld>
             <a:endParaRPr lang="en-US"/>
           </a:p>
@@ -2648,7 +5100,7 @@
           <a:p>
             <a:fld id="{6DB82B9C-D65E-4F64-95C3-B10F3B00F0D9}" type="datetime2">
               <a:rPr lang="en-US" smtClean="0"/>
-              <a:t>Tuesday, March 10, 2026</a:t>
+              <a:t>Wednesday, March 11, 2026</a:t>
             </a:fld>
             <a:endParaRPr lang="en-US"/>
           </a:p>
@@ -2969,7 +5421,7 @@
           <a:p>
             <a:fld id="{B7F5FDCC-6AAC-4A08-B9E0-3793AB5E64C3}" type="datetime2">
               <a:rPr lang="en-US" smtClean="0"/>
-              <a:t>Tuesday, March 10, 2026</a:t>
+              <a:t>Wednesday, March 11, 2026</a:t>
             </a:fld>
             <a:endParaRPr lang="en-US"/>
           </a:p>
@@ -3255,7 +5707,7 @@
           <a:p>
             <a:fld id="{349FE94D-439C-40F1-900E-BC07940E3988}" type="datetime2">
               <a:rPr lang="en-US" smtClean="0"/>
-              <a:t>Tuesday, March 10, 2026</a:t>
+              <a:t>Wednesday, March 11, 2026</a:t>
             </a:fld>
             <a:endParaRPr lang="en-US"/>
           </a:p>
@@ -3542,7 +5994,7 @@
           <a:p>
             <a:fld id="{8DEA2CF1-0EB2-4673-802D-3371233E4A77}" type="datetime2">
               <a:rPr lang="en-US" smtClean="0"/>
-              <a:t>Tuesday, March 10, 2026</a:t>
+              <a:t>Wednesday, March 11, 2026</a:t>
             </a:fld>
             <a:endParaRPr lang="en-US"/>
           </a:p>
@@ -4174,7 +6626,7 @@
         </p:spPr>
         <p:txBody>
           <a:bodyPr vert="horz" lIns="0" tIns="0" rIns="0" bIns="0" rtlCol="0" anchor="t">
-            <a:normAutofit/>
+            <a:normAutofit fontScale="70000" lnSpcReduction="20000"/>
           </a:bodyPr>
           <a:lstStyle/>
           <a:p>
@@ -4208,6 +6660,39 @@
               </a:rPr>
               <a:t>Sprint 2: 7 t/m 14</a:t>
             </a:r>
+          </a:p>
+          <a:p>
+            <a:pPr marL="457200" indent="-457200">
+              <a:buFont typeface="Arial" panose="03070A02030502020204" pitchFamily="66" charset="0"/>
+              <a:buChar char="•"/>
+            </a:pPr>
+            <a:r>
+              <a:rPr lang="nl-NL" noProof="0" dirty="0">
+                <a:solidFill>
+                  <a:srgbClr val="FFFFFF">
+                    <a:alpha val="58000"/>
+                  </a:srgbClr>
+                </a:solidFill>
+              </a:rPr>
+              <a:t>Sprint 3: 15 t/</a:t>
+            </a:r>
+            <a:r>
+              <a:rPr lang="nl-NL" noProof="0">
+                <a:solidFill>
+                  <a:srgbClr val="FFFFFF">
+                    <a:alpha val="58000"/>
+                  </a:srgbClr>
+                </a:solidFill>
+              </a:rPr>
+              <a:t>m 24</a:t>
+            </a:r>
+            <a:endParaRPr lang="nl-NL" noProof="0" dirty="0">
+              <a:solidFill>
+                <a:srgbClr val="FFFFFF">
+                  <a:alpha val="58000"/>
+                </a:srgbClr>
+              </a:solidFill>
+            </a:endParaRPr>
           </a:p>
         </p:txBody>
       </p:sp>
@@ -9550,7 +12035,7 @@
           <a:p>
             <a:pPr algn="ctr"/>
             <a:r>
-              <a:rPr lang="nl-NL" noProof="0"/>
+              <a:rPr lang="nl-NL" noProof="0" dirty="0"/>
               <a:t>Hoe gecheckt word of je </a:t>
             </a:r>
             <a:r>
@@ -9661,12 +12146,8 @@
               <a:t>Sign</a:t>
             </a:r>
             <a:r>
-              <a:rPr lang="nl-NL" dirty="0"/>
-              <a:t>-up aanpassen</a:t>
-            </a:r>
-            <a:r>
               <a:rPr lang="nl-NL" noProof="0" dirty="0"/>
-              <a:t>:</a:t>
+              <a:t>-up aanpassen:</a:t>
             </a:r>
           </a:p>
           <a:p>
@@ -9695,11 +12176,11 @@
           </a:p>
           <a:p>
             <a:r>
-              <a:rPr lang="nl-NL" dirty="0"/>
+              <a:rPr lang="nl-NL" noProof="0" dirty="0"/>
               <a:t>Automatische rol </a:t>
             </a:r>
             <a:r>
-              <a:rPr lang="nl-NL" dirty="0" err="1"/>
+              <a:rPr lang="nl-NL" noProof="0" dirty="0" err="1"/>
               <a:t>aanmaker</a:t>
             </a:r>
             <a:r>
@@ -9720,6 +12201,2203 @@
     <p:extLst>
       <p:ext uri="{BB962C8B-B14F-4D97-AF65-F5344CB8AC3E}">
         <p14:creationId xmlns:p14="http://schemas.microsoft.com/office/powerpoint/2010/main" val="1462320953"/>
+      </p:ext>
+    </p:extLst>
+  </p:cSld>
+  <p:clrMapOvr>
+    <a:masterClrMapping/>
+  </p:clrMapOvr>
+</p:sld>
+</file>
+
+<file path=ppt/slides/slide15.xml><?xml version="1.0" encoding="utf-8"?>
+<p:sld xmlns:a="http://schemas.openxmlformats.org/drawingml/2006/main" xmlns:r="http://schemas.openxmlformats.org/officeDocument/2006/relationships" xmlns:p="http://schemas.openxmlformats.org/presentationml/2006/main">
+  <p:cSld>
+    <p:bg>
+      <p:bgPr>
+        <a:solidFill>
+          <a:schemeClr val="bg2"/>
+        </a:solidFill>
+        <a:effectLst/>
+      </p:bgPr>
+    </p:bg>
+    <p:spTree>
+      <p:nvGrpSpPr>
+        <p:cNvPr id="1" name=""/>
+        <p:cNvGrpSpPr/>
+        <p:nvPr/>
+      </p:nvGrpSpPr>
+      <p:grpSpPr>
+        <a:xfrm>
+          <a:off x="0" y="0"/>
+          <a:ext cx="0" cy="0"/>
+          <a:chOff x="0" y="0"/>
+          <a:chExt cx="0" cy="0"/>
+        </a:xfrm>
+      </p:grpSpPr>
+      <p:sp useBgFill="1">
+        <p:nvSpPr>
+          <p:cNvPr id="12" name="Rectangle 11">
+            <a:extLst>
+              <a:ext uri="{FF2B5EF4-FFF2-40B4-BE49-F238E27FC236}">
+                <a16:creationId xmlns:a16="http://schemas.microsoft.com/office/drawing/2014/main" id="{B950CAB9-F0AE-414E-805C-776919054E49}"/>
+              </a:ext>
+              <a:ext uri="{C183D7F6-B498-43B3-948B-1728B52AA6E4}">
+                <adec:decorative xmlns:adec="http://schemas.microsoft.com/office/drawing/2017/decorative" val="1"/>
+              </a:ext>
+            </a:extLst>
+          </p:cNvPr>
+          <p:cNvSpPr>
+            <a:spLocks noGrp="1" noRot="1" noChangeAspect="1" noMove="1" noResize="1" noEditPoints="1" noAdjustHandles="1" noChangeArrowheads="1" noChangeShapeType="1" noTextEdit="1"/>
+          </p:cNvSpPr>
+          <p:nvPr>
+            <p:extLst>
+              <p:ext uri="{386F3935-93C4-4BCD-93E2-E3B085C9AB24}">
+                <p16:designElem xmlns:p16="http://schemas.microsoft.com/office/powerpoint/2015/main" val="1"/>
+              </p:ext>
+            </p:extLst>
+          </p:nvPr>
+        </p:nvSpPr>
+        <p:spPr>
+          <a:xfrm>
+            <a:off x="0" y="0"/>
+            <a:ext cx="12192000" cy="6858000"/>
+          </a:xfrm>
+          <a:prstGeom prst="rect">
+            <a:avLst/>
+          </a:prstGeom>
+          <a:ln w="12700" cap="flat" cmpd="sng" algn="ctr">
+            <a:noFill/>
+            <a:prstDash val="solid"/>
+            <a:miter lim="800000"/>
+          </a:ln>
+          <a:effectLst/>
+        </p:spPr>
+        <p:style>
+          <a:lnRef idx="2">
+            <a:schemeClr val="accent1">
+              <a:shade val="50000"/>
+            </a:schemeClr>
+          </a:lnRef>
+          <a:fillRef idx="1">
+            <a:schemeClr val="accent1"/>
+          </a:fillRef>
+          <a:effectRef idx="0">
+            <a:schemeClr val="accent1"/>
+          </a:effectRef>
+          <a:fontRef idx="minor">
+            <a:schemeClr val="lt1"/>
+          </a:fontRef>
+        </p:style>
+        <p:txBody>
+          <a:bodyPr rtlCol="0" anchor="ctr"/>
+          <a:lstStyle/>
+          <a:p>
+            <a:pPr algn="ctr"/>
+            <a:endParaRPr lang="nl-NL" noProof="0" dirty="0"/>
+          </a:p>
+        </p:txBody>
+      </p:sp>
+      <p:sp>
+        <p:nvSpPr>
+          <p:cNvPr id="14" name="Rectangle 13">
+            <a:extLst>
+              <a:ext uri="{FF2B5EF4-FFF2-40B4-BE49-F238E27FC236}">
+                <a16:creationId xmlns:a16="http://schemas.microsoft.com/office/drawing/2014/main" id="{227C80BC-190C-4813-9BAE-C4B56C5C7E84}"/>
+              </a:ext>
+              <a:ext uri="{C183D7F6-B498-43B3-948B-1728B52AA6E4}">
+                <adec:decorative xmlns:adec="http://schemas.microsoft.com/office/drawing/2017/decorative" val="1"/>
+              </a:ext>
+            </a:extLst>
+          </p:cNvPr>
+          <p:cNvSpPr>
+            <a:spLocks noGrp="1" noRot="1" noChangeAspect="1" noMove="1" noResize="1" noEditPoints="1" noAdjustHandles="1" noChangeArrowheads="1" noChangeShapeType="1" noTextEdit="1"/>
+          </p:cNvSpPr>
+          <p:nvPr>
+            <p:extLst>
+              <p:ext uri="{386F3935-93C4-4BCD-93E2-E3B085C9AB24}">
+                <p16:designElem xmlns:p16="http://schemas.microsoft.com/office/powerpoint/2015/main" val="1"/>
+              </p:ext>
+            </p:extLst>
+          </p:nvPr>
+        </p:nvSpPr>
+        <p:spPr>
+          <a:xfrm>
+            <a:off x="0" y="0"/>
+            <a:ext cx="12192000" cy="6858000"/>
+          </a:xfrm>
+          <a:prstGeom prst="rect">
+            <a:avLst/>
+          </a:prstGeom>
+          <a:solidFill>
+            <a:schemeClr val="bg2">
+              <a:lumMod val="90000"/>
+              <a:lumOff val="10000"/>
+            </a:schemeClr>
+          </a:solidFill>
+          <a:ln w="12700" cap="flat" cmpd="sng" algn="ctr">
+            <a:noFill/>
+            <a:prstDash val="solid"/>
+            <a:miter lim="800000"/>
+          </a:ln>
+          <a:effectLst/>
+        </p:spPr>
+        <p:style>
+          <a:lnRef idx="2">
+            <a:schemeClr val="accent1">
+              <a:shade val="50000"/>
+            </a:schemeClr>
+          </a:lnRef>
+          <a:fillRef idx="1">
+            <a:schemeClr val="accent1"/>
+          </a:fillRef>
+          <a:effectRef idx="0">
+            <a:schemeClr val="accent1"/>
+          </a:effectRef>
+          <a:fontRef idx="minor">
+            <a:schemeClr val="lt1"/>
+          </a:fontRef>
+        </p:style>
+        <p:txBody>
+          <a:bodyPr rtlCol="0" anchor="ctr"/>
+          <a:lstStyle/>
+          <a:p>
+            <a:pPr algn="ctr"/>
+            <a:endParaRPr lang="nl-NL" noProof="0" dirty="0"/>
+          </a:p>
+        </p:txBody>
+      </p:sp>
+      <p:sp>
+        <p:nvSpPr>
+          <p:cNvPr id="2" name="Title 1">
+            <a:extLst>
+              <a:ext uri="{FF2B5EF4-FFF2-40B4-BE49-F238E27FC236}">
+                <a16:creationId xmlns:a16="http://schemas.microsoft.com/office/drawing/2014/main" id="{D891304B-B37C-468E-D920-8144171441EF}"/>
+              </a:ext>
+            </a:extLst>
+          </p:cNvPr>
+          <p:cNvSpPr>
+            <a:spLocks noGrp="1"/>
+          </p:cNvSpPr>
+          <p:nvPr>
+            <p:ph type="title"/>
+          </p:nvPr>
+        </p:nvSpPr>
+        <p:spPr>
+          <a:xfrm>
+            <a:off x="720000" y="619201"/>
+            <a:ext cx="3095626" cy="1477328"/>
+          </a:xfrm>
+        </p:spPr>
+        <p:txBody>
+          <a:bodyPr>
+            <a:normAutofit/>
+          </a:bodyPr>
+          <a:lstStyle/>
+          <a:p>
+            <a:r>
+              <a:rPr lang="nl-NL" noProof="0" dirty="0">
+                <a:hlinkClick r:id="rId2"/>
+              </a:rPr>
+              <a:t>Sprint 3:</a:t>
+            </a:r>
+            <a:endParaRPr lang="nl-NL" noProof="0" dirty="0"/>
+          </a:p>
+        </p:txBody>
+      </p:sp>
+      <p:sp>
+        <p:nvSpPr>
+          <p:cNvPr id="9" name="Content Placeholder 8">
+            <a:extLst>
+              <a:ext uri="{FF2B5EF4-FFF2-40B4-BE49-F238E27FC236}">
+                <a16:creationId xmlns:a16="http://schemas.microsoft.com/office/drawing/2014/main" id="{91923C0D-E880-6E7E-4483-970533DA0FBD}"/>
+              </a:ext>
+            </a:extLst>
+          </p:cNvPr>
+          <p:cNvSpPr>
+            <a:spLocks noGrp="1"/>
+          </p:cNvSpPr>
+          <p:nvPr>
+            <p:ph idx="1"/>
+          </p:nvPr>
+        </p:nvSpPr>
+        <p:spPr>
+          <a:xfrm>
+            <a:off x="4548188" y="633600"/>
+            <a:ext cx="7570018" cy="1282513"/>
+          </a:xfrm>
+        </p:spPr>
+        <p:txBody>
+          <a:bodyPr>
+            <a:normAutofit lnSpcReduction="10000"/>
+          </a:bodyPr>
+          <a:lstStyle/>
+          <a:p>
+            <a:r>
+              <a:rPr lang="nl-NL" noProof="0" dirty="0" err="1"/>
+              <a:t>Sign</a:t>
+            </a:r>
+            <a:r>
+              <a:rPr lang="nl-NL" noProof="0" dirty="0"/>
+              <a:t>-up pagina aanpassen: dia 16 t/m 18</a:t>
+            </a:r>
+          </a:p>
+          <a:p>
+            <a:r>
+              <a:rPr lang="nl-NL" noProof="0" dirty="0"/>
+              <a:t>automatische accountrollen: dia 19 t/m 21</a:t>
+            </a:r>
+          </a:p>
+          <a:p>
+            <a:r>
+              <a:rPr lang="nl-NL" noProof="0" dirty="0"/>
+              <a:t>Gebruiker data zichtbaar op site: 22 t/m 24</a:t>
+            </a:r>
+          </a:p>
+        </p:txBody>
+      </p:sp>
+      <p:pic>
+        <p:nvPicPr>
+          <p:cNvPr id="5" name="Content Placeholder 4">
+            <a:extLst>
+              <a:ext uri="{FF2B5EF4-FFF2-40B4-BE49-F238E27FC236}">
+                <a16:creationId xmlns:a16="http://schemas.microsoft.com/office/drawing/2014/main" id="{F53CB3CE-175F-34CA-4508-3FDE8F9A0228}"/>
+              </a:ext>
+            </a:extLst>
+          </p:cNvPr>
+          <p:cNvPicPr>
+            <a:picLocks noChangeAspect="1"/>
+          </p:cNvPicPr>
+          <p:nvPr/>
+        </p:nvPicPr>
+        <p:blipFill>
+          <a:blip r:embed="rId3">
+            <a:extLst>
+              <a:ext uri="{28A0092B-C50C-407E-A947-70E740481C1C}">
+                <a14:useLocalDpi xmlns:a14="http://schemas.microsoft.com/office/drawing/2010/main" val="0"/>
+              </a:ext>
+            </a:extLst>
+          </a:blip>
+          <a:srcRect b="9545"/>
+          <a:stretch>
+            <a:fillRect/>
+          </a:stretch>
+        </p:blipFill>
+        <p:spPr>
+          <a:xfrm>
+            <a:off x="20" y="2584536"/>
+            <a:ext cx="12191980" cy="4273465"/>
+          </a:xfrm>
+          <a:custGeom>
+            <a:avLst/>
+            <a:gdLst/>
+            <a:ahLst/>
+            <a:cxnLst/>
+            <a:rect l="l" t="t" r="r" b="b"/>
+            <a:pathLst>
+              <a:path w="12192000" h="4273465">
+                <a:moveTo>
+                  <a:pt x="5674827" y="107"/>
+                </a:moveTo>
+                <a:cubicBezTo>
+                  <a:pt x="6770307" y="-2269"/>
+                  <a:pt x="8062055" y="35744"/>
+                  <a:pt x="8986322" y="35744"/>
+                </a:cubicBezTo>
+                <a:cubicBezTo>
+                  <a:pt x="10233527" y="52639"/>
+                  <a:pt x="11168930" y="69533"/>
+                  <a:pt x="12015248" y="52639"/>
+                </a:cubicBezTo>
+                <a:lnTo>
+                  <a:pt x="12192000" y="60460"/>
+                </a:lnTo>
+                <a:lnTo>
+                  <a:pt x="12192000" y="4273465"/>
+                </a:lnTo>
+                <a:lnTo>
+                  <a:pt x="0" y="4273465"/>
+                </a:lnTo>
+                <a:lnTo>
+                  <a:pt x="0" y="65877"/>
+                </a:lnTo>
+                <a:lnTo>
+                  <a:pt x="107413" y="52639"/>
+                </a:lnTo>
+                <a:cubicBezTo>
+                  <a:pt x="716168" y="1955"/>
+                  <a:pt x="1725810" y="137111"/>
+                  <a:pt x="4665650" y="18850"/>
+                </a:cubicBezTo>
+                <a:cubicBezTo>
+                  <a:pt x="4966315" y="6179"/>
+                  <a:pt x="5309667" y="899"/>
+                  <a:pt x="5674827" y="107"/>
+                </a:cubicBezTo>
+                <a:close/>
+              </a:path>
+            </a:pathLst>
+          </a:custGeom>
+        </p:spPr>
+      </p:pic>
+      <p:sp>
+        <p:nvSpPr>
+          <p:cNvPr id="6" name="TextBox 5">
+            <a:extLst>
+              <a:ext uri="{FF2B5EF4-FFF2-40B4-BE49-F238E27FC236}">
+                <a16:creationId xmlns:a16="http://schemas.microsoft.com/office/drawing/2014/main" id="{25B3C614-AE9E-D47A-8BBD-01561C7CA9D0}"/>
+              </a:ext>
+            </a:extLst>
+          </p:cNvPr>
+          <p:cNvSpPr txBox="1"/>
+          <p:nvPr/>
+        </p:nvSpPr>
+        <p:spPr>
+          <a:xfrm>
+            <a:off x="0" y="1274856"/>
+            <a:ext cx="4417995" cy="830997"/>
+          </a:xfrm>
+          <a:prstGeom prst="rect">
+            <a:avLst/>
+          </a:prstGeom>
+          <a:noFill/>
+        </p:spPr>
+        <p:txBody>
+          <a:bodyPr wrap="square" rtlCol="0">
+            <a:spAutoFit/>
+          </a:bodyPr>
+          <a:lstStyle/>
+          <a:p>
+            <a:r>
+              <a:rPr lang="nl-NL" noProof="0" dirty="0"/>
+              <a:t>Sprint doel:</a:t>
+            </a:r>
+          </a:p>
+          <a:p>
+            <a:r>
+              <a:rPr lang="nl-NL" sz="1200" noProof="0" dirty="0"/>
+              <a:t>Gebruikers kunnen hun account meer personaliseren en data bekijken</a:t>
+            </a:r>
+            <a:r>
+              <a:rPr lang="nl-NL" noProof="0" dirty="0"/>
+              <a:t>.</a:t>
+            </a:r>
+          </a:p>
+        </p:txBody>
+      </p:sp>
+    </p:spTree>
+    <p:extLst>
+      <p:ext uri="{BB962C8B-B14F-4D97-AF65-F5344CB8AC3E}">
+        <p14:creationId xmlns:p14="http://schemas.microsoft.com/office/powerpoint/2010/main" val="3944690666"/>
+      </p:ext>
+    </p:extLst>
+  </p:cSld>
+  <p:clrMapOvr>
+    <a:masterClrMapping/>
+  </p:clrMapOvr>
+</p:sld>
+</file>
+
+<file path=ppt/slides/slide16.xml><?xml version="1.0" encoding="utf-8"?>
+<p:sld xmlns:a="http://schemas.openxmlformats.org/drawingml/2006/main" xmlns:r="http://schemas.openxmlformats.org/officeDocument/2006/relationships" xmlns:p="http://schemas.openxmlformats.org/presentationml/2006/main">
+  <p:cSld>
+    <p:spTree>
+      <p:nvGrpSpPr>
+        <p:cNvPr id="1" name=""/>
+        <p:cNvGrpSpPr/>
+        <p:nvPr/>
+      </p:nvGrpSpPr>
+      <p:grpSpPr>
+        <a:xfrm>
+          <a:off x="0" y="0"/>
+          <a:ext cx="0" cy="0"/>
+          <a:chOff x="0" y="0"/>
+          <a:chExt cx="0" cy="0"/>
+        </a:xfrm>
+      </p:grpSpPr>
+      <p:sp>
+        <p:nvSpPr>
+          <p:cNvPr id="2" name="Title 1">
+            <a:extLst>
+              <a:ext uri="{FF2B5EF4-FFF2-40B4-BE49-F238E27FC236}">
+                <a16:creationId xmlns:a16="http://schemas.microsoft.com/office/drawing/2014/main" id="{6B1C604B-BF79-5761-B41A-06DAF75BB2DB}"/>
+              </a:ext>
+            </a:extLst>
+          </p:cNvPr>
+          <p:cNvSpPr>
+            <a:spLocks noGrp="1"/>
+          </p:cNvSpPr>
+          <p:nvPr>
+            <p:ph type="title"/>
+          </p:nvPr>
+        </p:nvSpPr>
+        <p:spPr/>
+        <p:txBody>
+          <a:bodyPr/>
+          <a:lstStyle/>
+          <a:p>
+            <a:r>
+              <a:rPr lang="nl-NL" noProof="0" dirty="0">
+                <a:hlinkClick r:id="rId2"/>
+              </a:rPr>
+              <a:t>User story</a:t>
+            </a:r>
+            <a:r>
+              <a:rPr lang="nl-NL" noProof="0" dirty="0"/>
+              <a:t>: </a:t>
+            </a:r>
+            <a:r>
+              <a:rPr lang="nl-NL" noProof="0" dirty="0" err="1"/>
+              <a:t>sign</a:t>
+            </a:r>
+            <a:r>
+              <a:rPr lang="nl-NL" noProof="0" dirty="0"/>
+              <a:t>-up pagina aanpassen van de basis template</a:t>
+            </a:r>
+          </a:p>
+        </p:txBody>
+      </p:sp>
+      <p:sp>
+        <p:nvSpPr>
+          <p:cNvPr id="3" name="Content Placeholder 2">
+            <a:extLst>
+              <a:ext uri="{FF2B5EF4-FFF2-40B4-BE49-F238E27FC236}">
+                <a16:creationId xmlns:a16="http://schemas.microsoft.com/office/drawing/2014/main" id="{8A250A4A-7E24-BC79-17CE-82C15BB0D8B7}"/>
+              </a:ext>
+            </a:extLst>
+          </p:cNvPr>
+          <p:cNvSpPr>
+            <a:spLocks noGrp="1"/>
+          </p:cNvSpPr>
+          <p:nvPr>
+            <p:ph idx="1"/>
+          </p:nvPr>
+        </p:nvSpPr>
+        <p:spPr>
+          <a:xfrm>
+            <a:off x="506931" y="2782328"/>
+            <a:ext cx="5589069" cy="2339975"/>
+          </a:xfrm>
+        </p:spPr>
+        <p:txBody>
+          <a:bodyPr/>
+          <a:lstStyle/>
+          <a:p>
+            <a:r>
+              <a:rPr lang="nl-NL" sz="1600" noProof="0" dirty="0"/>
+              <a:t>Gebruikers kunnen een username invullen met het maken van een account</a:t>
+            </a:r>
+            <a:r>
+              <a:rPr lang="nl-NL" noProof="0" dirty="0"/>
+              <a:t>.</a:t>
+            </a:r>
+          </a:p>
+          <a:p>
+            <a:r>
+              <a:rPr lang="nl-NL" noProof="0" dirty="0"/>
+              <a:t>De nieuwe gegevens worden correct opgeslagen in de database.</a:t>
+            </a:r>
+          </a:p>
+        </p:txBody>
+      </p:sp>
+      <p:sp>
+        <p:nvSpPr>
+          <p:cNvPr id="4" name="TextBox 3">
+            <a:extLst>
+              <a:ext uri="{FF2B5EF4-FFF2-40B4-BE49-F238E27FC236}">
+                <a16:creationId xmlns:a16="http://schemas.microsoft.com/office/drawing/2014/main" id="{300A372F-8349-BBD9-1B82-3AC55BDE8966}"/>
+              </a:ext>
+            </a:extLst>
+          </p:cNvPr>
+          <p:cNvSpPr txBox="1"/>
+          <p:nvPr/>
+        </p:nvSpPr>
+        <p:spPr>
+          <a:xfrm>
+            <a:off x="506931" y="2096528"/>
+            <a:ext cx="4941644" cy="461665"/>
+          </a:xfrm>
+          <a:prstGeom prst="rect">
+            <a:avLst/>
+          </a:prstGeom>
+          <a:noFill/>
+        </p:spPr>
+        <p:txBody>
+          <a:bodyPr wrap="square" rtlCol="0">
+            <a:spAutoFit/>
+          </a:bodyPr>
+          <a:lstStyle/>
+          <a:p>
+            <a:r>
+              <a:rPr lang="nl-NL" sz="2400" noProof="0" dirty="0"/>
+              <a:t>Acceptatie </a:t>
+            </a:r>
+            <a:r>
+              <a:rPr lang="nl-NL" sz="2400" noProof="0" dirty="0" err="1"/>
+              <a:t>critiria</a:t>
+            </a:r>
+            <a:r>
+              <a:rPr lang="nl-NL" noProof="0" dirty="0"/>
+              <a:t>:</a:t>
+            </a:r>
+          </a:p>
+        </p:txBody>
+      </p:sp>
+    </p:spTree>
+    <p:extLst>
+      <p:ext uri="{BB962C8B-B14F-4D97-AF65-F5344CB8AC3E}">
+        <p14:creationId xmlns:p14="http://schemas.microsoft.com/office/powerpoint/2010/main" val="4233397428"/>
+      </p:ext>
+    </p:extLst>
+  </p:cSld>
+  <p:clrMapOvr>
+    <a:masterClrMapping/>
+  </p:clrMapOvr>
+</p:sld>
+</file>
+
+<file path=ppt/slides/slide17.xml><?xml version="1.0" encoding="utf-8"?>
+<p:sld xmlns:a="http://schemas.openxmlformats.org/drawingml/2006/main" xmlns:r="http://schemas.openxmlformats.org/officeDocument/2006/relationships" xmlns:p="http://schemas.openxmlformats.org/presentationml/2006/main">
+  <p:cSld>
+    <p:bg>
+      <p:bgPr>
+        <a:solidFill>
+          <a:schemeClr val="bg2"/>
+        </a:solidFill>
+        <a:effectLst/>
+      </p:bgPr>
+    </p:bg>
+    <p:spTree>
+      <p:nvGrpSpPr>
+        <p:cNvPr id="1" name=""/>
+        <p:cNvGrpSpPr/>
+        <p:nvPr/>
+      </p:nvGrpSpPr>
+      <p:grpSpPr>
+        <a:xfrm>
+          <a:off x="0" y="0"/>
+          <a:ext cx="0" cy="0"/>
+          <a:chOff x="0" y="0"/>
+          <a:chExt cx="0" cy="0"/>
+        </a:xfrm>
+      </p:grpSpPr>
+      <p:sp>
+        <p:nvSpPr>
+          <p:cNvPr id="12" name="Rectangle 11">
+            <a:extLst>
+              <a:ext uri="{FF2B5EF4-FFF2-40B4-BE49-F238E27FC236}">
+                <a16:creationId xmlns:a16="http://schemas.microsoft.com/office/drawing/2014/main" id="{09646535-AEF6-4883-A4F9-EEC1F8B4319E}"/>
+              </a:ext>
+              <a:ext uri="{C183D7F6-B498-43B3-948B-1728B52AA6E4}">
+                <adec:decorative xmlns:adec="http://schemas.microsoft.com/office/drawing/2017/decorative" val="1"/>
+              </a:ext>
+            </a:extLst>
+          </p:cNvPr>
+          <p:cNvSpPr>
+            <a:spLocks noGrp="1" noRot="1" noChangeAspect="1" noMove="1" noResize="1" noEditPoints="1" noAdjustHandles="1" noChangeArrowheads="1" noChangeShapeType="1" noTextEdit="1"/>
+          </p:cNvSpPr>
+          <p:nvPr>
+            <p:extLst>
+              <p:ext uri="{386F3935-93C4-4BCD-93E2-E3B085C9AB24}">
+                <p16:designElem xmlns:p16="http://schemas.microsoft.com/office/powerpoint/2015/main" val="1"/>
+              </p:ext>
+            </p:extLst>
+          </p:nvPr>
+        </p:nvSpPr>
+        <p:spPr>
+          <a:xfrm>
+            <a:off x="0" y="0"/>
+            <a:ext cx="12192000" cy="6858000"/>
+          </a:xfrm>
+          <a:prstGeom prst="rect">
+            <a:avLst/>
+          </a:prstGeom>
+          <a:solidFill>
+            <a:schemeClr val="bg2">
+              <a:lumMod val="90000"/>
+              <a:lumOff val="10000"/>
+            </a:schemeClr>
+          </a:solidFill>
+          <a:ln w="12700" cap="flat" cmpd="sng" algn="ctr">
+            <a:noFill/>
+            <a:prstDash val="solid"/>
+            <a:miter lim="800000"/>
+          </a:ln>
+          <a:effectLst/>
+        </p:spPr>
+        <p:style>
+          <a:lnRef idx="2">
+            <a:schemeClr val="accent1">
+              <a:shade val="50000"/>
+            </a:schemeClr>
+          </a:lnRef>
+          <a:fillRef idx="1">
+            <a:schemeClr val="accent1"/>
+          </a:fillRef>
+          <a:effectRef idx="0">
+            <a:schemeClr val="accent1"/>
+          </a:effectRef>
+          <a:fontRef idx="minor">
+            <a:schemeClr val="lt1"/>
+          </a:fontRef>
+        </p:style>
+        <p:txBody>
+          <a:bodyPr rtlCol="0" anchor="ctr"/>
+          <a:lstStyle/>
+          <a:p>
+            <a:pPr algn="ctr"/>
+            <a:endParaRPr lang="nl-NL" noProof="0" dirty="0"/>
+          </a:p>
+        </p:txBody>
+      </p:sp>
+      <p:sp useBgFill="1">
+        <p:nvSpPr>
+          <p:cNvPr id="14" name="Rectangle 13">
+            <a:extLst>
+              <a:ext uri="{FF2B5EF4-FFF2-40B4-BE49-F238E27FC236}">
+                <a16:creationId xmlns:a16="http://schemas.microsoft.com/office/drawing/2014/main" id="{E991C066-AC4D-4E9D-B3B3-3BCEC4CD889F}"/>
+              </a:ext>
+              <a:ext uri="{C183D7F6-B498-43B3-948B-1728B52AA6E4}">
+                <adec:decorative xmlns:adec="http://schemas.microsoft.com/office/drawing/2017/decorative" val="1"/>
+              </a:ext>
+            </a:extLst>
+          </p:cNvPr>
+          <p:cNvSpPr>
+            <a:spLocks noGrp="1" noRot="1" noChangeAspect="1" noMove="1" noResize="1" noEditPoints="1" noAdjustHandles="1" noChangeArrowheads="1" noChangeShapeType="1" noTextEdit="1"/>
+          </p:cNvSpPr>
+          <p:nvPr>
+            <p:extLst>
+              <p:ext uri="{386F3935-93C4-4BCD-93E2-E3B085C9AB24}">
+                <p16:designElem xmlns:p16="http://schemas.microsoft.com/office/powerpoint/2015/main" val="1"/>
+              </p:ext>
+            </p:extLst>
+          </p:nvPr>
+        </p:nvSpPr>
+        <p:spPr>
+          <a:xfrm>
+            <a:off x="0" y="0"/>
+            <a:ext cx="12192000" cy="6858000"/>
+          </a:xfrm>
+          <a:prstGeom prst="rect">
+            <a:avLst/>
+          </a:prstGeom>
+          <a:ln w="12700" cap="flat" cmpd="sng" algn="ctr">
+            <a:noFill/>
+            <a:prstDash val="solid"/>
+            <a:miter lim="800000"/>
+          </a:ln>
+          <a:effectLst/>
+        </p:spPr>
+        <p:style>
+          <a:lnRef idx="2">
+            <a:schemeClr val="accent1">
+              <a:shade val="50000"/>
+            </a:schemeClr>
+          </a:lnRef>
+          <a:fillRef idx="1">
+            <a:schemeClr val="accent1"/>
+          </a:fillRef>
+          <a:effectRef idx="0">
+            <a:schemeClr val="accent1"/>
+          </a:effectRef>
+          <a:fontRef idx="minor">
+            <a:schemeClr val="lt1"/>
+          </a:fontRef>
+        </p:style>
+        <p:txBody>
+          <a:bodyPr rtlCol="0" anchor="ctr"/>
+          <a:lstStyle/>
+          <a:p>
+            <a:pPr algn="ctr"/>
+            <a:endParaRPr lang="nl-NL" noProof="0" dirty="0"/>
+          </a:p>
+        </p:txBody>
+      </p:sp>
+      <p:sp>
+        <p:nvSpPr>
+          <p:cNvPr id="16" name="Rectangle 15">
+            <a:extLst>
+              <a:ext uri="{FF2B5EF4-FFF2-40B4-BE49-F238E27FC236}">
+                <a16:creationId xmlns:a16="http://schemas.microsoft.com/office/drawing/2014/main" id="{3FB37042-5917-483B-8420-94B65970AD27}"/>
+              </a:ext>
+              <a:ext uri="{C183D7F6-B498-43B3-948B-1728B52AA6E4}">
+                <adec:decorative xmlns:adec="http://schemas.microsoft.com/office/drawing/2017/decorative" val="1"/>
+              </a:ext>
+            </a:extLst>
+          </p:cNvPr>
+          <p:cNvSpPr>
+            <a:spLocks noGrp="1" noRot="1" noChangeAspect="1" noMove="1" noResize="1" noEditPoints="1" noAdjustHandles="1" noChangeArrowheads="1" noChangeShapeType="1" noTextEdit="1"/>
+          </p:cNvSpPr>
+          <p:nvPr>
+            <p:extLst>
+              <p:ext uri="{386F3935-93C4-4BCD-93E2-E3B085C9AB24}">
+                <p16:designElem xmlns:p16="http://schemas.microsoft.com/office/powerpoint/2015/main" val="1"/>
+              </p:ext>
+            </p:extLst>
+          </p:nvPr>
+        </p:nvSpPr>
+        <p:spPr>
+          <a:xfrm>
+            <a:off x="0" y="0"/>
+            <a:ext cx="12192000" cy="6858000"/>
+          </a:xfrm>
+          <a:prstGeom prst="rect">
+            <a:avLst/>
+          </a:prstGeom>
+          <a:solidFill>
+            <a:schemeClr val="bg2">
+              <a:lumMod val="90000"/>
+              <a:lumOff val="10000"/>
+            </a:schemeClr>
+          </a:solidFill>
+          <a:ln w="12700" cap="flat" cmpd="sng" algn="ctr">
+            <a:noFill/>
+            <a:prstDash val="solid"/>
+            <a:miter lim="800000"/>
+          </a:ln>
+          <a:effectLst/>
+        </p:spPr>
+        <p:style>
+          <a:lnRef idx="2">
+            <a:schemeClr val="accent1">
+              <a:shade val="50000"/>
+            </a:schemeClr>
+          </a:lnRef>
+          <a:fillRef idx="1">
+            <a:schemeClr val="accent1"/>
+          </a:fillRef>
+          <a:effectRef idx="0">
+            <a:schemeClr val="accent1"/>
+          </a:effectRef>
+          <a:fontRef idx="minor">
+            <a:schemeClr val="lt1"/>
+          </a:fontRef>
+        </p:style>
+        <p:txBody>
+          <a:bodyPr rtlCol="0" anchor="ctr"/>
+          <a:lstStyle/>
+          <a:p>
+            <a:pPr algn="ctr"/>
+            <a:endParaRPr lang="nl-NL" noProof="0" dirty="0"/>
+          </a:p>
+        </p:txBody>
+      </p:sp>
+      <p:sp>
+        <p:nvSpPr>
+          <p:cNvPr id="2" name="Title 1">
+            <a:extLst>
+              <a:ext uri="{FF2B5EF4-FFF2-40B4-BE49-F238E27FC236}">
+                <a16:creationId xmlns:a16="http://schemas.microsoft.com/office/drawing/2014/main" id="{620C66EE-73D2-D442-FAB8-879CF0663DBC}"/>
+              </a:ext>
+            </a:extLst>
+          </p:cNvPr>
+          <p:cNvSpPr>
+            <a:spLocks noGrp="1"/>
+          </p:cNvSpPr>
+          <p:nvPr>
+            <p:ph type="title"/>
+          </p:nvPr>
+        </p:nvSpPr>
+        <p:spPr>
+          <a:xfrm>
+            <a:off x="720000" y="619199"/>
+            <a:ext cx="8831988" cy="576000"/>
+          </a:xfrm>
+        </p:spPr>
+        <p:txBody>
+          <a:bodyPr vert="horz" wrap="square" lIns="0" tIns="0" rIns="0" bIns="0" rtlCol="0" anchor="t" anchorCtr="0">
+            <a:normAutofit/>
+          </a:bodyPr>
+          <a:lstStyle/>
+          <a:p>
+            <a:r>
+              <a:rPr lang="nl-NL" spc="-100" noProof="0" dirty="0"/>
+              <a:t>Hoe ziet het er uit:</a:t>
+            </a:r>
+          </a:p>
+        </p:txBody>
+      </p:sp>
+      <p:sp useBgFill="1">
+        <p:nvSpPr>
+          <p:cNvPr id="18" name="Freeform: Shape 17">
+            <a:extLst>
+              <a:ext uri="{FF2B5EF4-FFF2-40B4-BE49-F238E27FC236}">
+                <a16:creationId xmlns:a16="http://schemas.microsoft.com/office/drawing/2014/main" id="{13FA3211-8731-425C-9A21-D948374627F9}"/>
+              </a:ext>
+              <a:ext uri="{C183D7F6-B498-43B3-948B-1728B52AA6E4}">
+                <adec:decorative xmlns:adec="http://schemas.microsoft.com/office/drawing/2017/decorative" val="1"/>
+              </a:ext>
+            </a:extLst>
+          </p:cNvPr>
+          <p:cNvSpPr>
+            <a:spLocks noGrp="1" noRot="1" noChangeAspect="1" noMove="1" noResize="1" noEditPoints="1" noAdjustHandles="1" noChangeArrowheads="1" noChangeShapeType="1" noTextEdit="1"/>
+          </p:cNvSpPr>
+          <p:nvPr>
+            <p:extLst>
+              <p:ext uri="{386F3935-93C4-4BCD-93E2-E3B085C9AB24}">
+                <p16:designElem xmlns:p16="http://schemas.microsoft.com/office/powerpoint/2015/main" val="1"/>
+              </p:ext>
+            </p:extLst>
+          </p:nvPr>
+        </p:nvSpPr>
+        <p:spPr>
+          <a:xfrm>
+            <a:off x="910" y="2543175"/>
+            <a:ext cx="12191090" cy="4314826"/>
+          </a:xfrm>
+          <a:custGeom>
+            <a:avLst/>
+            <a:gdLst>
+              <a:gd name="connsiteX0" fmla="*/ 2945853 w 12191090"/>
+              <a:gd name="connsiteY0" fmla="*/ 0 h 4430825"/>
+              <a:gd name="connsiteX1" fmla="*/ 8211918 w 12191090"/>
+              <a:gd name="connsiteY1" fmla="*/ 91920 h 4430825"/>
+              <a:gd name="connsiteX2" fmla="*/ 8964214 w 12191090"/>
+              <a:gd name="connsiteY2" fmla="*/ 105051 h 4430825"/>
+              <a:gd name="connsiteX3" fmla="*/ 9716509 w 12191090"/>
+              <a:gd name="connsiteY3" fmla="*/ 118183 h 4430825"/>
+              <a:gd name="connsiteX4" fmla="*/ 10920181 w 12191090"/>
+              <a:gd name="connsiteY4" fmla="*/ 139193 h 4430825"/>
+              <a:gd name="connsiteX5" fmla="*/ 12130833 w 12191090"/>
+              <a:gd name="connsiteY5" fmla="*/ 97164 h 4430825"/>
+              <a:gd name="connsiteX6" fmla="*/ 12191090 w 12191090"/>
+              <a:gd name="connsiteY6" fmla="*/ 95072 h 4430825"/>
+              <a:gd name="connsiteX7" fmla="*/ 12191090 w 12191090"/>
+              <a:gd name="connsiteY7" fmla="*/ 4430825 h 4430825"/>
+              <a:gd name="connsiteX8" fmla="*/ 10305 w 12191090"/>
+              <a:gd name="connsiteY8" fmla="*/ 4430825 h 4430825"/>
+              <a:gd name="connsiteX9" fmla="*/ 0 w 12191090"/>
+              <a:gd name="connsiteY9" fmla="*/ 42862 h 4430825"/>
+              <a:gd name="connsiteX10" fmla="*/ 105174 w 12191090"/>
+              <a:gd name="connsiteY10" fmla="*/ 44699 h 4430825"/>
+              <a:gd name="connsiteX11" fmla="*/ 837780 w 12191090"/>
+              <a:gd name="connsiteY11" fmla="*/ 57486 h 4430825"/>
+              <a:gd name="connsiteX12" fmla="*/ 1439616 w 12191090"/>
+              <a:gd name="connsiteY12" fmla="*/ 67992 h 4430825"/>
+              <a:gd name="connsiteX13" fmla="*/ 2945853 w 12191090"/>
+              <a:gd name="connsiteY13" fmla="*/ 0 h 4430825"/>
+            </a:gdLst>
+            <a:ahLst/>
+            <a:cxnLst>
+              <a:cxn ang="0">
+                <a:pos x="connsiteX0" y="connsiteY0"/>
+              </a:cxn>
+              <a:cxn ang="0">
+                <a:pos x="connsiteX1" y="connsiteY1"/>
+              </a:cxn>
+              <a:cxn ang="0">
+                <a:pos x="connsiteX2" y="connsiteY2"/>
+              </a:cxn>
+              <a:cxn ang="0">
+                <a:pos x="connsiteX3" y="connsiteY3"/>
+              </a:cxn>
+              <a:cxn ang="0">
+                <a:pos x="connsiteX4" y="connsiteY4"/>
+              </a:cxn>
+              <a:cxn ang="0">
+                <a:pos x="connsiteX5" y="connsiteY5"/>
+              </a:cxn>
+              <a:cxn ang="0">
+                <a:pos x="connsiteX6" y="connsiteY6"/>
+              </a:cxn>
+              <a:cxn ang="0">
+                <a:pos x="connsiteX7" y="connsiteY7"/>
+              </a:cxn>
+              <a:cxn ang="0">
+                <a:pos x="connsiteX8" y="connsiteY8"/>
+              </a:cxn>
+              <a:cxn ang="0">
+                <a:pos x="connsiteX9" y="connsiteY9"/>
+              </a:cxn>
+              <a:cxn ang="0">
+                <a:pos x="connsiteX10" y="connsiteY10"/>
+              </a:cxn>
+              <a:cxn ang="0">
+                <a:pos x="connsiteX11" y="connsiteY11"/>
+              </a:cxn>
+              <a:cxn ang="0">
+                <a:pos x="connsiteX12" y="connsiteY12"/>
+              </a:cxn>
+              <a:cxn ang="0">
+                <a:pos x="connsiteX13" y="connsiteY13"/>
+              </a:cxn>
+            </a:cxnLst>
+            <a:rect l="l" t="t" r="r" b="b"/>
+            <a:pathLst>
+              <a:path w="12191090" h="4430825">
+                <a:moveTo>
+                  <a:pt x="2945853" y="0"/>
+                </a:moveTo>
+                <a:cubicBezTo>
+                  <a:pt x="2945853" y="0"/>
+                  <a:pt x="2945853" y="0"/>
+                  <a:pt x="8211918" y="91920"/>
+                </a:cubicBezTo>
+                <a:cubicBezTo>
+                  <a:pt x="8362379" y="94546"/>
+                  <a:pt x="8663297" y="99800"/>
+                  <a:pt x="8964214" y="105051"/>
+                </a:cubicBezTo>
+                <a:cubicBezTo>
+                  <a:pt x="9265134" y="110304"/>
+                  <a:pt x="9415591" y="112930"/>
+                  <a:pt x="9716509" y="118183"/>
+                </a:cubicBezTo>
+                <a:cubicBezTo>
+                  <a:pt x="9716509" y="118183"/>
+                  <a:pt x="9716509" y="118183"/>
+                  <a:pt x="10920181" y="139193"/>
+                </a:cubicBezTo>
+                <a:cubicBezTo>
+                  <a:pt x="10920181" y="139193"/>
+                  <a:pt x="10920181" y="139193"/>
+                  <a:pt x="12130833" y="97164"/>
+                </a:cubicBezTo>
+                <a:lnTo>
+                  <a:pt x="12191090" y="95072"/>
+                </a:lnTo>
+                <a:lnTo>
+                  <a:pt x="12191090" y="4430825"/>
+                </a:lnTo>
+                <a:lnTo>
+                  <a:pt x="10305" y="4430825"/>
+                </a:lnTo>
+                <a:lnTo>
+                  <a:pt x="0" y="42862"/>
+                </a:lnTo>
+                <a:lnTo>
+                  <a:pt x="105174" y="44699"/>
+                </a:lnTo>
+                <a:cubicBezTo>
+                  <a:pt x="365244" y="49238"/>
+                  <a:pt x="612091" y="53547"/>
+                  <a:pt x="837780" y="57486"/>
+                </a:cubicBezTo>
+                <a:cubicBezTo>
+                  <a:pt x="837780" y="57486"/>
+                  <a:pt x="837780" y="57486"/>
+                  <a:pt x="1439616" y="67992"/>
+                </a:cubicBezTo>
+                <a:cubicBezTo>
+                  <a:pt x="1439616" y="67992"/>
+                  <a:pt x="1439616" y="67992"/>
+                  <a:pt x="2945853" y="0"/>
+                </a:cubicBezTo>
+                <a:close/>
+              </a:path>
+            </a:pathLst>
+          </a:custGeom>
+          <a:ln w="12700" cap="flat" cmpd="sng" algn="ctr">
+            <a:noFill/>
+            <a:prstDash val="solid"/>
+            <a:miter lim="800000"/>
+          </a:ln>
+          <a:effectLst/>
+        </p:spPr>
+        <p:style>
+          <a:lnRef idx="2">
+            <a:schemeClr val="accent1">
+              <a:shade val="50000"/>
+            </a:schemeClr>
+          </a:lnRef>
+          <a:fillRef idx="1">
+            <a:schemeClr val="accent1"/>
+          </a:fillRef>
+          <a:effectRef idx="0">
+            <a:schemeClr val="accent1"/>
+          </a:effectRef>
+          <a:fontRef idx="minor">
+            <a:schemeClr val="lt1"/>
+          </a:fontRef>
+        </p:style>
+        <p:txBody>
+          <a:bodyPr wrap="square" rtlCol="0" anchor="ctr">
+            <a:noAutofit/>
+          </a:bodyPr>
+          <a:lstStyle/>
+          <a:p>
+            <a:pPr algn="ctr"/>
+            <a:endParaRPr lang="nl-NL" noProof="0" dirty="0"/>
+          </a:p>
+        </p:txBody>
+      </p:sp>
+      <p:pic>
+        <p:nvPicPr>
+          <p:cNvPr id="5" name="Content Placeholder 4">
+            <a:extLst>
+              <a:ext uri="{FF2B5EF4-FFF2-40B4-BE49-F238E27FC236}">
+                <a16:creationId xmlns:a16="http://schemas.microsoft.com/office/drawing/2014/main" id="{71AE5E3C-672B-F5AC-2366-CE3183845FEA}"/>
+              </a:ext>
+            </a:extLst>
+          </p:cNvPr>
+          <p:cNvPicPr>
+            <a:picLocks noGrp="1" noChangeAspect="1"/>
+          </p:cNvPicPr>
+          <p:nvPr>
+            <p:ph idx="1"/>
+          </p:nvPr>
+        </p:nvPicPr>
+        <p:blipFill>
+          <a:blip r:embed="rId2">
+            <a:extLst>
+              <a:ext uri="{28A0092B-C50C-407E-A947-70E740481C1C}">
+                <a14:useLocalDpi xmlns:a14="http://schemas.microsoft.com/office/drawing/2010/main" val="0"/>
+              </a:ext>
+            </a:extLst>
+          </a:blip>
+          <a:stretch>
+            <a:fillRect/>
+          </a:stretch>
+        </p:blipFill>
+        <p:spPr>
+          <a:xfrm>
+            <a:off x="1771146" y="3249613"/>
+            <a:ext cx="3081868" cy="2888388"/>
+          </a:xfrm>
+          <a:custGeom>
+            <a:avLst/>
+            <a:gdLst/>
+            <a:ahLst/>
+            <a:cxnLst/>
+            <a:rect l="l" t="t" r="r" b="b"/>
+            <a:pathLst>
+              <a:path w="5184162" h="3501162">
+                <a:moveTo>
+                  <a:pt x="0" y="0"/>
+                </a:moveTo>
+                <a:lnTo>
+                  <a:pt x="5184162" y="0"/>
+                </a:lnTo>
+                <a:lnTo>
+                  <a:pt x="5184162" y="3501162"/>
+                </a:lnTo>
+                <a:lnTo>
+                  <a:pt x="0" y="3501162"/>
+                </a:lnTo>
+                <a:close/>
+              </a:path>
+            </a:pathLst>
+          </a:custGeom>
+        </p:spPr>
+      </p:pic>
+      <p:pic>
+        <p:nvPicPr>
+          <p:cNvPr id="7" name="Picture 6">
+            <a:extLst>
+              <a:ext uri="{FF2B5EF4-FFF2-40B4-BE49-F238E27FC236}">
+                <a16:creationId xmlns:a16="http://schemas.microsoft.com/office/drawing/2014/main" id="{1A4432C1-1027-0DBD-39D1-058757AB23FD}"/>
+              </a:ext>
+            </a:extLst>
+          </p:cNvPr>
+          <p:cNvPicPr>
+            <a:picLocks noChangeAspect="1"/>
+          </p:cNvPicPr>
+          <p:nvPr/>
+        </p:nvPicPr>
+        <p:blipFill>
+          <a:blip r:embed="rId3">
+            <a:extLst>
+              <a:ext uri="{28A0092B-C50C-407E-A947-70E740481C1C}">
+                <a14:useLocalDpi xmlns:a14="http://schemas.microsoft.com/office/drawing/2010/main" val="0"/>
+              </a:ext>
+            </a:extLst>
+          </a:blip>
+          <a:srcRect l="13412" t="4840" r="10848" b="34571"/>
+          <a:stretch>
+            <a:fillRect/>
+          </a:stretch>
+        </p:blipFill>
+        <p:spPr>
+          <a:xfrm>
+            <a:off x="5764866" y="3249613"/>
+            <a:ext cx="5925312" cy="2322576"/>
+          </a:xfrm>
+          <a:custGeom>
+            <a:avLst/>
+            <a:gdLst/>
+            <a:ahLst/>
+            <a:cxnLst/>
+            <a:rect l="l" t="t" r="r" b="b"/>
+            <a:pathLst>
+              <a:path w="5184163" h="3501162">
+                <a:moveTo>
+                  <a:pt x="0" y="0"/>
+                </a:moveTo>
+                <a:lnTo>
+                  <a:pt x="5184163" y="0"/>
+                </a:lnTo>
+                <a:lnTo>
+                  <a:pt x="5184163" y="3501162"/>
+                </a:lnTo>
+                <a:lnTo>
+                  <a:pt x="0" y="3501162"/>
+                </a:lnTo>
+                <a:close/>
+              </a:path>
+            </a:pathLst>
+          </a:custGeom>
+        </p:spPr>
+      </p:pic>
+      <p:sp>
+        <p:nvSpPr>
+          <p:cNvPr id="9" name="TextBox 8">
+            <a:extLst>
+              <a:ext uri="{FF2B5EF4-FFF2-40B4-BE49-F238E27FC236}">
+                <a16:creationId xmlns:a16="http://schemas.microsoft.com/office/drawing/2014/main" id="{54C5A319-BAD5-895E-13B6-250037DEF003}"/>
+              </a:ext>
+            </a:extLst>
+          </p:cNvPr>
+          <p:cNvSpPr txBox="1"/>
+          <p:nvPr/>
+        </p:nvSpPr>
+        <p:spPr>
+          <a:xfrm>
+            <a:off x="1771146" y="2685448"/>
+            <a:ext cx="3081868" cy="369332"/>
+          </a:xfrm>
+          <a:prstGeom prst="rect">
+            <a:avLst/>
+          </a:prstGeom>
+          <a:noFill/>
+        </p:spPr>
+        <p:txBody>
+          <a:bodyPr wrap="square" rtlCol="0">
+            <a:spAutoFit/>
+          </a:bodyPr>
+          <a:lstStyle/>
+          <a:p>
+            <a:pPr algn="ctr"/>
+            <a:r>
+              <a:rPr lang="nl-NL" noProof="0" dirty="0"/>
+              <a:t>oud</a:t>
+            </a:r>
+          </a:p>
+        </p:txBody>
+      </p:sp>
+      <p:sp>
+        <p:nvSpPr>
+          <p:cNvPr id="10" name="TextBox 9">
+            <a:extLst>
+              <a:ext uri="{FF2B5EF4-FFF2-40B4-BE49-F238E27FC236}">
+                <a16:creationId xmlns:a16="http://schemas.microsoft.com/office/drawing/2014/main" id="{6C560187-4697-F2F1-F3DC-2C81EDA00C03}"/>
+              </a:ext>
+            </a:extLst>
+          </p:cNvPr>
+          <p:cNvSpPr txBox="1"/>
+          <p:nvPr/>
+        </p:nvSpPr>
+        <p:spPr>
+          <a:xfrm>
+            <a:off x="7186588" y="2880281"/>
+            <a:ext cx="3081868" cy="369332"/>
+          </a:xfrm>
+          <a:prstGeom prst="rect">
+            <a:avLst/>
+          </a:prstGeom>
+          <a:noFill/>
+        </p:spPr>
+        <p:txBody>
+          <a:bodyPr wrap="square" rtlCol="0">
+            <a:spAutoFit/>
+          </a:bodyPr>
+          <a:lstStyle/>
+          <a:p>
+            <a:pPr algn="ctr"/>
+            <a:r>
+              <a:rPr lang="nl-NL" noProof="0" dirty="0"/>
+              <a:t>nieuw</a:t>
+            </a:r>
+          </a:p>
+        </p:txBody>
+      </p:sp>
+    </p:spTree>
+    <p:extLst>
+      <p:ext uri="{BB962C8B-B14F-4D97-AF65-F5344CB8AC3E}">
+        <p14:creationId xmlns:p14="http://schemas.microsoft.com/office/powerpoint/2010/main" val="297856835"/>
+      </p:ext>
+    </p:extLst>
+  </p:cSld>
+  <p:clrMapOvr>
+    <a:masterClrMapping/>
+  </p:clrMapOvr>
+  <p:timing>
+    <p:tnLst>
+      <p:par>
+        <p:cTn id="1" dur="indefinite" restart="never" nodeType="tmRoot">
+          <p:childTnLst>
+            <p:seq concurrent="1" nextAc="seek">
+              <p:cTn id="2" dur="indefinite" nodeType="mainSeq">
+                <p:childTnLst>
+                  <p:par>
+                    <p:cTn id="3" fill="hold">
+                      <p:stCondLst>
+                        <p:cond delay="indefinite"/>
+                      </p:stCondLst>
+                      <p:childTnLst>
+                        <p:par>
+                          <p:cTn id="4" fill="hold">
+                            <p:stCondLst>
+                              <p:cond delay="0"/>
+                            </p:stCondLst>
+                            <p:childTnLst>
+                              <p:par>
+                                <p:cTn id="5" presetID="1" presetClass="entr" presetSubtype="0" fill="hold" grpId="0" nodeType="clickEffect">
+                                  <p:stCondLst>
+                                    <p:cond delay="0"/>
+                                  </p:stCondLst>
+                                  <p:childTnLst>
+                                    <p:set>
+                                      <p:cBhvr>
+                                        <p:cTn id="6" dur="1" fill="hold">
+                                          <p:stCondLst>
+                                            <p:cond delay="0"/>
+                                          </p:stCondLst>
+                                        </p:cTn>
+                                        <p:tgtEl>
+                                          <p:spTgt spid="9"/>
+                                        </p:tgtEl>
+                                        <p:attrNameLst>
+                                          <p:attrName>style.visibility</p:attrName>
+                                        </p:attrNameLst>
+                                      </p:cBhvr>
+                                      <p:to>
+                                        <p:strVal val="visible"/>
+                                      </p:to>
+                                    </p:set>
+                                  </p:childTnLst>
+                                </p:cTn>
+                              </p:par>
+                              <p:par>
+                                <p:cTn id="7" presetID="1" presetClass="entr" presetSubtype="0" fill="hold" nodeType="withEffect">
+                                  <p:stCondLst>
+                                    <p:cond delay="0"/>
+                                  </p:stCondLst>
+                                  <p:childTnLst>
+                                    <p:set>
+                                      <p:cBhvr>
+                                        <p:cTn id="8" dur="1" fill="hold">
+                                          <p:stCondLst>
+                                            <p:cond delay="0"/>
+                                          </p:stCondLst>
+                                        </p:cTn>
+                                        <p:tgtEl>
+                                          <p:spTgt spid="5"/>
+                                        </p:tgtEl>
+                                        <p:attrNameLst>
+                                          <p:attrName>style.visibility</p:attrName>
+                                        </p:attrNameLst>
+                                      </p:cBhvr>
+                                      <p:to>
+                                        <p:strVal val="visible"/>
+                                      </p:to>
+                                    </p:set>
+                                  </p:childTnLst>
+                                </p:cTn>
+                              </p:par>
+                            </p:childTnLst>
+                          </p:cTn>
+                        </p:par>
+                      </p:childTnLst>
+                    </p:cTn>
+                  </p:par>
+                  <p:par>
+                    <p:cTn id="9" fill="hold">
+                      <p:stCondLst>
+                        <p:cond delay="indefinite"/>
+                      </p:stCondLst>
+                      <p:childTnLst>
+                        <p:par>
+                          <p:cTn id="10" fill="hold">
+                            <p:stCondLst>
+                              <p:cond delay="0"/>
+                            </p:stCondLst>
+                            <p:childTnLst>
+                              <p:par>
+                                <p:cTn id="11" presetID="1" presetClass="entr" presetSubtype="0" fill="hold" nodeType="clickEffect">
+                                  <p:stCondLst>
+                                    <p:cond delay="0"/>
+                                  </p:stCondLst>
+                                  <p:childTnLst>
+                                    <p:set>
+                                      <p:cBhvr>
+                                        <p:cTn id="12" dur="1" fill="hold">
+                                          <p:stCondLst>
+                                            <p:cond delay="0"/>
+                                          </p:stCondLst>
+                                        </p:cTn>
+                                        <p:tgtEl>
+                                          <p:spTgt spid="7"/>
+                                        </p:tgtEl>
+                                        <p:attrNameLst>
+                                          <p:attrName>style.visibility</p:attrName>
+                                        </p:attrNameLst>
+                                      </p:cBhvr>
+                                      <p:to>
+                                        <p:strVal val="visible"/>
+                                      </p:to>
+                                    </p:set>
+                                  </p:childTnLst>
+                                </p:cTn>
+                              </p:par>
+                              <p:par>
+                                <p:cTn id="13" presetID="1" presetClass="entr" presetSubtype="0" fill="hold" grpId="0" nodeType="withEffect">
+                                  <p:stCondLst>
+                                    <p:cond delay="0"/>
+                                  </p:stCondLst>
+                                  <p:childTnLst>
+                                    <p:set>
+                                      <p:cBhvr>
+                                        <p:cTn id="14" dur="1" fill="hold">
+                                          <p:stCondLst>
+                                            <p:cond delay="0"/>
+                                          </p:stCondLst>
+                                        </p:cTn>
+                                        <p:tgtEl>
+                                          <p:spTgt spid="10"/>
+                                        </p:tgtEl>
+                                        <p:attrNameLst>
+                                          <p:attrName>style.visibility</p:attrName>
+                                        </p:attrNameLst>
+                                      </p:cBhvr>
+                                      <p:to>
+                                        <p:strVal val="visible"/>
+                                      </p:to>
+                                    </p:set>
+                                  </p:childTnLst>
+                                </p:cTn>
+                              </p:par>
+                            </p:childTnLst>
+                          </p:cTn>
+                        </p:par>
+                      </p:childTnLst>
+                    </p:cTn>
+                  </p:par>
+                </p:childTnLst>
+              </p:cTn>
+              <p:prevCondLst>
+                <p:cond evt="onPrev" delay="0">
+                  <p:tgtEl>
+                    <p:sldTgt/>
+                  </p:tgtEl>
+                </p:cond>
+              </p:prevCondLst>
+              <p:nextCondLst>
+                <p:cond evt="onNext" delay="0">
+                  <p:tgtEl>
+                    <p:sldTgt/>
+                  </p:tgtEl>
+                </p:cond>
+              </p:nextCondLst>
+            </p:seq>
+          </p:childTnLst>
+        </p:cTn>
+      </p:par>
+    </p:tnLst>
+    <p:bldLst>
+      <p:bldP spid="9" grpId="0"/>
+      <p:bldP spid="10" grpId="0"/>
+    </p:bldLst>
+  </p:timing>
+</p:sld>
+</file>
+
+<file path=ppt/slides/slide18.xml><?xml version="1.0" encoding="utf-8"?>
+<p:sld xmlns:a="http://schemas.openxmlformats.org/drawingml/2006/main" xmlns:r="http://schemas.openxmlformats.org/officeDocument/2006/relationships" xmlns:p="http://schemas.openxmlformats.org/presentationml/2006/main">
+  <p:cSld>
+    <p:bg>
+      <p:bgPr>
+        <a:solidFill>
+          <a:schemeClr val="bg2"/>
+        </a:solidFill>
+        <a:effectLst/>
+      </p:bgPr>
+    </p:bg>
+    <p:spTree>
+      <p:nvGrpSpPr>
+        <p:cNvPr id="1" name=""/>
+        <p:cNvGrpSpPr/>
+        <p:nvPr/>
+      </p:nvGrpSpPr>
+      <p:grpSpPr>
+        <a:xfrm>
+          <a:off x="0" y="0"/>
+          <a:ext cx="0" cy="0"/>
+          <a:chOff x="0" y="0"/>
+          <a:chExt cx="0" cy="0"/>
+        </a:xfrm>
+      </p:grpSpPr>
+      <p:sp useBgFill="1">
+        <p:nvSpPr>
+          <p:cNvPr id="18" name="Rectangle 17">
+            <a:extLst>
+              <a:ext uri="{FF2B5EF4-FFF2-40B4-BE49-F238E27FC236}">
+                <a16:creationId xmlns:a16="http://schemas.microsoft.com/office/drawing/2014/main" id="{4C38F0AE-660A-47F0-8626-BCA791FC5156}"/>
+              </a:ext>
+              <a:ext uri="{C183D7F6-B498-43B3-948B-1728B52AA6E4}">
+                <adec:decorative xmlns:adec="http://schemas.microsoft.com/office/drawing/2017/decorative" val="1"/>
+              </a:ext>
+            </a:extLst>
+          </p:cNvPr>
+          <p:cNvSpPr>
+            <a:spLocks noGrp="1" noRot="1" noChangeAspect="1" noMove="1" noResize="1" noEditPoints="1" noAdjustHandles="1" noChangeArrowheads="1" noChangeShapeType="1" noTextEdit="1"/>
+          </p:cNvSpPr>
+          <p:nvPr>
+            <p:extLst>
+              <p:ext uri="{386F3935-93C4-4BCD-93E2-E3B085C9AB24}">
+                <p16:designElem xmlns:p16="http://schemas.microsoft.com/office/powerpoint/2015/main" val="1"/>
+              </p:ext>
+            </p:extLst>
+          </p:nvPr>
+        </p:nvSpPr>
+        <p:spPr>
+          <a:xfrm>
+            <a:off x="0" y="0"/>
+            <a:ext cx="12192000" cy="6858000"/>
+          </a:xfrm>
+          <a:prstGeom prst="rect">
+            <a:avLst/>
+          </a:prstGeom>
+          <a:ln w="12700" cap="flat" cmpd="sng" algn="ctr">
+            <a:noFill/>
+            <a:prstDash val="solid"/>
+            <a:miter lim="800000"/>
+          </a:ln>
+          <a:effectLst/>
+        </p:spPr>
+        <p:style>
+          <a:lnRef idx="2">
+            <a:schemeClr val="accent1">
+              <a:shade val="50000"/>
+            </a:schemeClr>
+          </a:lnRef>
+          <a:fillRef idx="1">
+            <a:schemeClr val="accent1"/>
+          </a:fillRef>
+          <a:effectRef idx="0">
+            <a:schemeClr val="accent1"/>
+          </a:effectRef>
+          <a:fontRef idx="minor">
+            <a:schemeClr val="lt1"/>
+          </a:fontRef>
+        </p:style>
+        <p:txBody>
+          <a:bodyPr rtlCol="0" anchor="ctr"/>
+          <a:lstStyle/>
+          <a:p>
+            <a:pPr algn="ctr"/>
+            <a:endParaRPr lang="nl-NL" noProof="0" dirty="0"/>
+          </a:p>
+        </p:txBody>
+      </p:sp>
+      <p:sp>
+        <p:nvSpPr>
+          <p:cNvPr id="20" name="Rectangle 19">
+            <a:extLst>
+              <a:ext uri="{FF2B5EF4-FFF2-40B4-BE49-F238E27FC236}">
+                <a16:creationId xmlns:a16="http://schemas.microsoft.com/office/drawing/2014/main" id="{110993A2-6628-4B47-A888-19FCE1A19D9D}"/>
+              </a:ext>
+              <a:ext uri="{C183D7F6-B498-43B3-948B-1728B52AA6E4}">
+                <adec:decorative xmlns:adec="http://schemas.microsoft.com/office/drawing/2017/decorative" val="1"/>
+              </a:ext>
+            </a:extLst>
+          </p:cNvPr>
+          <p:cNvSpPr>
+            <a:spLocks noGrp="1" noRot="1" noChangeAspect="1" noMove="1" noResize="1" noEditPoints="1" noAdjustHandles="1" noChangeArrowheads="1" noChangeShapeType="1" noTextEdit="1"/>
+          </p:cNvSpPr>
+          <p:nvPr>
+            <p:extLst>
+              <p:ext uri="{386F3935-93C4-4BCD-93E2-E3B085C9AB24}">
+                <p16:designElem xmlns:p16="http://schemas.microsoft.com/office/powerpoint/2015/main" val="1"/>
+              </p:ext>
+            </p:extLst>
+          </p:nvPr>
+        </p:nvSpPr>
+        <p:spPr>
+          <a:xfrm>
+            <a:off x="0" y="0"/>
+            <a:ext cx="12192000" cy="6858000"/>
+          </a:xfrm>
+          <a:prstGeom prst="rect">
+            <a:avLst/>
+          </a:prstGeom>
+          <a:solidFill>
+            <a:schemeClr val="bg2">
+              <a:lumMod val="90000"/>
+              <a:lumOff val="10000"/>
+            </a:schemeClr>
+          </a:solidFill>
+          <a:ln w="12700" cap="flat" cmpd="sng" algn="ctr">
+            <a:noFill/>
+            <a:prstDash val="solid"/>
+            <a:miter lim="800000"/>
+          </a:ln>
+          <a:effectLst/>
+        </p:spPr>
+        <p:style>
+          <a:lnRef idx="2">
+            <a:schemeClr val="accent1">
+              <a:shade val="50000"/>
+            </a:schemeClr>
+          </a:lnRef>
+          <a:fillRef idx="1">
+            <a:schemeClr val="accent1"/>
+          </a:fillRef>
+          <a:effectRef idx="0">
+            <a:schemeClr val="accent1"/>
+          </a:effectRef>
+          <a:fontRef idx="minor">
+            <a:schemeClr val="lt1"/>
+          </a:fontRef>
+        </p:style>
+        <p:txBody>
+          <a:bodyPr rtlCol="0" anchor="ctr"/>
+          <a:lstStyle/>
+          <a:p>
+            <a:pPr algn="ctr"/>
+            <a:endParaRPr lang="nl-NL" noProof="0" dirty="0"/>
+          </a:p>
+        </p:txBody>
+      </p:sp>
+      <p:sp>
+        <p:nvSpPr>
+          <p:cNvPr id="2" name="Title 1">
+            <a:extLst>
+              <a:ext uri="{FF2B5EF4-FFF2-40B4-BE49-F238E27FC236}">
+                <a16:creationId xmlns:a16="http://schemas.microsoft.com/office/drawing/2014/main" id="{6E4DEF80-E315-10BA-6427-2833D75A3F8A}"/>
+              </a:ext>
+            </a:extLst>
+          </p:cNvPr>
+          <p:cNvSpPr>
+            <a:spLocks noGrp="1"/>
+          </p:cNvSpPr>
+          <p:nvPr>
+            <p:ph type="title"/>
+          </p:nvPr>
+        </p:nvSpPr>
+        <p:spPr>
+          <a:xfrm>
+            <a:off x="720000" y="619201"/>
+            <a:ext cx="3095626" cy="1477328"/>
+          </a:xfrm>
+        </p:spPr>
+        <p:txBody>
+          <a:bodyPr>
+            <a:normAutofit/>
+          </a:bodyPr>
+          <a:lstStyle/>
+          <a:p>
+            <a:r>
+              <a:rPr lang="nl-NL" noProof="0" dirty="0"/>
+              <a:t>Code:</a:t>
+            </a:r>
+          </a:p>
+        </p:txBody>
+      </p:sp>
+      <p:sp useBgFill="1">
+        <p:nvSpPr>
+          <p:cNvPr id="22" name="Freeform: Shape 21">
+            <a:extLst>
+              <a:ext uri="{FF2B5EF4-FFF2-40B4-BE49-F238E27FC236}">
+                <a16:creationId xmlns:a16="http://schemas.microsoft.com/office/drawing/2014/main" id="{C27C1BEB-0B53-40C1-BFC6-737399705180}"/>
+              </a:ext>
+              <a:ext uri="{C183D7F6-B498-43B3-948B-1728B52AA6E4}">
+                <adec:decorative xmlns:adec="http://schemas.microsoft.com/office/drawing/2017/decorative" val="1"/>
+              </a:ext>
+            </a:extLst>
+          </p:cNvPr>
+          <p:cNvSpPr>
+            <a:spLocks noGrp="1" noRot="1" noChangeAspect="1" noMove="1" noResize="1" noEditPoints="1" noAdjustHandles="1" noChangeArrowheads="1" noChangeShapeType="1" noTextEdit="1"/>
+          </p:cNvSpPr>
+          <p:nvPr>
+            <p:extLst>
+              <p:ext uri="{386F3935-93C4-4BCD-93E2-E3B085C9AB24}">
+                <p16:designElem xmlns:p16="http://schemas.microsoft.com/office/powerpoint/2015/main" val="1"/>
+              </p:ext>
+            </p:extLst>
+          </p:nvPr>
+        </p:nvSpPr>
+        <p:spPr bwMode="auto">
+          <a:xfrm rot="16200000" flipH="1">
+            <a:off x="4524373" y="-809624"/>
+            <a:ext cx="3143251" cy="12192000"/>
+          </a:xfrm>
+          <a:custGeom>
+            <a:avLst/>
+            <a:gdLst>
+              <a:gd name="connsiteX0" fmla="*/ 508 w 2932134"/>
+              <a:gd name="connsiteY0" fmla="*/ 4431100 h 12192000"/>
+              <a:gd name="connsiteX1" fmla="*/ 137030 w 2932134"/>
+              <a:gd name="connsiteY1" fmla="*/ 177371 h 12192000"/>
+              <a:gd name="connsiteX2" fmla="*/ 145443 w 2932134"/>
+              <a:gd name="connsiteY2" fmla="*/ 0 h 12192000"/>
+              <a:gd name="connsiteX3" fmla="*/ 2932134 w 2932134"/>
+              <a:gd name="connsiteY3" fmla="*/ 0 h 12192000"/>
+              <a:gd name="connsiteX4" fmla="*/ 2932133 w 2932134"/>
+              <a:gd name="connsiteY4" fmla="*/ 12192000 h 12192000"/>
+              <a:gd name="connsiteX5" fmla="*/ 172151 w 2932134"/>
+              <a:gd name="connsiteY5" fmla="*/ 12192000 h 12192000"/>
+              <a:gd name="connsiteX6" fmla="*/ 169761 w 2932134"/>
+              <a:gd name="connsiteY6" fmla="*/ 12180928 h 12192000"/>
+              <a:gd name="connsiteX7" fmla="*/ 169761 w 2932134"/>
+              <a:gd name="connsiteY7" fmla="*/ 7234593 h 12192000"/>
+              <a:gd name="connsiteX8" fmla="*/ 508 w 2932134"/>
+              <a:gd name="connsiteY8" fmla="*/ 4431100 h 12192000"/>
+            </a:gdLst>
+            <a:ahLst/>
+            <a:cxnLst>
+              <a:cxn ang="0">
+                <a:pos x="connsiteX0" y="connsiteY0"/>
+              </a:cxn>
+              <a:cxn ang="0">
+                <a:pos x="connsiteX1" y="connsiteY1"/>
+              </a:cxn>
+              <a:cxn ang="0">
+                <a:pos x="connsiteX2" y="connsiteY2"/>
+              </a:cxn>
+              <a:cxn ang="0">
+                <a:pos x="connsiteX3" y="connsiteY3"/>
+              </a:cxn>
+              <a:cxn ang="0">
+                <a:pos x="connsiteX4" y="connsiteY4"/>
+              </a:cxn>
+              <a:cxn ang="0">
+                <a:pos x="connsiteX5" y="connsiteY5"/>
+              </a:cxn>
+              <a:cxn ang="0">
+                <a:pos x="connsiteX6" y="connsiteY6"/>
+              </a:cxn>
+              <a:cxn ang="0">
+                <a:pos x="connsiteX7" y="connsiteY7"/>
+              </a:cxn>
+              <a:cxn ang="0">
+                <a:pos x="connsiteX8" y="connsiteY8"/>
+              </a:cxn>
+            </a:cxnLst>
+            <a:rect l="l" t="t" r="r" b="b"/>
+            <a:pathLst>
+              <a:path w="2932134" h="12192000">
+                <a:moveTo>
+                  <a:pt x="508" y="4431100"/>
+                </a:moveTo>
+                <a:cubicBezTo>
+                  <a:pt x="-7698" y="2846728"/>
+                  <a:pt x="85554" y="1238574"/>
+                  <a:pt x="137030" y="177371"/>
+                </a:cubicBezTo>
+                <a:lnTo>
+                  <a:pt x="145443" y="0"/>
+                </a:lnTo>
+                <a:lnTo>
+                  <a:pt x="2932134" y="0"/>
+                </a:lnTo>
+                <a:lnTo>
+                  <a:pt x="2932133" y="12192000"/>
+                </a:lnTo>
+                <a:lnTo>
+                  <a:pt x="172151" y="12192000"/>
+                </a:lnTo>
+                <a:lnTo>
+                  <a:pt x="169761" y="12180928"/>
+                </a:lnTo>
+                <a:cubicBezTo>
+                  <a:pt x="169761" y="11800439"/>
+                  <a:pt x="169761" y="10278492"/>
+                  <a:pt x="169761" y="7234593"/>
+                </a:cubicBezTo>
+                <a:cubicBezTo>
+                  <a:pt x="50398" y="6402277"/>
+                  <a:pt x="5637" y="5421334"/>
+                  <a:pt x="508" y="4431100"/>
+                </a:cubicBezTo>
+                <a:close/>
+              </a:path>
+            </a:pathLst>
+          </a:custGeom>
+          <a:ln>
+            <a:noFill/>
+          </a:ln>
+        </p:spPr>
+        <p:txBody>
+          <a:bodyPr vert="horz" wrap="square" lIns="91440" tIns="45720" rIns="91440" bIns="45720" numCol="1" anchor="t" anchorCtr="0" compatLnSpc="1">
+            <a:prstTxWarp prst="textNoShape">
+              <a:avLst/>
+            </a:prstTxWarp>
+            <a:noAutofit/>
+          </a:bodyPr>
+          <a:lstStyle/>
+          <a:p>
+            <a:endParaRPr lang="nl-NL" noProof="0" dirty="0"/>
+          </a:p>
+        </p:txBody>
+      </p:sp>
+      <p:pic>
+        <p:nvPicPr>
+          <p:cNvPr id="9" name="Content Placeholder 8">
+            <a:extLst>
+              <a:ext uri="{FF2B5EF4-FFF2-40B4-BE49-F238E27FC236}">
+                <a16:creationId xmlns:a16="http://schemas.microsoft.com/office/drawing/2014/main" id="{D71821BA-EDF8-A547-405A-14D7D95931B1}"/>
+              </a:ext>
+            </a:extLst>
+          </p:cNvPr>
+          <p:cNvPicPr>
+            <a:picLocks noChangeAspect="1"/>
+          </p:cNvPicPr>
+          <p:nvPr/>
+        </p:nvPicPr>
+        <p:blipFill>
+          <a:blip r:embed="rId2">
+            <a:extLst>
+              <a:ext uri="{28A0092B-C50C-407E-A947-70E740481C1C}">
+                <a14:useLocalDpi xmlns:a14="http://schemas.microsoft.com/office/drawing/2010/main" val="0"/>
+              </a:ext>
+            </a:extLst>
+          </a:blip>
+          <a:srcRect t="7361"/>
+          <a:stretch>
+            <a:fillRect/>
+          </a:stretch>
+        </p:blipFill>
+        <p:spPr>
+          <a:xfrm>
+            <a:off x="595513" y="2644544"/>
+            <a:ext cx="5248396" cy="3245436"/>
+          </a:xfrm>
+          <a:custGeom>
+            <a:avLst/>
+            <a:gdLst/>
+            <a:ahLst/>
+            <a:cxnLst/>
+            <a:rect l="l" t="t" r="r" b="b"/>
+            <a:pathLst>
+              <a:path w="5248396" h="3245436">
+                <a:moveTo>
+                  <a:pt x="2983219" y="25"/>
+                </a:moveTo>
+                <a:cubicBezTo>
+                  <a:pt x="3804299" y="-1722"/>
+                  <a:pt x="4514018" y="90213"/>
+                  <a:pt x="4900118" y="514090"/>
+                </a:cubicBezTo>
+                <a:cubicBezTo>
+                  <a:pt x="5508369" y="1182086"/>
+                  <a:pt x="5357962" y="3139882"/>
+                  <a:pt x="4146352" y="3188354"/>
+                </a:cubicBezTo>
+                <a:cubicBezTo>
+                  <a:pt x="3699712" y="3250178"/>
+                  <a:pt x="3631930" y="3248995"/>
+                  <a:pt x="3254286" y="3242404"/>
+                </a:cubicBezTo>
+                <a:cubicBezTo>
+                  <a:pt x="2595831" y="3230910"/>
+                  <a:pt x="2304986" y="3245916"/>
+                  <a:pt x="1704630" y="3235437"/>
+                </a:cubicBezTo>
+                <a:cubicBezTo>
+                  <a:pt x="-513335" y="3226512"/>
+                  <a:pt x="-526880" y="118118"/>
+                  <a:pt x="1430854" y="52881"/>
+                </a:cubicBezTo>
+                <a:cubicBezTo>
+                  <a:pt x="1957833" y="35846"/>
+                  <a:pt x="2490571" y="1073"/>
+                  <a:pt x="2983219" y="25"/>
+                </a:cubicBezTo>
+                <a:close/>
+              </a:path>
+            </a:pathLst>
+          </a:custGeom>
+        </p:spPr>
+      </p:pic>
+      <p:pic>
+        <p:nvPicPr>
+          <p:cNvPr id="11" name="Picture 10">
+            <a:extLst>
+              <a:ext uri="{FF2B5EF4-FFF2-40B4-BE49-F238E27FC236}">
+                <a16:creationId xmlns:a16="http://schemas.microsoft.com/office/drawing/2014/main" id="{A3CA7403-6AD5-3B5B-7713-8A6CF5828E83}"/>
+              </a:ext>
+            </a:extLst>
+          </p:cNvPr>
+          <p:cNvPicPr>
+            <a:picLocks noChangeAspect="1"/>
+          </p:cNvPicPr>
+          <p:nvPr/>
+        </p:nvPicPr>
+        <p:blipFill>
+          <a:blip r:embed="rId3">
+            <a:extLst>
+              <a:ext uri="{28A0092B-C50C-407E-A947-70E740481C1C}">
+                <a14:useLocalDpi xmlns:a14="http://schemas.microsoft.com/office/drawing/2010/main" val="0"/>
+              </a:ext>
+            </a:extLst>
+          </a:blip>
+          <a:srcRect r="21987" b="-1"/>
+          <a:stretch>
+            <a:fillRect/>
+          </a:stretch>
+        </p:blipFill>
+        <p:spPr>
+          <a:xfrm>
+            <a:off x="6189964" y="2691745"/>
+            <a:ext cx="5337945" cy="3250163"/>
+          </a:xfrm>
+          <a:custGeom>
+            <a:avLst/>
+            <a:gdLst/>
+            <a:ahLst/>
+            <a:cxnLst/>
+            <a:rect l="l" t="t" r="r" b="b"/>
+            <a:pathLst>
+              <a:path w="5337945" h="3250163">
+                <a:moveTo>
+                  <a:pt x="1917442" y="13"/>
+                </a:moveTo>
+                <a:cubicBezTo>
+                  <a:pt x="2496512" y="346"/>
+                  <a:pt x="3762377" y="7612"/>
+                  <a:pt x="3896424" y="21471"/>
+                </a:cubicBezTo>
+                <a:cubicBezTo>
+                  <a:pt x="4061405" y="38529"/>
+                  <a:pt x="4683810" y="177196"/>
+                  <a:pt x="4892573" y="482583"/>
+                </a:cubicBezTo>
+                <a:cubicBezTo>
+                  <a:pt x="5089738" y="678517"/>
+                  <a:pt x="5330512" y="1152814"/>
+                  <a:pt x="5337644" y="1561409"/>
+                </a:cubicBezTo>
+                <a:cubicBezTo>
+                  <a:pt x="5348255" y="2169318"/>
+                  <a:pt x="5076281" y="2682471"/>
+                  <a:pt x="4981700" y="2813716"/>
+                </a:cubicBezTo>
+                <a:cubicBezTo>
+                  <a:pt x="4887118" y="2944961"/>
+                  <a:pt x="4445989" y="3201880"/>
+                  <a:pt x="3952089" y="3210501"/>
+                </a:cubicBezTo>
+                <a:cubicBezTo>
+                  <a:pt x="3661560" y="3215572"/>
+                  <a:pt x="2044455" y="3253767"/>
+                  <a:pt x="1695646" y="3249887"/>
+                </a:cubicBezTo>
+                <a:cubicBezTo>
+                  <a:pt x="1356521" y="3245838"/>
+                  <a:pt x="657338" y="3148386"/>
+                  <a:pt x="450488" y="2952621"/>
+                </a:cubicBezTo>
+                <a:cubicBezTo>
+                  <a:pt x="154566" y="2648755"/>
+                  <a:pt x="12724" y="2292356"/>
+                  <a:pt x="199" y="1574824"/>
+                </a:cubicBezTo>
+                <a:cubicBezTo>
+                  <a:pt x="-5019" y="1275853"/>
+                  <a:pt x="92114" y="735845"/>
+                  <a:pt x="377425" y="431802"/>
+                </a:cubicBezTo>
+                <a:cubicBezTo>
+                  <a:pt x="672246" y="117624"/>
+                  <a:pt x="1154722" y="9515"/>
+                  <a:pt x="1648622" y="894"/>
+                </a:cubicBezTo>
+                <a:cubicBezTo>
+                  <a:pt x="1686754" y="228"/>
+                  <a:pt x="1783810" y="-64"/>
+                  <a:pt x="1917442" y="13"/>
+                </a:cubicBezTo>
+                <a:close/>
+              </a:path>
+            </a:pathLst>
+          </a:custGeom>
+        </p:spPr>
+      </p:pic>
+    </p:spTree>
+    <p:extLst>
+      <p:ext uri="{BB962C8B-B14F-4D97-AF65-F5344CB8AC3E}">
+        <p14:creationId xmlns:p14="http://schemas.microsoft.com/office/powerpoint/2010/main" val="2254075788"/>
+      </p:ext>
+    </p:extLst>
+  </p:cSld>
+  <p:clrMapOvr>
+    <a:masterClrMapping/>
+  </p:clrMapOvr>
+  <p:timing>
+    <p:tnLst>
+      <p:par>
+        <p:cTn id="1" dur="indefinite" restart="never" nodeType="tmRoot">
+          <p:childTnLst>
+            <p:seq concurrent="1" nextAc="seek">
+              <p:cTn id="2" dur="indefinite" nodeType="mainSeq">
+                <p:childTnLst>
+                  <p:par>
+                    <p:cTn id="3" fill="hold">
+                      <p:stCondLst>
+                        <p:cond delay="indefinite"/>
+                      </p:stCondLst>
+                      <p:childTnLst>
+                        <p:par>
+                          <p:cTn id="4" fill="hold">
+                            <p:stCondLst>
+                              <p:cond delay="0"/>
+                            </p:stCondLst>
+                            <p:childTnLst>
+                              <p:par>
+                                <p:cTn id="5" presetID="1" presetClass="entr" presetSubtype="0" fill="hold" nodeType="clickEffect">
+                                  <p:stCondLst>
+                                    <p:cond delay="0"/>
+                                  </p:stCondLst>
+                                  <p:childTnLst>
+                                    <p:set>
+                                      <p:cBhvr>
+                                        <p:cTn id="6" dur="1" fill="hold">
+                                          <p:stCondLst>
+                                            <p:cond delay="0"/>
+                                          </p:stCondLst>
+                                        </p:cTn>
+                                        <p:tgtEl>
+                                          <p:spTgt spid="9"/>
+                                        </p:tgtEl>
+                                        <p:attrNameLst>
+                                          <p:attrName>style.visibility</p:attrName>
+                                        </p:attrNameLst>
+                                      </p:cBhvr>
+                                      <p:to>
+                                        <p:strVal val="visible"/>
+                                      </p:to>
+                                    </p:set>
+                                  </p:childTnLst>
+                                </p:cTn>
+                              </p:par>
+                            </p:childTnLst>
+                          </p:cTn>
+                        </p:par>
+                      </p:childTnLst>
+                    </p:cTn>
+                  </p:par>
+                  <p:par>
+                    <p:cTn id="7" fill="hold">
+                      <p:stCondLst>
+                        <p:cond delay="indefinite"/>
+                      </p:stCondLst>
+                      <p:childTnLst>
+                        <p:par>
+                          <p:cTn id="8" fill="hold">
+                            <p:stCondLst>
+                              <p:cond delay="0"/>
+                            </p:stCondLst>
+                            <p:childTnLst>
+                              <p:par>
+                                <p:cTn id="9" presetID="1" presetClass="entr" presetSubtype="0" fill="hold" nodeType="clickEffect">
+                                  <p:stCondLst>
+                                    <p:cond delay="0"/>
+                                  </p:stCondLst>
+                                  <p:childTnLst>
+                                    <p:set>
+                                      <p:cBhvr>
+                                        <p:cTn id="10" dur="1" fill="hold">
+                                          <p:stCondLst>
+                                            <p:cond delay="0"/>
+                                          </p:stCondLst>
+                                        </p:cTn>
+                                        <p:tgtEl>
+                                          <p:spTgt spid="11"/>
+                                        </p:tgtEl>
+                                        <p:attrNameLst>
+                                          <p:attrName>style.visibility</p:attrName>
+                                        </p:attrNameLst>
+                                      </p:cBhvr>
+                                      <p:to>
+                                        <p:strVal val="visible"/>
+                                      </p:to>
+                                    </p:set>
+                                  </p:childTnLst>
+                                </p:cTn>
+                              </p:par>
+                            </p:childTnLst>
+                          </p:cTn>
+                        </p:par>
+                      </p:childTnLst>
+                    </p:cTn>
+                  </p:par>
+                </p:childTnLst>
+              </p:cTn>
+              <p:prevCondLst>
+                <p:cond evt="onPrev" delay="0">
+                  <p:tgtEl>
+                    <p:sldTgt/>
+                  </p:tgtEl>
+                </p:cond>
+              </p:prevCondLst>
+              <p:nextCondLst>
+                <p:cond evt="onNext" delay="0">
+                  <p:tgtEl>
+                    <p:sldTgt/>
+                  </p:tgtEl>
+                </p:cond>
+              </p:nextCondLst>
+            </p:seq>
+          </p:childTnLst>
+        </p:cTn>
+      </p:par>
+    </p:tnLst>
+  </p:timing>
+</p:sld>
+</file>
+
+<file path=ppt/slides/slide19.xml><?xml version="1.0" encoding="utf-8"?>
+<p:sld xmlns:a="http://schemas.openxmlformats.org/drawingml/2006/main" xmlns:r="http://schemas.openxmlformats.org/officeDocument/2006/relationships" xmlns:p="http://schemas.openxmlformats.org/presentationml/2006/main">
+  <p:cSld>
+    <p:spTree>
+      <p:nvGrpSpPr>
+        <p:cNvPr id="1" name="">
+          <a:extLst>
+            <a:ext uri="{FF2B5EF4-FFF2-40B4-BE49-F238E27FC236}">
+              <a16:creationId xmlns:a16="http://schemas.microsoft.com/office/drawing/2014/main" id="{C2EDF9DF-F665-FAF4-86EE-AC18B59D398D}"/>
+            </a:ext>
+          </a:extLst>
+        </p:cNvPr>
+        <p:cNvGrpSpPr/>
+        <p:nvPr/>
+      </p:nvGrpSpPr>
+      <p:grpSpPr>
+        <a:xfrm>
+          <a:off x="0" y="0"/>
+          <a:ext cx="0" cy="0"/>
+          <a:chOff x="0" y="0"/>
+          <a:chExt cx="0" cy="0"/>
+        </a:xfrm>
+      </p:grpSpPr>
+      <p:sp>
+        <p:nvSpPr>
+          <p:cNvPr id="2" name="Title 1">
+            <a:extLst>
+              <a:ext uri="{FF2B5EF4-FFF2-40B4-BE49-F238E27FC236}">
+                <a16:creationId xmlns:a16="http://schemas.microsoft.com/office/drawing/2014/main" id="{002B8367-C088-B3AE-3017-D97E4C7205B1}"/>
+              </a:ext>
+            </a:extLst>
+          </p:cNvPr>
+          <p:cNvSpPr>
+            <a:spLocks noGrp="1"/>
+          </p:cNvSpPr>
+          <p:nvPr>
+            <p:ph type="title"/>
+          </p:nvPr>
+        </p:nvSpPr>
+        <p:spPr/>
+        <p:txBody>
+          <a:bodyPr/>
+          <a:lstStyle/>
+          <a:p>
+            <a:r>
+              <a:rPr lang="nl-NL" noProof="0" dirty="0">
+                <a:hlinkClick r:id="rId2"/>
+              </a:rPr>
+              <a:t>User story</a:t>
+            </a:r>
+            <a:r>
+              <a:rPr lang="nl-NL" noProof="0" dirty="0"/>
+              <a:t>: account rollen worden automatisch aangemaakt bij het maken van een account</a:t>
+            </a:r>
+          </a:p>
+        </p:txBody>
+      </p:sp>
+      <p:sp>
+        <p:nvSpPr>
+          <p:cNvPr id="3" name="Content Placeholder 2">
+            <a:extLst>
+              <a:ext uri="{FF2B5EF4-FFF2-40B4-BE49-F238E27FC236}">
+                <a16:creationId xmlns:a16="http://schemas.microsoft.com/office/drawing/2014/main" id="{53B423D9-0EDC-38F3-6592-A0CC46FCEA16}"/>
+              </a:ext>
+            </a:extLst>
+          </p:cNvPr>
+          <p:cNvSpPr>
+            <a:spLocks noGrp="1"/>
+          </p:cNvSpPr>
+          <p:nvPr>
+            <p:ph idx="1"/>
+          </p:nvPr>
+        </p:nvSpPr>
+        <p:spPr>
+          <a:xfrm>
+            <a:off x="506931" y="2782328"/>
+            <a:ext cx="5589069" cy="2339975"/>
+          </a:xfrm>
+        </p:spPr>
+        <p:txBody>
+          <a:bodyPr/>
+          <a:lstStyle/>
+          <a:p>
+            <a:r>
+              <a:rPr lang="nl-NL" sz="1600" noProof="0" dirty="0"/>
+              <a:t>Bij het maken van een account word de rol van ‘User’ gegeven</a:t>
+            </a:r>
+          </a:p>
+          <a:p>
+            <a:r>
+              <a:rPr lang="nl-NL" sz="1600" noProof="0" dirty="0"/>
+              <a:t>Gebruiker kan zijn rol niet als </a:t>
+            </a:r>
+            <a:r>
+              <a:rPr lang="nl-NL" sz="1600" noProof="0" dirty="0" err="1"/>
+              <a:t>admin</a:t>
+            </a:r>
+            <a:r>
+              <a:rPr lang="nl-NL" sz="1600" noProof="0" dirty="0"/>
+              <a:t> zetten.</a:t>
+            </a:r>
+            <a:endParaRPr lang="nl-NL" noProof="0" dirty="0"/>
+          </a:p>
+        </p:txBody>
+      </p:sp>
+      <p:sp>
+        <p:nvSpPr>
+          <p:cNvPr id="4" name="TextBox 3">
+            <a:extLst>
+              <a:ext uri="{FF2B5EF4-FFF2-40B4-BE49-F238E27FC236}">
+                <a16:creationId xmlns:a16="http://schemas.microsoft.com/office/drawing/2014/main" id="{93F06BFE-26E1-60C0-A39B-C784882BE388}"/>
+              </a:ext>
+            </a:extLst>
+          </p:cNvPr>
+          <p:cNvSpPr txBox="1"/>
+          <p:nvPr/>
+        </p:nvSpPr>
+        <p:spPr>
+          <a:xfrm>
+            <a:off x="506931" y="2096528"/>
+            <a:ext cx="4941644" cy="461665"/>
+          </a:xfrm>
+          <a:prstGeom prst="rect">
+            <a:avLst/>
+          </a:prstGeom>
+          <a:noFill/>
+        </p:spPr>
+        <p:txBody>
+          <a:bodyPr wrap="square" rtlCol="0">
+            <a:spAutoFit/>
+          </a:bodyPr>
+          <a:lstStyle/>
+          <a:p>
+            <a:r>
+              <a:rPr lang="nl-NL" sz="2400" noProof="0" dirty="0"/>
+              <a:t>Acceptatie </a:t>
+            </a:r>
+            <a:r>
+              <a:rPr lang="nl-NL" sz="2400" noProof="0" dirty="0" err="1"/>
+              <a:t>critiria</a:t>
+            </a:r>
+            <a:r>
+              <a:rPr lang="nl-NL" noProof="0" dirty="0"/>
+              <a:t>:</a:t>
+            </a:r>
+          </a:p>
+        </p:txBody>
+      </p:sp>
+    </p:spTree>
+    <p:extLst>
+      <p:ext uri="{BB962C8B-B14F-4D97-AF65-F5344CB8AC3E}">
+        <p14:creationId xmlns:p14="http://schemas.microsoft.com/office/powerpoint/2010/main" val="1422704314"/>
       </p:ext>
     </p:extLst>
   </p:cSld>
@@ -10104,6 +14782,2142 @@
     <p:extLst>
       <p:ext uri="{BB962C8B-B14F-4D97-AF65-F5344CB8AC3E}">
         <p14:creationId xmlns:p14="http://schemas.microsoft.com/office/powerpoint/2010/main" val="2159444441"/>
+      </p:ext>
+    </p:extLst>
+  </p:cSld>
+  <p:clrMapOvr>
+    <a:masterClrMapping/>
+  </p:clrMapOvr>
+</p:sld>
+</file>
+
+<file path=ppt/slides/slide20.xml><?xml version="1.0" encoding="utf-8"?>
+<p:sld xmlns:a="http://schemas.openxmlformats.org/drawingml/2006/main" xmlns:r="http://schemas.openxmlformats.org/officeDocument/2006/relationships" xmlns:p="http://schemas.openxmlformats.org/presentationml/2006/main">
+  <p:cSld>
+    <p:spTree>
+      <p:nvGrpSpPr>
+        <p:cNvPr id="1" name=""/>
+        <p:cNvGrpSpPr/>
+        <p:nvPr/>
+      </p:nvGrpSpPr>
+      <p:grpSpPr>
+        <a:xfrm>
+          <a:off x="0" y="0"/>
+          <a:ext cx="0" cy="0"/>
+          <a:chOff x="0" y="0"/>
+          <a:chExt cx="0" cy="0"/>
+        </a:xfrm>
+      </p:grpSpPr>
+      <p:sp>
+        <p:nvSpPr>
+          <p:cNvPr id="2" name="Title 1">
+            <a:extLst>
+              <a:ext uri="{FF2B5EF4-FFF2-40B4-BE49-F238E27FC236}">
+                <a16:creationId xmlns:a16="http://schemas.microsoft.com/office/drawing/2014/main" id="{68439506-DD8F-9BF4-3236-61403CF3043D}"/>
+              </a:ext>
+            </a:extLst>
+          </p:cNvPr>
+          <p:cNvSpPr>
+            <a:spLocks noGrp="1"/>
+          </p:cNvSpPr>
+          <p:nvPr>
+            <p:ph type="title"/>
+          </p:nvPr>
+        </p:nvSpPr>
+        <p:spPr/>
+        <p:txBody>
+          <a:bodyPr/>
+          <a:lstStyle/>
+          <a:p>
+            <a:r>
+              <a:rPr lang="nl-NL" noProof="0" dirty="0"/>
+              <a:t>Hoe ziet de rollen er uit</a:t>
+            </a:r>
+          </a:p>
+        </p:txBody>
+      </p:sp>
+      <p:pic>
+        <p:nvPicPr>
+          <p:cNvPr id="5" name="Content Placeholder 4">
+            <a:extLst>
+              <a:ext uri="{FF2B5EF4-FFF2-40B4-BE49-F238E27FC236}">
+                <a16:creationId xmlns:a16="http://schemas.microsoft.com/office/drawing/2014/main" id="{F73051B3-A2A3-65A4-02DC-1284B3D20E06}"/>
+              </a:ext>
+            </a:extLst>
+          </p:cNvPr>
+          <p:cNvPicPr>
+            <a:picLocks noGrp="1" noChangeAspect="1"/>
+          </p:cNvPicPr>
+          <p:nvPr>
+            <p:ph idx="1"/>
+          </p:nvPr>
+        </p:nvPicPr>
+        <p:blipFill>
+          <a:blip r:embed="rId2">
+            <a:extLst>
+              <a:ext uri="{28A0092B-C50C-407E-A947-70E740481C1C}">
+                <a14:useLocalDpi xmlns:a14="http://schemas.microsoft.com/office/drawing/2010/main" val="0"/>
+              </a:ext>
+            </a:extLst>
+          </a:blip>
+          <a:stretch>
+            <a:fillRect/>
+          </a:stretch>
+        </p:blipFill>
+        <p:spPr>
+          <a:xfrm>
+            <a:off x="929413" y="2257431"/>
+            <a:ext cx="3305636" cy="523948"/>
+          </a:xfrm>
+          <a:prstGeom prst="rect">
+            <a:avLst/>
+          </a:prstGeom>
+        </p:spPr>
+      </p:pic>
+      <p:pic>
+        <p:nvPicPr>
+          <p:cNvPr id="7" name="Picture 6">
+            <a:extLst>
+              <a:ext uri="{FF2B5EF4-FFF2-40B4-BE49-F238E27FC236}">
+                <a16:creationId xmlns:a16="http://schemas.microsoft.com/office/drawing/2014/main" id="{49D1A345-BA64-DEF0-B31A-4C5FCE14AE38}"/>
+              </a:ext>
+            </a:extLst>
+          </p:cNvPr>
+          <p:cNvPicPr>
+            <a:picLocks noChangeAspect="1"/>
+          </p:cNvPicPr>
+          <p:nvPr/>
+        </p:nvPicPr>
+        <p:blipFill>
+          <a:blip r:embed="rId3">
+            <a:extLst>
+              <a:ext uri="{28A0092B-C50C-407E-A947-70E740481C1C}">
+                <a14:useLocalDpi xmlns:a14="http://schemas.microsoft.com/office/drawing/2010/main" val="0"/>
+              </a:ext>
+            </a:extLst>
+          </a:blip>
+          <a:stretch>
+            <a:fillRect/>
+          </a:stretch>
+        </p:blipFill>
+        <p:spPr>
+          <a:xfrm>
+            <a:off x="7828933" y="2288736"/>
+            <a:ext cx="3410426" cy="533474"/>
+          </a:xfrm>
+          <a:prstGeom prst="rect">
+            <a:avLst/>
+          </a:prstGeom>
+        </p:spPr>
+      </p:pic>
+      <p:sp>
+        <p:nvSpPr>
+          <p:cNvPr id="8" name="TextBox 7">
+            <a:extLst>
+              <a:ext uri="{FF2B5EF4-FFF2-40B4-BE49-F238E27FC236}">
+                <a16:creationId xmlns:a16="http://schemas.microsoft.com/office/drawing/2014/main" id="{EDBA1AB7-9B5B-4C97-64B6-4E014F9B9E1E}"/>
+              </a:ext>
+            </a:extLst>
+          </p:cNvPr>
+          <p:cNvSpPr txBox="1"/>
+          <p:nvPr/>
+        </p:nvSpPr>
+        <p:spPr>
+          <a:xfrm>
+            <a:off x="7828933" y="1961992"/>
+            <a:ext cx="3410426" cy="369332"/>
+          </a:xfrm>
+          <a:prstGeom prst="rect">
+            <a:avLst/>
+          </a:prstGeom>
+          <a:noFill/>
+        </p:spPr>
+        <p:txBody>
+          <a:bodyPr wrap="square" rtlCol="0">
+            <a:spAutoFit/>
+          </a:bodyPr>
+          <a:lstStyle/>
+          <a:p>
+            <a:pPr algn="ctr"/>
+            <a:r>
+              <a:rPr lang="nl-NL" noProof="0" dirty="0"/>
+              <a:t>“user” account</a:t>
+            </a:r>
+          </a:p>
+        </p:txBody>
+      </p:sp>
+      <p:sp>
+        <p:nvSpPr>
+          <p:cNvPr id="9" name="TextBox 8">
+            <a:extLst>
+              <a:ext uri="{FF2B5EF4-FFF2-40B4-BE49-F238E27FC236}">
+                <a16:creationId xmlns:a16="http://schemas.microsoft.com/office/drawing/2014/main" id="{399BE282-9760-70CC-5507-41BF951E9BCF}"/>
+              </a:ext>
+            </a:extLst>
+          </p:cNvPr>
+          <p:cNvSpPr txBox="1"/>
+          <p:nvPr/>
+        </p:nvSpPr>
+        <p:spPr>
+          <a:xfrm>
+            <a:off x="877018" y="1888099"/>
+            <a:ext cx="3410426" cy="369332"/>
+          </a:xfrm>
+          <a:prstGeom prst="rect">
+            <a:avLst/>
+          </a:prstGeom>
+          <a:noFill/>
+        </p:spPr>
+        <p:txBody>
+          <a:bodyPr wrap="square" rtlCol="0">
+            <a:spAutoFit/>
+          </a:bodyPr>
+          <a:lstStyle/>
+          <a:p>
+            <a:pPr algn="ctr"/>
+            <a:r>
+              <a:rPr lang="nl-NL" noProof="0" dirty="0"/>
+              <a:t>“</a:t>
+            </a:r>
+            <a:r>
+              <a:rPr lang="nl-NL" noProof="0" dirty="0" err="1"/>
+              <a:t>admin</a:t>
+            </a:r>
+            <a:r>
+              <a:rPr lang="nl-NL" noProof="0" dirty="0"/>
+              <a:t>” account</a:t>
+            </a:r>
+          </a:p>
+        </p:txBody>
+      </p:sp>
+      <p:pic>
+        <p:nvPicPr>
+          <p:cNvPr id="11" name="Picture 10">
+            <a:extLst>
+              <a:ext uri="{FF2B5EF4-FFF2-40B4-BE49-F238E27FC236}">
+                <a16:creationId xmlns:a16="http://schemas.microsoft.com/office/drawing/2014/main" id="{2A15A74F-87E7-7013-9FFE-3F7297B6CA1D}"/>
+              </a:ext>
+            </a:extLst>
+          </p:cNvPr>
+          <p:cNvPicPr>
+            <a:picLocks noChangeAspect="1"/>
+          </p:cNvPicPr>
+          <p:nvPr/>
+        </p:nvPicPr>
+        <p:blipFill>
+          <a:blip r:embed="rId4">
+            <a:extLst>
+              <a:ext uri="{28A0092B-C50C-407E-A947-70E740481C1C}">
+                <a14:useLocalDpi xmlns:a14="http://schemas.microsoft.com/office/drawing/2010/main" val="0"/>
+              </a:ext>
+            </a:extLst>
+          </a:blip>
+          <a:stretch>
+            <a:fillRect/>
+          </a:stretch>
+        </p:blipFill>
+        <p:spPr>
+          <a:xfrm>
+            <a:off x="3375737" y="5162023"/>
+            <a:ext cx="5580826" cy="1530627"/>
+          </a:xfrm>
+          <a:prstGeom prst="rect">
+            <a:avLst/>
+          </a:prstGeom>
+        </p:spPr>
+      </p:pic>
+      <p:pic>
+        <p:nvPicPr>
+          <p:cNvPr id="13" name="Picture 12">
+            <a:extLst>
+              <a:ext uri="{FF2B5EF4-FFF2-40B4-BE49-F238E27FC236}">
+                <a16:creationId xmlns:a16="http://schemas.microsoft.com/office/drawing/2014/main" id="{A613F80D-0BE8-9F77-3EA6-BAFF14BEE5D0}"/>
+              </a:ext>
+            </a:extLst>
+          </p:cNvPr>
+          <p:cNvPicPr>
+            <a:picLocks noChangeAspect="1"/>
+          </p:cNvPicPr>
+          <p:nvPr/>
+        </p:nvPicPr>
+        <p:blipFill>
+          <a:blip r:embed="rId5">
+            <a:extLst>
+              <a:ext uri="{28A0092B-C50C-407E-A947-70E740481C1C}">
+                <a14:useLocalDpi xmlns:a14="http://schemas.microsoft.com/office/drawing/2010/main" val="0"/>
+              </a:ext>
+            </a:extLst>
+          </a:blip>
+          <a:srcRect t="55043" r="43703" b="39392"/>
+          <a:stretch>
+            <a:fillRect/>
+          </a:stretch>
+        </p:blipFill>
+        <p:spPr>
+          <a:xfrm>
+            <a:off x="3616047" y="4761473"/>
+            <a:ext cx="5100206" cy="239647"/>
+          </a:xfrm>
+          <a:prstGeom prst="rect">
+            <a:avLst/>
+          </a:prstGeom>
+        </p:spPr>
+      </p:pic>
+      <p:sp>
+        <p:nvSpPr>
+          <p:cNvPr id="14" name="TextBox 13">
+            <a:extLst>
+              <a:ext uri="{FF2B5EF4-FFF2-40B4-BE49-F238E27FC236}">
+                <a16:creationId xmlns:a16="http://schemas.microsoft.com/office/drawing/2014/main" id="{7C9B0B72-699A-3220-208D-C5FAF4EE8759}"/>
+              </a:ext>
+            </a:extLst>
+          </p:cNvPr>
+          <p:cNvSpPr txBox="1"/>
+          <p:nvPr/>
+        </p:nvSpPr>
+        <p:spPr>
+          <a:xfrm>
+            <a:off x="3592945" y="4351310"/>
+            <a:ext cx="5089237" cy="369332"/>
+          </a:xfrm>
+          <a:prstGeom prst="rect">
+            <a:avLst/>
+          </a:prstGeom>
+          <a:noFill/>
+        </p:spPr>
+        <p:txBody>
+          <a:bodyPr wrap="square" rtlCol="0">
+            <a:spAutoFit/>
+          </a:bodyPr>
+          <a:lstStyle/>
+          <a:p>
+            <a:pPr algn="ctr"/>
+            <a:r>
+              <a:rPr lang="nl-NL" noProof="0" dirty="0"/>
+              <a:t>code</a:t>
+            </a:r>
+          </a:p>
+        </p:txBody>
+      </p:sp>
+    </p:spTree>
+    <p:extLst>
+      <p:ext uri="{BB962C8B-B14F-4D97-AF65-F5344CB8AC3E}">
+        <p14:creationId xmlns:p14="http://schemas.microsoft.com/office/powerpoint/2010/main" val="2725028488"/>
+      </p:ext>
+    </p:extLst>
+  </p:cSld>
+  <p:clrMapOvr>
+    <a:masterClrMapping/>
+  </p:clrMapOvr>
+  <p:timing>
+    <p:tnLst>
+      <p:par>
+        <p:cTn id="1" dur="indefinite" restart="never" nodeType="tmRoot">
+          <p:childTnLst>
+            <p:seq concurrent="1" nextAc="seek">
+              <p:cTn id="2" dur="indefinite" nodeType="mainSeq">
+                <p:childTnLst>
+                  <p:par>
+                    <p:cTn id="3" fill="hold">
+                      <p:stCondLst>
+                        <p:cond delay="indefinite"/>
+                      </p:stCondLst>
+                      <p:childTnLst>
+                        <p:par>
+                          <p:cTn id="4" fill="hold">
+                            <p:stCondLst>
+                              <p:cond delay="0"/>
+                            </p:stCondLst>
+                            <p:childTnLst>
+                              <p:par>
+                                <p:cTn id="5" presetID="1" presetClass="entr" presetSubtype="0" fill="hold" grpId="0" nodeType="clickEffect">
+                                  <p:stCondLst>
+                                    <p:cond delay="0"/>
+                                  </p:stCondLst>
+                                  <p:childTnLst>
+                                    <p:set>
+                                      <p:cBhvr>
+                                        <p:cTn id="6" dur="1" fill="hold">
+                                          <p:stCondLst>
+                                            <p:cond delay="0"/>
+                                          </p:stCondLst>
+                                        </p:cTn>
+                                        <p:tgtEl>
+                                          <p:spTgt spid="14"/>
+                                        </p:tgtEl>
+                                        <p:attrNameLst>
+                                          <p:attrName>style.visibility</p:attrName>
+                                        </p:attrNameLst>
+                                      </p:cBhvr>
+                                      <p:to>
+                                        <p:strVal val="visible"/>
+                                      </p:to>
+                                    </p:set>
+                                  </p:childTnLst>
+                                </p:cTn>
+                              </p:par>
+                              <p:par>
+                                <p:cTn id="7" presetID="1" presetClass="entr" presetSubtype="0" fill="hold" nodeType="withEffect">
+                                  <p:stCondLst>
+                                    <p:cond delay="0"/>
+                                  </p:stCondLst>
+                                  <p:childTnLst>
+                                    <p:set>
+                                      <p:cBhvr>
+                                        <p:cTn id="8" dur="1" fill="hold">
+                                          <p:stCondLst>
+                                            <p:cond delay="0"/>
+                                          </p:stCondLst>
+                                        </p:cTn>
+                                        <p:tgtEl>
+                                          <p:spTgt spid="13"/>
+                                        </p:tgtEl>
+                                        <p:attrNameLst>
+                                          <p:attrName>style.visibility</p:attrName>
+                                        </p:attrNameLst>
+                                      </p:cBhvr>
+                                      <p:to>
+                                        <p:strVal val="visible"/>
+                                      </p:to>
+                                    </p:set>
+                                  </p:childTnLst>
+                                </p:cTn>
+                              </p:par>
+                              <p:par>
+                                <p:cTn id="9" presetID="1" presetClass="entr" presetSubtype="0" fill="hold" nodeType="withEffect">
+                                  <p:stCondLst>
+                                    <p:cond delay="0"/>
+                                  </p:stCondLst>
+                                  <p:childTnLst>
+                                    <p:set>
+                                      <p:cBhvr>
+                                        <p:cTn id="10" dur="1" fill="hold">
+                                          <p:stCondLst>
+                                            <p:cond delay="0"/>
+                                          </p:stCondLst>
+                                        </p:cTn>
+                                        <p:tgtEl>
+                                          <p:spTgt spid="11"/>
+                                        </p:tgtEl>
+                                        <p:attrNameLst>
+                                          <p:attrName>style.visibility</p:attrName>
+                                        </p:attrNameLst>
+                                      </p:cBhvr>
+                                      <p:to>
+                                        <p:strVal val="visible"/>
+                                      </p:to>
+                                    </p:set>
+                                  </p:childTnLst>
+                                </p:cTn>
+                              </p:par>
+                            </p:childTnLst>
+                          </p:cTn>
+                        </p:par>
+                      </p:childTnLst>
+                    </p:cTn>
+                  </p:par>
+                </p:childTnLst>
+              </p:cTn>
+              <p:prevCondLst>
+                <p:cond evt="onPrev" delay="0">
+                  <p:tgtEl>
+                    <p:sldTgt/>
+                  </p:tgtEl>
+                </p:cond>
+              </p:prevCondLst>
+              <p:nextCondLst>
+                <p:cond evt="onNext" delay="0">
+                  <p:tgtEl>
+                    <p:sldTgt/>
+                  </p:tgtEl>
+                </p:cond>
+              </p:nextCondLst>
+            </p:seq>
+          </p:childTnLst>
+        </p:cTn>
+      </p:par>
+    </p:tnLst>
+    <p:bldLst>
+      <p:bldP spid="14" grpId="0"/>
+    </p:bldLst>
+  </p:timing>
+</p:sld>
+</file>
+
+<file path=ppt/slides/slide21.xml><?xml version="1.0" encoding="utf-8"?>
+<p:sld xmlns:a="http://schemas.openxmlformats.org/drawingml/2006/main" xmlns:r="http://schemas.openxmlformats.org/officeDocument/2006/relationships" xmlns:p="http://schemas.openxmlformats.org/presentationml/2006/main">
+  <p:cSld>
+    <p:spTree>
+      <p:nvGrpSpPr>
+        <p:cNvPr id="1" name="">
+          <a:extLst>
+            <a:ext uri="{FF2B5EF4-FFF2-40B4-BE49-F238E27FC236}">
+              <a16:creationId xmlns:a16="http://schemas.microsoft.com/office/drawing/2014/main" id="{1A32D045-D89C-5453-08B1-953BD5864050}"/>
+            </a:ext>
+          </a:extLst>
+        </p:cNvPr>
+        <p:cNvGrpSpPr/>
+        <p:nvPr/>
+      </p:nvGrpSpPr>
+      <p:grpSpPr>
+        <a:xfrm>
+          <a:off x="0" y="0"/>
+          <a:ext cx="0" cy="0"/>
+          <a:chOff x="0" y="0"/>
+          <a:chExt cx="0" cy="0"/>
+        </a:xfrm>
+      </p:grpSpPr>
+      <p:sp>
+        <p:nvSpPr>
+          <p:cNvPr id="2" name="Title 1">
+            <a:extLst>
+              <a:ext uri="{FF2B5EF4-FFF2-40B4-BE49-F238E27FC236}">
+                <a16:creationId xmlns:a16="http://schemas.microsoft.com/office/drawing/2014/main" id="{4C129720-342E-A3AF-96C4-B2804B4BBCD2}"/>
+              </a:ext>
+            </a:extLst>
+          </p:cNvPr>
+          <p:cNvSpPr>
+            <a:spLocks noGrp="1"/>
+          </p:cNvSpPr>
+          <p:nvPr>
+            <p:ph type="title"/>
+          </p:nvPr>
+        </p:nvSpPr>
+        <p:spPr/>
+        <p:txBody>
+          <a:bodyPr/>
+          <a:lstStyle/>
+          <a:p>
+            <a:r>
+              <a:rPr lang="nl-NL" noProof="0" dirty="0">
+                <a:hlinkClick r:id="rId2"/>
+              </a:rPr>
+              <a:t>User story</a:t>
+            </a:r>
+            <a:r>
+              <a:rPr lang="nl-NL" noProof="0" dirty="0"/>
+              <a:t>: laten zien van userdata</a:t>
+            </a:r>
+          </a:p>
+        </p:txBody>
+      </p:sp>
+      <p:sp>
+        <p:nvSpPr>
+          <p:cNvPr id="3" name="Content Placeholder 2">
+            <a:extLst>
+              <a:ext uri="{FF2B5EF4-FFF2-40B4-BE49-F238E27FC236}">
+                <a16:creationId xmlns:a16="http://schemas.microsoft.com/office/drawing/2014/main" id="{01C2C518-473B-BBE1-8BF6-99C23EF86A7C}"/>
+              </a:ext>
+            </a:extLst>
+          </p:cNvPr>
+          <p:cNvSpPr>
+            <a:spLocks noGrp="1"/>
+          </p:cNvSpPr>
+          <p:nvPr>
+            <p:ph idx="1"/>
+          </p:nvPr>
+        </p:nvSpPr>
+        <p:spPr>
+          <a:xfrm>
+            <a:off x="506931" y="2782328"/>
+            <a:ext cx="5589069" cy="2339975"/>
+          </a:xfrm>
+        </p:spPr>
+        <p:txBody>
+          <a:bodyPr/>
+          <a:lstStyle/>
+          <a:p>
+            <a:r>
+              <a:rPr lang="nl-NL" sz="1600" noProof="0" dirty="0"/>
+              <a:t>Gebruiker data is beschikbaar in de omgeving</a:t>
+            </a:r>
+          </a:p>
+          <a:p>
+            <a:r>
+              <a:rPr lang="nl-NL" sz="1600" noProof="0" dirty="0"/>
+              <a:t>De opgeslagen data van een gebruiker kan gezien worden via zichtbaar gemaakt worden via de site.</a:t>
+            </a:r>
+          </a:p>
+          <a:p>
+            <a:endParaRPr lang="nl-NL" noProof="0" dirty="0"/>
+          </a:p>
+        </p:txBody>
+      </p:sp>
+      <p:sp>
+        <p:nvSpPr>
+          <p:cNvPr id="4" name="TextBox 3">
+            <a:extLst>
+              <a:ext uri="{FF2B5EF4-FFF2-40B4-BE49-F238E27FC236}">
+                <a16:creationId xmlns:a16="http://schemas.microsoft.com/office/drawing/2014/main" id="{17453E31-A348-2C4B-07D8-F51F1C5BB065}"/>
+              </a:ext>
+            </a:extLst>
+          </p:cNvPr>
+          <p:cNvSpPr txBox="1"/>
+          <p:nvPr/>
+        </p:nvSpPr>
+        <p:spPr>
+          <a:xfrm>
+            <a:off x="506931" y="2096528"/>
+            <a:ext cx="4941644" cy="461665"/>
+          </a:xfrm>
+          <a:prstGeom prst="rect">
+            <a:avLst/>
+          </a:prstGeom>
+          <a:noFill/>
+        </p:spPr>
+        <p:txBody>
+          <a:bodyPr wrap="square" rtlCol="0">
+            <a:spAutoFit/>
+          </a:bodyPr>
+          <a:lstStyle/>
+          <a:p>
+            <a:r>
+              <a:rPr lang="nl-NL" sz="2400" noProof="0" dirty="0"/>
+              <a:t>Acceptatie </a:t>
+            </a:r>
+            <a:r>
+              <a:rPr lang="nl-NL" sz="2400" noProof="0" dirty="0" err="1"/>
+              <a:t>critiria</a:t>
+            </a:r>
+            <a:r>
+              <a:rPr lang="nl-NL" noProof="0" dirty="0"/>
+              <a:t>:</a:t>
+            </a:r>
+          </a:p>
+        </p:txBody>
+      </p:sp>
+    </p:spTree>
+    <p:extLst>
+      <p:ext uri="{BB962C8B-B14F-4D97-AF65-F5344CB8AC3E}">
+        <p14:creationId xmlns:p14="http://schemas.microsoft.com/office/powerpoint/2010/main" val="851664892"/>
+      </p:ext>
+    </p:extLst>
+  </p:cSld>
+  <p:clrMapOvr>
+    <a:masterClrMapping/>
+  </p:clrMapOvr>
+</p:sld>
+</file>
+
+<file path=ppt/slides/slide22.xml><?xml version="1.0" encoding="utf-8"?>
+<p:sld xmlns:a="http://schemas.openxmlformats.org/drawingml/2006/main" xmlns:r="http://schemas.openxmlformats.org/officeDocument/2006/relationships" xmlns:p="http://schemas.openxmlformats.org/presentationml/2006/main">
+  <p:cSld>
+    <p:spTree>
+      <p:nvGrpSpPr>
+        <p:cNvPr id="1" name=""/>
+        <p:cNvGrpSpPr/>
+        <p:nvPr/>
+      </p:nvGrpSpPr>
+      <p:grpSpPr>
+        <a:xfrm>
+          <a:off x="0" y="0"/>
+          <a:ext cx="0" cy="0"/>
+          <a:chOff x="0" y="0"/>
+          <a:chExt cx="0" cy="0"/>
+        </a:xfrm>
+      </p:grpSpPr>
+      <p:sp>
+        <p:nvSpPr>
+          <p:cNvPr id="2" name="Title 1">
+            <a:extLst>
+              <a:ext uri="{FF2B5EF4-FFF2-40B4-BE49-F238E27FC236}">
+                <a16:creationId xmlns:a16="http://schemas.microsoft.com/office/drawing/2014/main" id="{056B5122-E151-6093-8607-9DD1563AADB6}"/>
+              </a:ext>
+            </a:extLst>
+          </p:cNvPr>
+          <p:cNvSpPr>
+            <a:spLocks noGrp="1"/>
+          </p:cNvSpPr>
+          <p:nvPr>
+            <p:ph type="title"/>
+          </p:nvPr>
+        </p:nvSpPr>
+        <p:spPr/>
+        <p:txBody>
+          <a:bodyPr/>
+          <a:lstStyle/>
+          <a:p>
+            <a:r>
+              <a:rPr lang="nl-NL" noProof="0" dirty="0"/>
+              <a:t>Hoe zit dit er out?</a:t>
+            </a:r>
+          </a:p>
+        </p:txBody>
+      </p:sp>
+      <p:pic>
+        <p:nvPicPr>
+          <p:cNvPr id="5" name="Content Placeholder 4">
+            <a:extLst>
+              <a:ext uri="{FF2B5EF4-FFF2-40B4-BE49-F238E27FC236}">
+                <a16:creationId xmlns:a16="http://schemas.microsoft.com/office/drawing/2014/main" id="{F7C240FA-C02E-8B48-3417-3C01BE48452B}"/>
+              </a:ext>
+            </a:extLst>
+          </p:cNvPr>
+          <p:cNvPicPr>
+            <a:picLocks noGrp="1" noChangeAspect="1"/>
+          </p:cNvPicPr>
+          <p:nvPr>
+            <p:ph idx="1"/>
+          </p:nvPr>
+        </p:nvPicPr>
+        <p:blipFill>
+          <a:blip r:embed="rId2">
+            <a:extLst>
+              <a:ext uri="{28A0092B-C50C-407E-A947-70E740481C1C}">
+                <a14:useLocalDpi xmlns:a14="http://schemas.microsoft.com/office/drawing/2010/main" val="0"/>
+              </a:ext>
+            </a:extLst>
+          </a:blip>
+          <a:stretch>
+            <a:fillRect/>
+          </a:stretch>
+        </p:blipFill>
+        <p:spPr>
+          <a:xfrm>
+            <a:off x="1970859" y="2301718"/>
+            <a:ext cx="3410426" cy="533474"/>
+          </a:xfrm>
+          <a:prstGeom prst="rect">
+            <a:avLst/>
+          </a:prstGeom>
+        </p:spPr>
+      </p:pic>
+      <p:pic>
+        <p:nvPicPr>
+          <p:cNvPr id="7" name="Picture 6">
+            <a:extLst>
+              <a:ext uri="{FF2B5EF4-FFF2-40B4-BE49-F238E27FC236}">
+                <a16:creationId xmlns:a16="http://schemas.microsoft.com/office/drawing/2014/main" id="{8BAFC46C-59F4-12DE-B77A-02CB20FB2432}"/>
+              </a:ext>
+            </a:extLst>
+          </p:cNvPr>
+          <p:cNvPicPr>
+            <a:picLocks noChangeAspect="1"/>
+          </p:cNvPicPr>
+          <p:nvPr/>
+        </p:nvPicPr>
+        <p:blipFill>
+          <a:blip r:embed="rId3">
+            <a:extLst>
+              <a:ext uri="{28A0092B-C50C-407E-A947-70E740481C1C}">
+                <a14:useLocalDpi xmlns:a14="http://schemas.microsoft.com/office/drawing/2010/main" val="0"/>
+              </a:ext>
+            </a:extLst>
+          </a:blip>
+          <a:stretch>
+            <a:fillRect/>
+          </a:stretch>
+        </p:blipFill>
+        <p:spPr>
+          <a:xfrm>
+            <a:off x="1579418" y="3991679"/>
+            <a:ext cx="5909826" cy="2554527"/>
+          </a:xfrm>
+          <a:prstGeom prst="rect">
+            <a:avLst/>
+          </a:prstGeom>
+        </p:spPr>
+      </p:pic>
+      <p:sp>
+        <p:nvSpPr>
+          <p:cNvPr id="8" name="TextBox 7">
+            <a:extLst>
+              <a:ext uri="{FF2B5EF4-FFF2-40B4-BE49-F238E27FC236}">
+                <a16:creationId xmlns:a16="http://schemas.microsoft.com/office/drawing/2014/main" id="{3B438599-0DA7-49D1-9BC7-504ADC6C591C}"/>
+              </a:ext>
+            </a:extLst>
+          </p:cNvPr>
+          <p:cNvSpPr txBox="1"/>
+          <p:nvPr/>
+        </p:nvSpPr>
+        <p:spPr>
+          <a:xfrm>
+            <a:off x="1579418" y="1911862"/>
+            <a:ext cx="4193309" cy="369332"/>
+          </a:xfrm>
+          <a:prstGeom prst="rect">
+            <a:avLst/>
+          </a:prstGeom>
+          <a:noFill/>
+        </p:spPr>
+        <p:txBody>
+          <a:bodyPr wrap="square" rtlCol="0">
+            <a:spAutoFit/>
+          </a:bodyPr>
+          <a:lstStyle/>
+          <a:p>
+            <a:pPr marL="285750" indent="-285750">
+              <a:buFont typeface="Arial" panose="020B0604020202020204" pitchFamily="34" charset="0"/>
+              <a:buChar char="•"/>
+            </a:pPr>
+            <a:r>
+              <a:rPr lang="nl-NL" noProof="0" dirty="0"/>
+              <a:t>Laten zien van de account naam</a:t>
+            </a:r>
+          </a:p>
+        </p:txBody>
+      </p:sp>
+      <p:sp>
+        <p:nvSpPr>
+          <p:cNvPr id="9" name="TextBox 8">
+            <a:extLst>
+              <a:ext uri="{FF2B5EF4-FFF2-40B4-BE49-F238E27FC236}">
+                <a16:creationId xmlns:a16="http://schemas.microsoft.com/office/drawing/2014/main" id="{B67BA60F-7CE3-929E-F713-ABE4406C2C61}"/>
+              </a:ext>
+            </a:extLst>
+          </p:cNvPr>
+          <p:cNvSpPr txBox="1"/>
+          <p:nvPr/>
+        </p:nvSpPr>
+        <p:spPr>
+          <a:xfrm>
+            <a:off x="1579418" y="3437681"/>
+            <a:ext cx="5846618" cy="369332"/>
+          </a:xfrm>
+          <a:prstGeom prst="rect">
+            <a:avLst/>
+          </a:prstGeom>
+          <a:noFill/>
+        </p:spPr>
+        <p:txBody>
+          <a:bodyPr wrap="square" rtlCol="0">
+            <a:spAutoFit/>
+          </a:bodyPr>
+          <a:lstStyle/>
+          <a:p>
+            <a:pPr marL="285750" indent="-285750">
+              <a:buFont typeface="Arial" panose="020B0604020202020204" pitchFamily="34" charset="0"/>
+              <a:buChar char="•"/>
+            </a:pPr>
+            <a:r>
+              <a:rPr lang="nl-NL" noProof="0" dirty="0"/>
+              <a:t>een accounts details pagina</a:t>
+            </a:r>
+          </a:p>
+        </p:txBody>
+      </p:sp>
+    </p:spTree>
+    <p:extLst>
+      <p:ext uri="{BB962C8B-B14F-4D97-AF65-F5344CB8AC3E}">
+        <p14:creationId xmlns:p14="http://schemas.microsoft.com/office/powerpoint/2010/main" val="2668165846"/>
+      </p:ext>
+    </p:extLst>
+  </p:cSld>
+  <p:clrMapOvr>
+    <a:masterClrMapping/>
+  </p:clrMapOvr>
+  <p:timing>
+    <p:tnLst>
+      <p:par>
+        <p:cTn id="1" dur="indefinite" restart="never" nodeType="tmRoot">
+          <p:childTnLst>
+            <p:seq concurrent="1" nextAc="seek">
+              <p:cTn id="2" dur="indefinite" nodeType="mainSeq">
+                <p:childTnLst>
+                  <p:par>
+                    <p:cTn id="3" fill="hold">
+                      <p:stCondLst>
+                        <p:cond delay="indefinite"/>
+                      </p:stCondLst>
+                      <p:childTnLst>
+                        <p:par>
+                          <p:cTn id="4" fill="hold">
+                            <p:stCondLst>
+                              <p:cond delay="0"/>
+                            </p:stCondLst>
+                            <p:childTnLst>
+                              <p:par>
+                                <p:cTn id="5" presetID="1" presetClass="entr" presetSubtype="0" fill="hold" grpId="0" nodeType="clickEffect">
+                                  <p:stCondLst>
+                                    <p:cond delay="0"/>
+                                  </p:stCondLst>
+                                  <p:childTnLst>
+                                    <p:set>
+                                      <p:cBhvr>
+                                        <p:cTn id="6" dur="1" fill="hold">
+                                          <p:stCondLst>
+                                            <p:cond delay="0"/>
+                                          </p:stCondLst>
+                                        </p:cTn>
+                                        <p:tgtEl>
+                                          <p:spTgt spid="8"/>
+                                        </p:tgtEl>
+                                        <p:attrNameLst>
+                                          <p:attrName>style.visibility</p:attrName>
+                                        </p:attrNameLst>
+                                      </p:cBhvr>
+                                      <p:to>
+                                        <p:strVal val="visible"/>
+                                      </p:to>
+                                    </p:set>
+                                  </p:childTnLst>
+                                </p:cTn>
+                              </p:par>
+                              <p:par>
+                                <p:cTn id="7" presetID="1" presetClass="entr" presetSubtype="0" fill="hold" nodeType="withEffect">
+                                  <p:stCondLst>
+                                    <p:cond delay="0"/>
+                                  </p:stCondLst>
+                                  <p:childTnLst>
+                                    <p:set>
+                                      <p:cBhvr>
+                                        <p:cTn id="8" dur="1" fill="hold">
+                                          <p:stCondLst>
+                                            <p:cond delay="0"/>
+                                          </p:stCondLst>
+                                        </p:cTn>
+                                        <p:tgtEl>
+                                          <p:spTgt spid="5"/>
+                                        </p:tgtEl>
+                                        <p:attrNameLst>
+                                          <p:attrName>style.visibility</p:attrName>
+                                        </p:attrNameLst>
+                                      </p:cBhvr>
+                                      <p:to>
+                                        <p:strVal val="visible"/>
+                                      </p:to>
+                                    </p:set>
+                                  </p:childTnLst>
+                                </p:cTn>
+                              </p:par>
+                            </p:childTnLst>
+                          </p:cTn>
+                        </p:par>
+                      </p:childTnLst>
+                    </p:cTn>
+                  </p:par>
+                  <p:par>
+                    <p:cTn id="9" fill="hold">
+                      <p:stCondLst>
+                        <p:cond delay="indefinite"/>
+                      </p:stCondLst>
+                      <p:childTnLst>
+                        <p:par>
+                          <p:cTn id="10" fill="hold">
+                            <p:stCondLst>
+                              <p:cond delay="0"/>
+                            </p:stCondLst>
+                            <p:childTnLst>
+                              <p:par>
+                                <p:cTn id="11" presetID="1" presetClass="entr" presetSubtype="0" fill="hold" grpId="0" nodeType="clickEffect">
+                                  <p:stCondLst>
+                                    <p:cond delay="0"/>
+                                  </p:stCondLst>
+                                  <p:childTnLst>
+                                    <p:set>
+                                      <p:cBhvr>
+                                        <p:cTn id="12" dur="1" fill="hold">
+                                          <p:stCondLst>
+                                            <p:cond delay="0"/>
+                                          </p:stCondLst>
+                                        </p:cTn>
+                                        <p:tgtEl>
+                                          <p:spTgt spid="9"/>
+                                        </p:tgtEl>
+                                        <p:attrNameLst>
+                                          <p:attrName>style.visibility</p:attrName>
+                                        </p:attrNameLst>
+                                      </p:cBhvr>
+                                      <p:to>
+                                        <p:strVal val="visible"/>
+                                      </p:to>
+                                    </p:set>
+                                  </p:childTnLst>
+                                </p:cTn>
+                              </p:par>
+                              <p:par>
+                                <p:cTn id="13" presetID="1" presetClass="entr" presetSubtype="0" fill="hold" nodeType="withEffect">
+                                  <p:stCondLst>
+                                    <p:cond delay="0"/>
+                                  </p:stCondLst>
+                                  <p:childTnLst>
+                                    <p:set>
+                                      <p:cBhvr>
+                                        <p:cTn id="14" dur="1" fill="hold">
+                                          <p:stCondLst>
+                                            <p:cond delay="0"/>
+                                          </p:stCondLst>
+                                        </p:cTn>
+                                        <p:tgtEl>
+                                          <p:spTgt spid="7"/>
+                                        </p:tgtEl>
+                                        <p:attrNameLst>
+                                          <p:attrName>style.visibility</p:attrName>
+                                        </p:attrNameLst>
+                                      </p:cBhvr>
+                                      <p:to>
+                                        <p:strVal val="visible"/>
+                                      </p:to>
+                                    </p:set>
+                                  </p:childTnLst>
+                                </p:cTn>
+                              </p:par>
+                            </p:childTnLst>
+                          </p:cTn>
+                        </p:par>
+                      </p:childTnLst>
+                    </p:cTn>
+                  </p:par>
+                </p:childTnLst>
+              </p:cTn>
+              <p:prevCondLst>
+                <p:cond evt="onPrev" delay="0">
+                  <p:tgtEl>
+                    <p:sldTgt/>
+                  </p:tgtEl>
+                </p:cond>
+              </p:prevCondLst>
+              <p:nextCondLst>
+                <p:cond evt="onNext" delay="0">
+                  <p:tgtEl>
+                    <p:sldTgt/>
+                  </p:tgtEl>
+                </p:cond>
+              </p:nextCondLst>
+            </p:seq>
+          </p:childTnLst>
+        </p:cTn>
+      </p:par>
+    </p:tnLst>
+    <p:bldLst>
+      <p:bldP spid="8" grpId="0"/>
+      <p:bldP spid="9" grpId="0"/>
+    </p:bldLst>
+  </p:timing>
+</p:sld>
+</file>
+
+<file path=ppt/slides/slide23.xml><?xml version="1.0" encoding="utf-8"?>
+<p:sld xmlns:a="http://schemas.openxmlformats.org/drawingml/2006/main" xmlns:r="http://schemas.openxmlformats.org/officeDocument/2006/relationships" xmlns:p="http://schemas.openxmlformats.org/presentationml/2006/main">
+  <p:cSld>
+    <p:bg>
+      <p:bgPr>
+        <a:solidFill>
+          <a:schemeClr val="bg2"/>
+        </a:solidFill>
+        <a:effectLst/>
+      </p:bgPr>
+    </p:bg>
+    <p:spTree>
+      <p:nvGrpSpPr>
+        <p:cNvPr id="1" name=""/>
+        <p:cNvGrpSpPr/>
+        <p:nvPr/>
+      </p:nvGrpSpPr>
+      <p:grpSpPr>
+        <a:xfrm>
+          <a:off x="0" y="0"/>
+          <a:ext cx="0" cy="0"/>
+          <a:chOff x="0" y="0"/>
+          <a:chExt cx="0" cy="0"/>
+        </a:xfrm>
+      </p:grpSpPr>
+      <p:sp useBgFill="1">
+        <p:nvSpPr>
+          <p:cNvPr id="14" name="Rectangle 13">
+            <a:extLst>
+              <a:ext uri="{FF2B5EF4-FFF2-40B4-BE49-F238E27FC236}">
+                <a16:creationId xmlns:a16="http://schemas.microsoft.com/office/drawing/2014/main" id="{57FD0D75-1382-4CB8-BFB1-972F6DF554D3}"/>
+              </a:ext>
+              <a:ext uri="{C183D7F6-B498-43B3-948B-1728B52AA6E4}">
+                <adec:decorative xmlns:adec="http://schemas.microsoft.com/office/drawing/2017/decorative" val="1"/>
+              </a:ext>
+            </a:extLst>
+          </p:cNvPr>
+          <p:cNvSpPr>
+            <a:spLocks noGrp="1" noRot="1" noChangeAspect="1" noMove="1" noResize="1" noEditPoints="1" noAdjustHandles="1" noChangeArrowheads="1" noChangeShapeType="1" noTextEdit="1"/>
+          </p:cNvSpPr>
+          <p:nvPr>
+            <p:extLst>
+              <p:ext uri="{386F3935-93C4-4BCD-93E2-E3B085C9AB24}">
+                <p16:designElem xmlns:p16="http://schemas.microsoft.com/office/powerpoint/2015/main" val="1"/>
+              </p:ext>
+            </p:extLst>
+          </p:nvPr>
+        </p:nvSpPr>
+        <p:spPr>
+          <a:xfrm>
+            <a:off x="0" y="0"/>
+            <a:ext cx="12192000" cy="6858000"/>
+          </a:xfrm>
+          <a:prstGeom prst="rect">
+            <a:avLst/>
+          </a:prstGeom>
+          <a:ln w="12700" cap="flat" cmpd="sng" algn="ctr">
+            <a:noFill/>
+            <a:prstDash val="solid"/>
+            <a:miter lim="800000"/>
+          </a:ln>
+          <a:effectLst/>
+        </p:spPr>
+        <p:style>
+          <a:lnRef idx="2">
+            <a:schemeClr val="accent1">
+              <a:shade val="50000"/>
+            </a:schemeClr>
+          </a:lnRef>
+          <a:fillRef idx="1">
+            <a:schemeClr val="accent1"/>
+          </a:fillRef>
+          <a:effectRef idx="0">
+            <a:schemeClr val="accent1"/>
+          </a:effectRef>
+          <a:fontRef idx="minor">
+            <a:schemeClr val="lt1"/>
+          </a:fontRef>
+        </p:style>
+        <p:txBody>
+          <a:bodyPr rtlCol="0" anchor="ctr"/>
+          <a:lstStyle/>
+          <a:p>
+            <a:pPr algn="ctr"/>
+            <a:endParaRPr lang="nl-NL" noProof="0" dirty="0"/>
+          </a:p>
+        </p:txBody>
+      </p:sp>
+      <p:sp>
+        <p:nvSpPr>
+          <p:cNvPr id="16" name="Rectangle 15">
+            <a:extLst>
+              <a:ext uri="{FF2B5EF4-FFF2-40B4-BE49-F238E27FC236}">
+                <a16:creationId xmlns:a16="http://schemas.microsoft.com/office/drawing/2014/main" id="{B45424FD-F6A1-4096-9DD4-4411854956E1}"/>
+              </a:ext>
+              <a:ext uri="{C183D7F6-B498-43B3-948B-1728B52AA6E4}">
+                <adec:decorative xmlns:adec="http://schemas.microsoft.com/office/drawing/2017/decorative" val="1"/>
+              </a:ext>
+            </a:extLst>
+          </p:cNvPr>
+          <p:cNvSpPr>
+            <a:spLocks noGrp="1" noRot="1" noChangeAspect="1" noMove="1" noResize="1" noEditPoints="1" noAdjustHandles="1" noChangeArrowheads="1" noChangeShapeType="1" noTextEdit="1"/>
+          </p:cNvSpPr>
+          <p:nvPr>
+            <p:extLst>
+              <p:ext uri="{386F3935-93C4-4BCD-93E2-E3B085C9AB24}">
+                <p16:designElem xmlns:p16="http://schemas.microsoft.com/office/powerpoint/2015/main" val="1"/>
+              </p:ext>
+            </p:extLst>
+          </p:nvPr>
+        </p:nvSpPr>
+        <p:spPr>
+          <a:xfrm>
+            <a:off x="0" y="0"/>
+            <a:ext cx="12192000" cy="6858000"/>
+          </a:xfrm>
+          <a:prstGeom prst="rect">
+            <a:avLst/>
+          </a:prstGeom>
+          <a:solidFill>
+            <a:schemeClr val="bg2">
+              <a:lumMod val="90000"/>
+              <a:lumOff val="10000"/>
+            </a:schemeClr>
+          </a:solidFill>
+          <a:ln w="12700" cap="flat" cmpd="sng" algn="ctr">
+            <a:noFill/>
+            <a:prstDash val="solid"/>
+            <a:miter lim="800000"/>
+          </a:ln>
+          <a:effectLst/>
+        </p:spPr>
+        <p:style>
+          <a:lnRef idx="2">
+            <a:schemeClr val="accent1">
+              <a:shade val="50000"/>
+            </a:schemeClr>
+          </a:lnRef>
+          <a:fillRef idx="1">
+            <a:schemeClr val="accent1"/>
+          </a:fillRef>
+          <a:effectRef idx="0">
+            <a:schemeClr val="accent1"/>
+          </a:effectRef>
+          <a:fontRef idx="minor">
+            <a:schemeClr val="lt1"/>
+          </a:fontRef>
+        </p:style>
+        <p:txBody>
+          <a:bodyPr rtlCol="0" anchor="ctr"/>
+          <a:lstStyle/>
+          <a:p>
+            <a:pPr algn="ctr"/>
+            <a:endParaRPr lang="nl-NL" noProof="0" dirty="0"/>
+          </a:p>
+        </p:txBody>
+      </p:sp>
+      <p:sp>
+        <p:nvSpPr>
+          <p:cNvPr id="2" name="Title 1">
+            <a:extLst>
+              <a:ext uri="{FF2B5EF4-FFF2-40B4-BE49-F238E27FC236}">
+                <a16:creationId xmlns:a16="http://schemas.microsoft.com/office/drawing/2014/main" id="{897817D6-DCD6-6DF6-254D-78AF6B8D7E3D}"/>
+              </a:ext>
+            </a:extLst>
+          </p:cNvPr>
+          <p:cNvSpPr>
+            <a:spLocks noGrp="1"/>
+          </p:cNvSpPr>
+          <p:nvPr>
+            <p:ph type="title"/>
+          </p:nvPr>
+        </p:nvSpPr>
+        <p:spPr>
+          <a:xfrm>
+            <a:off x="720000" y="619200"/>
+            <a:ext cx="4991961" cy="1476000"/>
+          </a:xfrm>
+        </p:spPr>
+        <p:txBody>
+          <a:bodyPr wrap="square" anchor="ctr">
+            <a:normAutofit/>
+          </a:bodyPr>
+          <a:lstStyle/>
+          <a:p>
+            <a:r>
+              <a:rPr lang="nl-NL" noProof="0" dirty="0"/>
+              <a:t>Code</a:t>
+            </a:r>
+          </a:p>
+        </p:txBody>
+      </p:sp>
+      <p:sp>
+        <p:nvSpPr>
+          <p:cNvPr id="11" name="Content Placeholder 10">
+            <a:extLst>
+              <a:ext uri="{FF2B5EF4-FFF2-40B4-BE49-F238E27FC236}">
+                <a16:creationId xmlns:a16="http://schemas.microsoft.com/office/drawing/2014/main" id="{2156A64D-334B-6778-78A5-99447FFE7AD1}"/>
+              </a:ext>
+            </a:extLst>
+          </p:cNvPr>
+          <p:cNvSpPr>
+            <a:spLocks noGrp="1"/>
+          </p:cNvSpPr>
+          <p:nvPr>
+            <p:ph idx="1"/>
+          </p:nvPr>
+        </p:nvSpPr>
+        <p:spPr>
+          <a:xfrm>
+            <a:off x="720000" y="2552700"/>
+            <a:ext cx="4991962" cy="532245"/>
+          </a:xfrm>
+        </p:spPr>
+        <p:txBody>
+          <a:bodyPr>
+            <a:normAutofit/>
+          </a:bodyPr>
+          <a:lstStyle/>
+          <a:p>
+            <a:r>
+              <a:rPr lang="nl-NL" noProof="0" dirty="0"/>
+              <a:t>Je maakt connectie met de database</a:t>
+            </a:r>
+          </a:p>
+        </p:txBody>
+      </p:sp>
+      <p:sp useBgFill="1">
+        <p:nvSpPr>
+          <p:cNvPr id="18" name="Freeform: Shape 17">
+            <a:extLst>
+              <a:ext uri="{FF2B5EF4-FFF2-40B4-BE49-F238E27FC236}">
+                <a16:creationId xmlns:a16="http://schemas.microsoft.com/office/drawing/2014/main" id="{D7E55FD5-B961-45FE-A940-4A462DE8CB4F}"/>
+              </a:ext>
+              <a:ext uri="{C183D7F6-B498-43B3-948B-1728B52AA6E4}">
+                <adec:decorative xmlns:adec="http://schemas.microsoft.com/office/drawing/2017/decorative" val="1"/>
+              </a:ext>
+            </a:extLst>
+          </p:cNvPr>
+          <p:cNvSpPr>
+            <a:spLocks noGrp="1" noRot="1" noChangeAspect="1" noMove="1" noResize="1" noEditPoints="1" noAdjustHandles="1" noChangeArrowheads="1" noChangeShapeType="1" noTextEdit="1"/>
+          </p:cNvSpPr>
+          <p:nvPr>
+            <p:extLst>
+              <p:ext uri="{386F3935-93C4-4BCD-93E2-E3B085C9AB24}">
+                <p16:designElem xmlns:p16="http://schemas.microsoft.com/office/powerpoint/2015/main" val="1"/>
+              </p:ext>
+            </p:extLst>
+          </p:nvPr>
+        </p:nvSpPr>
+        <p:spPr bwMode="auto">
+          <a:xfrm rot="5400000" flipV="1">
+            <a:off x="5867335" y="533334"/>
+            <a:ext cx="6858000" cy="5791331"/>
+          </a:xfrm>
+          <a:custGeom>
+            <a:avLst/>
+            <a:gdLst>
+              <a:gd name="connsiteX0" fmla="*/ 6858000 w 6858000"/>
+              <a:gd name="connsiteY0" fmla="*/ 14535 h 5791331"/>
+              <a:gd name="connsiteX1" fmla="*/ 6858000 w 6858000"/>
+              <a:gd name="connsiteY1" fmla="*/ 5791331 h 5791331"/>
+              <a:gd name="connsiteX2" fmla="*/ 0 w 6858000"/>
+              <a:gd name="connsiteY2" fmla="*/ 5791330 h 5791331"/>
+              <a:gd name="connsiteX3" fmla="*/ 0 w 6858000"/>
+              <a:gd name="connsiteY3" fmla="*/ 0 h 5791331"/>
+              <a:gd name="connsiteX4" fmla="*/ 145832 w 6858000"/>
+              <a:gd name="connsiteY4" fmla="*/ 1175 h 5791331"/>
+              <a:gd name="connsiteX5" fmla="*/ 2611132 w 6858000"/>
+              <a:gd name="connsiteY5" fmla="*/ 48625 h 5791331"/>
+              <a:gd name="connsiteX6" fmla="*/ 6643031 w 6858000"/>
+              <a:gd name="connsiteY6" fmla="*/ 15010 h 5791331"/>
+              <a:gd name="connsiteX0" fmla="*/ 6858000 w 6858000"/>
+              <a:gd name="connsiteY0" fmla="*/ 14535 h 5791331"/>
+              <a:gd name="connsiteX1" fmla="*/ 6858000 w 6858000"/>
+              <a:gd name="connsiteY1" fmla="*/ 5791331 h 5791331"/>
+              <a:gd name="connsiteX2" fmla="*/ 0 w 6858000"/>
+              <a:gd name="connsiteY2" fmla="*/ 5791330 h 5791331"/>
+              <a:gd name="connsiteX3" fmla="*/ 0 w 6858000"/>
+              <a:gd name="connsiteY3" fmla="*/ 0 h 5791331"/>
+              <a:gd name="connsiteX4" fmla="*/ 145832 w 6858000"/>
+              <a:gd name="connsiteY4" fmla="*/ 1175 h 5791331"/>
+              <a:gd name="connsiteX5" fmla="*/ 2611132 w 6858000"/>
+              <a:gd name="connsiteY5" fmla="*/ 48625 h 5791331"/>
+              <a:gd name="connsiteX6" fmla="*/ 6643031 w 6858000"/>
+              <a:gd name="connsiteY6" fmla="*/ 15010 h 5791331"/>
+              <a:gd name="connsiteX7" fmla="*/ 6858000 w 6858000"/>
+              <a:gd name="connsiteY7" fmla="*/ 14535 h 5791331"/>
+              <a:gd name="connsiteX0" fmla="*/ 6858000 w 6858000"/>
+              <a:gd name="connsiteY0" fmla="*/ 14535 h 5791331"/>
+              <a:gd name="connsiteX1" fmla="*/ 6858000 w 6858000"/>
+              <a:gd name="connsiteY1" fmla="*/ 5791331 h 5791331"/>
+              <a:gd name="connsiteX2" fmla="*/ 0 w 6858000"/>
+              <a:gd name="connsiteY2" fmla="*/ 5791330 h 5791331"/>
+              <a:gd name="connsiteX3" fmla="*/ 0 w 6858000"/>
+              <a:gd name="connsiteY3" fmla="*/ 0 h 5791331"/>
+              <a:gd name="connsiteX4" fmla="*/ 145832 w 6858000"/>
+              <a:gd name="connsiteY4" fmla="*/ 1175 h 5791331"/>
+              <a:gd name="connsiteX5" fmla="*/ 2611132 w 6858000"/>
+              <a:gd name="connsiteY5" fmla="*/ 48625 h 5791331"/>
+              <a:gd name="connsiteX6" fmla="*/ 6643031 w 6858000"/>
+              <a:gd name="connsiteY6" fmla="*/ 15010 h 5791331"/>
+              <a:gd name="connsiteX7" fmla="*/ 6858000 w 6858000"/>
+              <a:gd name="connsiteY7" fmla="*/ 14535 h 5791331"/>
+              <a:gd name="connsiteX0" fmla="*/ 6858000 w 6858000"/>
+              <a:gd name="connsiteY0" fmla="*/ 14535 h 5791331"/>
+              <a:gd name="connsiteX1" fmla="*/ 6858000 w 6858000"/>
+              <a:gd name="connsiteY1" fmla="*/ 5791331 h 5791331"/>
+              <a:gd name="connsiteX2" fmla="*/ 0 w 6858000"/>
+              <a:gd name="connsiteY2" fmla="*/ 5791330 h 5791331"/>
+              <a:gd name="connsiteX3" fmla="*/ 0 w 6858000"/>
+              <a:gd name="connsiteY3" fmla="*/ 0 h 5791331"/>
+              <a:gd name="connsiteX4" fmla="*/ 145832 w 6858000"/>
+              <a:gd name="connsiteY4" fmla="*/ 1175 h 5791331"/>
+              <a:gd name="connsiteX5" fmla="*/ 2233764 w 6858000"/>
+              <a:gd name="connsiteY5" fmla="*/ 19600 h 5791331"/>
+              <a:gd name="connsiteX6" fmla="*/ 6643031 w 6858000"/>
+              <a:gd name="connsiteY6" fmla="*/ 15010 h 5791331"/>
+              <a:gd name="connsiteX7" fmla="*/ 6858000 w 6858000"/>
+              <a:gd name="connsiteY7" fmla="*/ 14535 h 5791331"/>
+            </a:gdLst>
+            <a:ahLst/>
+            <a:cxnLst>
+              <a:cxn ang="0">
+                <a:pos x="connsiteX0" y="connsiteY0"/>
+              </a:cxn>
+              <a:cxn ang="0">
+                <a:pos x="connsiteX1" y="connsiteY1"/>
+              </a:cxn>
+              <a:cxn ang="0">
+                <a:pos x="connsiteX2" y="connsiteY2"/>
+              </a:cxn>
+              <a:cxn ang="0">
+                <a:pos x="connsiteX3" y="connsiteY3"/>
+              </a:cxn>
+              <a:cxn ang="0">
+                <a:pos x="connsiteX4" y="connsiteY4"/>
+              </a:cxn>
+              <a:cxn ang="0">
+                <a:pos x="connsiteX5" y="connsiteY5"/>
+              </a:cxn>
+              <a:cxn ang="0">
+                <a:pos x="connsiteX6" y="connsiteY6"/>
+              </a:cxn>
+              <a:cxn ang="0">
+                <a:pos x="connsiteX7" y="connsiteY7"/>
+              </a:cxn>
+            </a:cxnLst>
+            <a:rect l="l" t="t" r="r" b="b"/>
+            <a:pathLst>
+              <a:path w="6858000" h="5791331">
+                <a:moveTo>
+                  <a:pt x="6858000" y="14535"/>
+                </a:moveTo>
+                <a:lnTo>
+                  <a:pt x="6858000" y="5791331"/>
+                </a:lnTo>
+                <a:lnTo>
+                  <a:pt x="0" y="5791330"/>
+                </a:lnTo>
+                <a:lnTo>
+                  <a:pt x="0" y="0"/>
+                </a:lnTo>
+                <a:lnTo>
+                  <a:pt x="145832" y="1175"/>
+                </a:lnTo>
+                <a:lnTo>
+                  <a:pt x="2233764" y="19600"/>
+                </a:lnTo>
+                <a:cubicBezTo>
+                  <a:pt x="2933352" y="33230"/>
+                  <a:pt x="5032814" y="16325"/>
+                  <a:pt x="6643031" y="15010"/>
+                </a:cubicBezTo>
+                <a:lnTo>
+                  <a:pt x="6858000" y="14535"/>
+                </a:lnTo>
+                <a:close/>
+              </a:path>
+            </a:pathLst>
+          </a:custGeom>
+          <a:ln w="12700" cap="flat" cmpd="sng" algn="ctr">
+            <a:noFill/>
+            <a:prstDash val="solid"/>
+            <a:miter lim="800000"/>
+          </a:ln>
+          <a:effectLst/>
+        </p:spPr>
+        <p:style>
+          <a:lnRef idx="2">
+            <a:schemeClr val="accent1">
+              <a:shade val="50000"/>
+            </a:schemeClr>
+          </a:lnRef>
+          <a:fillRef idx="1">
+            <a:schemeClr val="accent1"/>
+          </a:fillRef>
+          <a:effectRef idx="0">
+            <a:schemeClr val="accent1"/>
+          </a:effectRef>
+          <a:fontRef idx="minor">
+            <a:schemeClr val="lt1"/>
+          </a:fontRef>
+        </p:style>
+        <p:txBody>
+          <a:bodyPr wrap="square" rtlCol="0" anchor="ctr">
+            <a:noAutofit/>
+          </a:bodyPr>
+          <a:lstStyle/>
+          <a:p>
+            <a:pPr algn="ctr"/>
+            <a:endParaRPr lang="nl-NL" noProof="0" dirty="0">
+              <a:solidFill>
+                <a:schemeClr val="lt1"/>
+              </a:solidFill>
+            </a:endParaRPr>
+          </a:p>
+        </p:txBody>
+      </p:sp>
+      <p:pic>
+        <p:nvPicPr>
+          <p:cNvPr id="5" name="Content Placeholder 4">
+            <a:extLst>
+              <a:ext uri="{FF2B5EF4-FFF2-40B4-BE49-F238E27FC236}">
+                <a16:creationId xmlns:a16="http://schemas.microsoft.com/office/drawing/2014/main" id="{62F2200A-D895-1874-A844-11D1127A1B3C}"/>
+              </a:ext>
+            </a:extLst>
+          </p:cNvPr>
+          <p:cNvPicPr>
+            <a:picLocks noChangeAspect="1"/>
+          </p:cNvPicPr>
+          <p:nvPr/>
+        </p:nvPicPr>
+        <p:blipFill>
+          <a:blip r:embed="rId2">
+            <a:extLst>
+              <a:ext uri="{28A0092B-C50C-407E-A947-70E740481C1C}">
+                <a14:useLocalDpi xmlns:a14="http://schemas.microsoft.com/office/drawing/2010/main" val="0"/>
+              </a:ext>
+            </a:extLst>
+          </a:blip>
+          <a:srcRect l="12491" t="87093" r="72664"/>
+          <a:stretch>
+            <a:fillRect/>
+          </a:stretch>
+        </p:blipFill>
+        <p:spPr>
+          <a:xfrm>
+            <a:off x="7946838" y="4621645"/>
+            <a:ext cx="2698994" cy="645340"/>
+          </a:xfrm>
+          <a:custGeom>
+            <a:avLst/>
+            <a:gdLst/>
+            <a:ahLst/>
+            <a:cxnLst/>
+            <a:rect l="l" t="t" r="r" b="b"/>
+            <a:pathLst>
+              <a:path w="4295839" h="2524669">
+                <a:moveTo>
+                  <a:pt x="0" y="0"/>
+                </a:moveTo>
+                <a:lnTo>
+                  <a:pt x="4295839" y="0"/>
+                </a:lnTo>
+                <a:lnTo>
+                  <a:pt x="4295839" y="2524669"/>
+                </a:lnTo>
+                <a:lnTo>
+                  <a:pt x="0" y="2524669"/>
+                </a:lnTo>
+                <a:close/>
+              </a:path>
+            </a:pathLst>
+          </a:custGeom>
+        </p:spPr>
+      </p:pic>
+      <p:pic>
+        <p:nvPicPr>
+          <p:cNvPr id="7" name="Picture 6">
+            <a:extLst>
+              <a:ext uri="{FF2B5EF4-FFF2-40B4-BE49-F238E27FC236}">
+                <a16:creationId xmlns:a16="http://schemas.microsoft.com/office/drawing/2014/main" id="{8EDBAD16-2E72-BB2E-5631-11865AD2D702}"/>
+              </a:ext>
+            </a:extLst>
+          </p:cNvPr>
+          <p:cNvPicPr>
+            <a:picLocks noChangeAspect="1"/>
+          </p:cNvPicPr>
+          <p:nvPr/>
+        </p:nvPicPr>
+        <p:blipFill>
+          <a:blip r:embed="rId3">
+            <a:extLst>
+              <a:ext uri="{28A0092B-C50C-407E-A947-70E740481C1C}">
+                <a14:useLocalDpi xmlns:a14="http://schemas.microsoft.com/office/drawing/2010/main" val="0"/>
+              </a:ext>
+            </a:extLst>
+          </a:blip>
+          <a:stretch>
+            <a:fillRect/>
+          </a:stretch>
+        </p:blipFill>
+        <p:spPr>
+          <a:xfrm>
+            <a:off x="6937215" y="1489495"/>
+            <a:ext cx="4486707" cy="1211410"/>
+          </a:xfrm>
+          <a:custGeom>
+            <a:avLst/>
+            <a:gdLst/>
+            <a:ahLst/>
+            <a:cxnLst/>
+            <a:rect l="l" t="t" r="r" b="b"/>
+            <a:pathLst>
+              <a:path w="4295839" h="2524669">
+                <a:moveTo>
+                  <a:pt x="0" y="0"/>
+                </a:moveTo>
+                <a:lnTo>
+                  <a:pt x="4295839" y="0"/>
+                </a:lnTo>
+                <a:lnTo>
+                  <a:pt x="4295839" y="2524669"/>
+                </a:lnTo>
+                <a:lnTo>
+                  <a:pt x="0" y="2524669"/>
+                </a:lnTo>
+                <a:close/>
+              </a:path>
+            </a:pathLst>
+          </a:custGeom>
+        </p:spPr>
+      </p:pic>
+      <p:sp>
+        <p:nvSpPr>
+          <p:cNvPr id="8" name="Content Placeholder 10">
+            <a:extLst>
+              <a:ext uri="{FF2B5EF4-FFF2-40B4-BE49-F238E27FC236}">
+                <a16:creationId xmlns:a16="http://schemas.microsoft.com/office/drawing/2014/main" id="{9823DB87-6FD9-C7A6-63C4-A1C7072F4AFA}"/>
+              </a:ext>
+            </a:extLst>
+          </p:cNvPr>
+          <p:cNvSpPr txBox="1">
+            <a:spLocks/>
+          </p:cNvSpPr>
+          <p:nvPr/>
+        </p:nvSpPr>
+        <p:spPr>
+          <a:xfrm>
+            <a:off x="799370" y="4806231"/>
+            <a:ext cx="4991962" cy="330483"/>
+          </a:xfrm>
+          <a:prstGeom prst="rect">
+            <a:avLst/>
+          </a:prstGeom>
+        </p:spPr>
+        <p:txBody>
+          <a:bodyPr vert="horz" lIns="0" tIns="0" rIns="0" bIns="0" rtlCol="0">
+            <a:normAutofit fontScale="85000" lnSpcReduction="10000"/>
+          </a:bodyPr>
+          <a:lstStyle>
+            <a:lvl1pPr marL="228600" indent="-228600" algn="l" defTabSz="914400" rtl="0" eaLnBrk="1" latinLnBrk="0" hangingPunct="1">
+              <a:lnSpc>
+                <a:spcPct val="120000"/>
+              </a:lnSpc>
+              <a:spcBef>
+                <a:spcPts val="1000"/>
+              </a:spcBef>
+              <a:buClr>
+                <a:schemeClr val="accent4"/>
+              </a:buClr>
+              <a:buFont typeface="The Hand Extrablack" panose="03070A02030502020204" pitchFamily="66" charset="0"/>
+              <a:buChar char="•"/>
+              <a:defRPr sz="2000" kern="1200" spc="20" baseline="0">
+                <a:solidFill>
+                  <a:schemeClr val="tx1">
+                    <a:alpha val="58000"/>
+                  </a:schemeClr>
+                </a:solidFill>
+                <a:latin typeface="+mn-lt"/>
+                <a:ea typeface="+mn-ea"/>
+                <a:cs typeface="+mn-cs"/>
+              </a:defRPr>
+            </a:lvl1pPr>
+            <a:lvl2pPr marL="685800" indent="-228600" algn="l" defTabSz="914400" rtl="0" eaLnBrk="1" latinLnBrk="0" hangingPunct="1">
+              <a:lnSpc>
+                <a:spcPct val="120000"/>
+              </a:lnSpc>
+              <a:spcBef>
+                <a:spcPts val="500"/>
+              </a:spcBef>
+              <a:buClr>
+                <a:schemeClr val="accent4"/>
+              </a:buClr>
+              <a:buFont typeface="The Hand Extrablack" panose="03070A02030502020204" pitchFamily="66" charset="0"/>
+              <a:buChar char="•"/>
+              <a:defRPr sz="2000" kern="1200" spc="20" baseline="0">
+                <a:solidFill>
+                  <a:schemeClr val="tx1">
+                    <a:alpha val="58000"/>
+                  </a:schemeClr>
+                </a:solidFill>
+                <a:latin typeface="+mn-lt"/>
+                <a:ea typeface="+mn-ea"/>
+                <a:cs typeface="+mn-cs"/>
+              </a:defRPr>
+            </a:lvl2pPr>
+            <a:lvl3pPr marL="1143000" indent="-228600" algn="l" defTabSz="914400" rtl="0" eaLnBrk="1" latinLnBrk="0" hangingPunct="1">
+              <a:lnSpc>
+                <a:spcPct val="120000"/>
+              </a:lnSpc>
+              <a:spcBef>
+                <a:spcPts val="500"/>
+              </a:spcBef>
+              <a:buClr>
+                <a:schemeClr val="accent4"/>
+              </a:buClr>
+              <a:buFont typeface="The Hand Extrablack" panose="03070A02030502020204" pitchFamily="66" charset="0"/>
+              <a:buChar char="•"/>
+              <a:defRPr sz="2000" kern="1200" spc="20" baseline="0">
+                <a:solidFill>
+                  <a:schemeClr val="tx1">
+                    <a:alpha val="58000"/>
+                  </a:schemeClr>
+                </a:solidFill>
+                <a:latin typeface="+mn-lt"/>
+                <a:ea typeface="+mn-ea"/>
+                <a:cs typeface="+mn-cs"/>
+              </a:defRPr>
+            </a:lvl3pPr>
+            <a:lvl4pPr marL="1600200" indent="-228600" algn="l" defTabSz="914400" rtl="0" eaLnBrk="1" latinLnBrk="0" hangingPunct="1">
+              <a:lnSpc>
+                <a:spcPct val="120000"/>
+              </a:lnSpc>
+              <a:spcBef>
+                <a:spcPts val="500"/>
+              </a:spcBef>
+              <a:buClr>
+                <a:schemeClr val="accent4"/>
+              </a:buClr>
+              <a:buFont typeface="The Hand Extrablack" panose="03070A02030502020204" pitchFamily="66" charset="0"/>
+              <a:buChar char="•"/>
+              <a:defRPr sz="2000" kern="1200" spc="20" baseline="0">
+                <a:solidFill>
+                  <a:schemeClr val="tx1">
+                    <a:alpha val="58000"/>
+                  </a:schemeClr>
+                </a:solidFill>
+                <a:latin typeface="+mn-lt"/>
+                <a:ea typeface="+mn-ea"/>
+                <a:cs typeface="+mn-cs"/>
+              </a:defRPr>
+            </a:lvl4pPr>
+            <a:lvl5pPr marL="2057400" indent="-228600" algn="l" defTabSz="914400" rtl="0" eaLnBrk="1" latinLnBrk="0" hangingPunct="1">
+              <a:lnSpc>
+                <a:spcPct val="120000"/>
+              </a:lnSpc>
+              <a:spcBef>
+                <a:spcPts val="500"/>
+              </a:spcBef>
+              <a:buClr>
+                <a:schemeClr val="accent4"/>
+              </a:buClr>
+              <a:buFont typeface="The Hand Extrablack" panose="03070A02030502020204" pitchFamily="66" charset="0"/>
+              <a:buChar char="•"/>
+              <a:defRPr sz="2000" kern="1200" spc="20" baseline="0">
+                <a:solidFill>
+                  <a:schemeClr val="tx1">
+                    <a:alpha val="58000"/>
+                  </a:schemeClr>
+                </a:solidFill>
+                <a:latin typeface="+mn-lt"/>
+                <a:ea typeface="+mn-ea"/>
+                <a:cs typeface="+mn-cs"/>
+              </a:defRPr>
+            </a:lvl5pPr>
+            <a:lvl6pPr marL="2514600" indent="-228600" algn="l" defTabSz="914400" rtl="0" eaLnBrk="1" latinLnBrk="0" hangingPunct="1">
+              <a:lnSpc>
+                <a:spcPct val="90000"/>
+              </a:lnSpc>
+              <a:spcBef>
+                <a:spcPts val="500"/>
+              </a:spcBef>
+              <a:buFont typeface="Arial" panose="020B0604020202020204" pitchFamily="34" charset="0"/>
+              <a:buChar char="•"/>
+              <a:defRPr sz="1800" kern="1200">
+                <a:solidFill>
+                  <a:schemeClr val="tx1"/>
+                </a:solidFill>
+                <a:latin typeface="+mn-lt"/>
+                <a:ea typeface="+mn-ea"/>
+                <a:cs typeface="+mn-cs"/>
+              </a:defRPr>
+            </a:lvl6pPr>
+            <a:lvl7pPr marL="2971800" indent="-228600" algn="l" defTabSz="914400" rtl="0" eaLnBrk="1" latinLnBrk="0" hangingPunct="1">
+              <a:lnSpc>
+                <a:spcPct val="90000"/>
+              </a:lnSpc>
+              <a:spcBef>
+                <a:spcPts val="500"/>
+              </a:spcBef>
+              <a:buFont typeface="Arial" panose="020B0604020202020204" pitchFamily="34" charset="0"/>
+              <a:buChar char="•"/>
+              <a:defRPr sz="1800" kern="1200">
+                <a:solidFill>
+                  <a:schemeClr val="tx1"/>
+                </a:solidFill>
+                <a:latin typeface="+mn-lt"/>
+                <a:ea typeface="+mn-ea"/>
+                <a:cs typeface="+mn-cs"/>
+              </a:defRPr>
+            </a:lvl7pPr>
+            <a:lvl8pPr marL="3429000" indent="-228600" algn="l" defTabSz="914400" rtl="0" eaLnBrk="1" latinLnBrk="0" hangingPunct="1">
+              <a:lnSpc>
+                <a:spcPct val="90000"/>
+              </a:lnSpc>
+              <a:spcBef>
+                <a:spcPts val="500"/>
+              </a:spcBef>
+              <a:buFont typeface="Arial" panose="020B0604020202020204" pitchFamily="34" charset="0"/>
+              <a:buChar char="•"/>
+              <a:defRPr sz="1800" kern="1200">
+                <a:solidFill>
+                  <a:schemeClr val="tx1"/>
+                </a:solidFill>
+                <a:latin typeface="+mn-lt"/>
+                <a:ea typeface="+mn-ea"/>
+                <a:cs typeface="+mn-cs"/>
+              </a:defRPr>
+            </a:lvl8pPr>
+            <a:lvl9pPr marL="3886200" indent="-228600" algn="l" defTabSz="914400" rtl="0" eaLnBrk="1" latinLnBrk="0" hangingPunct="1">
+              <a:lnSpc>
+                <a:spcPct val="90000"/>
+              </a:lnSpc>
+              <a:spcBef>
+                <a:spcPts val="500"/>
+              </a:spcBef>
+              <a:buFont typeface="Arial" panose="020B0604020202020204" pitchFamily="34" charset="0"/>
+              <a:buChar char="•"/>
+              <a:defRPr sz="1800" kern="1200">
+                <a:solidFill>
+                  <a:schemeClr val="tx1"/>
+                </a:solidFill>
+                <a:latin typeface="+mn-lt"/>
+                <a:ea typeface="+mn-ea"/>
+                <a:cs typeface="+mn-cs"/>
+              </a:defRPr>
+            </a:lvl9pPr>
+          </a:lstStyle>
+          <a:p>
+            <a:r>
+              <a:rPr lang="nl-NL" noProof="0" dirty="0"/>
+              <a:t>Je gebruikt de variabele + de data die je wilt</a:t>
+            </a:r>
+          </a:p>
+        </p:txBody>
+      </p:sp>
+    </p:spTree>
+    <p:extLst>
+      <p:ext uri="{BB962C8B-B14F-4D97-AF65-F5344CB8AC3E}">
+        <p14:creationId xmlns:p14="http://schemas.microsoft.com/office/powerpoint/2010/main" val="4040640743"/>
+      </p:ext>
+    </p:extLst>
+  </p:cSld>
+  <p:clrMapOvr>
+    <a:masterClrMapping/>
+  </p:clrMapOvr>
+  <p:timing>
+    <p:tnLst>
+      <p:par>
+        <p:cTn id="1" dur="indefinite" restart="never" nodeType="tmRoot">
+          <p:childTnLst>
+            <p:seq concurrent="1" nextAc="seek">
+              <p:cTn id="2" dur="indefinite" nodeType="mainSeq">
+                <p:childTnLst>
+                  <p:par>
+                    <p:cTn id="3" fill="hold">
+                      <p:stCondLst>
+                        <p:cond delay="indefinite"/>
+                      </p:stCondLst>
+                      <p:childTnLst>
+                        <p:par>
+                          <p:cTn id="4" fill="hold">
+                            <p:stCondLst>
+                              <p:cond delay="0"/>
+                            </p:stCondLst>
+                            <p:childTnLst>
+                              <p:par>
+                                <p:cTn id="5" presetID="1" presetClass="entr" presetSubtype="0" fill="hold" grpId="0" nodeType="clickEffect">
+                                  <p:stCondLst>
+                                    <p:cond delay="0"/>
+                                  </p:stCondLst>
+                                  <p:childTnLst>
+                                    <p:set>
+                                      <p:cBhvr>
+                                        <p:cTn id="6" dur="1" fill="hold">
+                                          <p:stCondLst>
+                                            <p:cond delay="0"/>
+                                          </p:stCondLst>
+                                        </p:cTn>
+                                        <p:tgtEl>
+                                          <p:spTgt spid="11">
+                                            <p:txEl>
+                                              <p:pRg st="0" end="0"/>
+                                            </p:txEl>
+                                          </p:spTgt>
+                                        </p:tgtEl>
+                                        <p:attrNameLst>
+                                          <p:attrName>style.visibility</p:attrName>
+                                        </p:attrNameLst>
+                                      </p:cBhvr>
+                                      <p:to>
+                                        <p:strVal val="visible"/>
+                                      </p:to>
+                                    </p:set>
+                                  </p:childTnLst>
+                                </p:cTn>
+                              </p:par>
+                              <p:par>
+                                <p:cTn id="7" presetID="1" presetClass="entr" presetSubtype="0" fill="hold" nodeType="withEffect">
+                                  <p:stCondLst>
+                                    <p:cond delay="0"/>
+                                  </p:stCondLst>
+                                  <p:childTnLst>
+                                    <p:set>
+                                      <p:cBhvr>
+                                        <p:cTn id="8" dur="1" fill="hold">
+                                          <p:stCondLst>
+                                            <p:cond delay="0"/>
+                                          </p:stCondLst>
+                                        </p:cTn>
+                                        <p:tgtEl>
+                                          <p:spTgt spid="7"/>
+                                        </p:tgtEl>
+                                        <p:attrNameLst>
+                                          <p:attrName>style.visibility</p:attrName>
+                                        </p:attrNameLst>
+                                      </p:cBhvr>
+                                      <p:to>
+                                        <p:strVal val="visible"/>
+                                      </p:to>
+                                    </p:set>
+                                  </p:childTnLst>
+                                </p:cTn>
+                              </p:par>
+                            </p:childTnLst>
+                          </p:cTn>
+                        </p:par>
+                      </p:childTnLst>
+                    </p:cTn>
+                  </p:par>
+                  <p:par>
+                    <p:cTn id="9" fill="hold">
+                      <p:stCondLst>
+                        <p:cond delay="indefinite"/>
+                      </p:stCondLst>
+                      <p:childTnLst>
+                        <p:par>
+                          <p:cTn id="10" fill="hold">
+                            <p:stCondLst>
+                              <p:cond delay="0"/>
+                            </p:stCondLst>
+                            <p:childTnLst>
+                              <p:par>
+                                <p:cTn id="11" presetID="1" presetClass="entr" presetSubtype="0" fill="hold" grpId="0" nodeType="clickEffect">
+                                  <p:stCondLst>
+                                    <p:cond delay="0"/>
+                                  </p:stCondLst>
+                                  <p:childTnLst>
+                                    <p:set>
+                                      <p:cBhvr>
+                                        <p:cTn id="12" dur="1" fill="hold">
+                                          <p:stCondLst>
+                                            <p:cond delay="0"/>
+                                          </p:stCondLst>
+                                        </p:cTn>
+                                        <p:tgtEl>
+                                          <p:spTgt spid="8"/>
+                                        </p:tgtEl>
+                                        <p:attrNameLst>
+                                          <p:attrName>style.visibility</p:attrName>
+                                        </p:attrNameLst>
+                                      </p:cBhvr>
+                                      <p:to>
+                                        <p:strVal val="visible"/>
+                                      </p:to>
+                                    </p:set>
+                                  </p:childTnLst>
+                                </p:cTn>
+                              </p:par>
+                              <p:par>
+                                <p:cTn id="13" presetID="1" presetClass="entr" presetSubtype="0" fill="hold" nodeType="withEffect">
+                                  <p:stCondLst>
+                                    <p:cond delay="0"/>
+                                  </p:stCondLst>
+                                  <p:childTnLst>
+                                    <p:set>
+                                      <p:cBhvr>
+                                        <p:cTn id="14" dur="1" fill="hold">
+                                          <p:stCondLst>
+                                            <p:cond delay="0"/>
+                                          </p:stCondLst>
+                                        </p:cTn>
+                                        <p:tgtEl>
+                                          <p:spTgt spid="5"/>
+                                        </p:tgtEl>
+                                        <p:attrNameLst>
+                                          <p:attrName>style.visibility</p:attrName>
+                                        </p:attrNameLst>
+                                      </p:cBhvr>
+                                      <p:to>
+                                        <p:strVal val="visible"/>
+                                      </p:to>
+                                    </p:set>
+                                  </p:childTnLst>
+                                </p:cTn>
+                              </p:par>
+                            </p:childTnLst>
+                          </p:cTn>
+                        </p:par>
+                      </p:childTnLst>
+                    </p:cTn>
+                  </p:par>
+                </p:childTnLst>
+              </p:cTn>
+              <p:prevCondLst>
+                <p:cond evt="onPrev" delay="0">
+                  <p:tgtEl>
+                    <p:sldTgt/>
+                  </p:tgtEl>
+                </p:cond>
+              </p:prevCondLst>
+              <p:nextCondLst>
+                <p:cond evt="onNext" delay="0">
+                  <p:tgtEl>
+                    <p:sldTgt/>
+                  </p:tgtEl>
+                </p:cond>
+              </p:nextCondLst>
+            </p:seq>
+          </p:childTnLst>
+        </p:cTn>
+      </p:par>
+    </p:tnLst>
+    <p:bldLst>
+      <p:bldP spid="11" grpId="0" build="p"/>
+      <p:bldP spid="8" grpId="0"/>
+    </p:bldLst>
+  </p:timing>
+</p:sld>
+</file>
+
+<file path=ppt/slides/slide24.xml><?xml version="1.0" encoding="utf-8"?>
+<p:sld xmlns:a="http://schemas.openxmlformats.org/drawingml/2006/main" xmlns:r="http://schemas.openxmlformats.org/officeDocument/2006/relationships" xmlns:p="http://schemas.openxmlformats.org/presentationml/2006/main">
+  <p:cSld>
+    <p:spTree>
+      <p:nvGrpSpPr>
+        <p:cNvPr id="1" name=""/>
+        <p:cNvGrpSpPr/>
+        <p:nvPr/>
+      </p:nvGrpSpPr>
+      <p:grpSpPr>
+        <a:xfrm>
+          <a:off x="0" y="0"/>
+          <a:ext cx="0" cy="0"/>
+          <a:chOff x="0" y="0"/>
+          <a:chExt cx="0" cy="0"/>
+        </a:xfrm>
+      </p:grpSpPr>
+      <p:sp>
+        <p:nvSpPr>
+          <p:cNvPr id="2" name="Title 1">
+            <a:extLst>
+              <a:ext uri="{FF2B5EF4-FFF2-40B4-BE49-F238E27FC236}">
+                <a16:creationId xmlns:a16="http://schemas.microsoft.com/office/drawing/2014/main" id="{C758D83A-CB83-C07E-6E34-AB893AE7BC1E}"/>
+              </a:ext>
+            </a:extLst>
+          </p:cNvPr>
+          <p:cNvSpPr>
+            <a:spLocks noGrp="1"/>
+          </p:cNvSpPr>
+          <p:nvPr>
+            <p:ph type="title"/>
+          </p:nvPr>
+        </p:nvSpPr>
+        <p:spPr/>
+        <p:txBody>
+          <a:bodyPr/>
+          <a:lstStyle/>
+          <a:p>
+            <a:r>
+              <a:rPr lang="en-US" dirty="0"/>
+              <a:t>Doel </a:t>
+            </a:r>
+            <a:r>
+              <a:rPr lang="en-US" dirty="0" err="1"/>
+              <a:t>voor</a:t>
+            </a:r>
+            <a:r>
+              <a:rPr lang="en-US" dirty="0"/>
+              <a:t> de </a:t>
+            </a:r>
+            <a:r>
+              <a:rPr lang="en-US" dirty="0" err="1"/>
+              <a:t>volgende</a:t>
+            </a:r>
+            <a:r>
+              <a:rPr lang="en-US" dirty="0"/>
+              <a:t> sprint?</a:t>
+            </a:r>
+            <a:br>
+              <a:rPr lang="en-US" dirty="0"/>
+            </a:br>
+            <a:br>
+              <a:rPr lang="en-US" dirty="0"/>
+            </a:br>
+            <a:r>
+              <a:rPr lang="en-US" sz="2000" dirty="0"/>
+              <a:t>Admins de </a:t>
+            </a:r>
+            <a:r>
+              <a:rPr lang="en-US" sz="2000" dirty="0" err="1"/>
+              <a:t>mogelijkheid</a:t>
+            </a:r>
+            <a:r>
+              <a:rPr lang="en-US" sz="2000" dirty="0"/>
+              <a:t> </a:t>
+            </a:r>
+            <a:r>
+              <a:rPr lang="en-US" sz="2000" dirty="0" err="1"/>
+              <a:t>geven</a:t>
+            </a:r>
+            <a:r>
+              <a:rPr lang="en-US" sz="2000" dirty="0"/>
+              <a:t> om </a:t>
+            </a:r>
+            <a:r>
+              <a:rPr lang="en-US" sz="2000" dirty="0" err="1"/>
+              <a:t>quizen</a:t>
+            </a:r>
+            <a:r>
+              <a:rPr lang="en-US" sz="2000" dirty="0"/>
+              <a:t> </a:t>
+            </a:r>
+            <a:r>
+              <a:rPr lang="en-US" sz="2000" dirty="0" err="1"/>
+              <a:t>te</a:t>
+            </a:r>
+            <a:r>
+              <a:rPr lang="en-US" sz="2000" dirty="0"/>
+              <a:t> </a:t>
+            </a:r>
+            <a:r>
+              <a:rPr lang="en-US" sz="2000" dirty="0" err="1"/>
+              <a:t>maken</a:t>
+            </a:r>
+            <a:endParaRPr lang="en-US" sz="2000" dirty="0"/>
+          </a:p>
+        </p:txBody>
+      </p:sp>
+      <p:graphicFrame>
+        <p:nvGraphicFramePr>
+          <p:cNvPr id="5" name="Content Placeholder 2">
+            <a:extLst>
+              <a:ext uri="{FF2B5EF4-FFF2-40B4-BE49-F238E27FC236}">
+                <a16:creationId xmlns:a16="http://schemas.microsoft.com/office/drawing/2014/main" id="{ACF83273-7521-473C-4DF5-A7B3ED6549E9}"/>
+              </a:ext>
+            </a:extLst>
+          </p:cNvPr>
+          <p:cNvGraphicFramePr>
+            <a:graphicFrameLocks noGrp="1"/>
+          </p:cNvGraphicFramePr>
+          <p:nvPr>
+            <p:ph idx="1"/>
+            <p:extLst>
+              <p:ext uri="{D42A27DB-BD31-4B8C-83A1-F6EECF244321}">
+                <p14:modId xmlns:p14="http://schemas.microsoft.com/office/powerpoint/2010/main" val="731804227"/>
+              </p:ext>
+            </p:extLst>
+          </p:nvPr>
+        </p:nvGraphicFramePr>
+        <p:xfrm>
+          <a:off x="731837" y="3363636"/>
+          <a:ext cx="10728325" cy="3227375"/>
+        </p:xfrm>
+        <a:graphic>
+          <a:graphicData uri="http://schemas.openxmlformats.org/drawingml/2006/diagram">
+            <dgm:relIds xmlns:dgm="http://schemas.openxmlformats.org/drawingml/2006/diagram" xmlns:r="http://schemas.openxmlformats.org/officeDocument/2006/relationships" r:dm="rId2" r:lo="rId3" r:qs="rId4" r:cs="rId5"/>
+          </a:graphicData>
+        </a:graphic>
+      </p:graphicFrame>
+      <p:sp>
+        <p:nvSpPr>
+          <p:cNvPr id="4" name="TextBox 3">
+            <a:extLst>
+              <a:ext uri="{FF2B5EF4-FFF2-40B4-BE49-F238E27FC236}">
+                <a16:creationId xmlns:a16="http://schemas.microsoft.com/office/drawing/2014/main" id="{5CB79943-8C26-E775-BE96-EC1B79ED1F85}"/>
+              </a:ext>
+            </a:extLst>
+          </p:cNvPr>
+          <p:cNvSpPr txBox="1"/>
+          <p:nvPr/>
+        </p:nvSpPr>
+        <p:spPr>
+          <a:xfrm>
+            <a:off x="731837" y="2646310"/>
+            <a:ext cx="3879273" cy="477054"/>
+          </a:xfrm>
+          <a:prstGeom prst="rect">
+            <a:avLst/>
+          </a:prstGeom>
+          <a:noFill/>
+        </p:spPr>
+        <p:txBody>
+          <a:bodyPr wrap="square" rtlCol="0">
+            <a:spAutoFit/>
+          </a:bodyPr>
+          <a:lstStyle/>
+          <a:p>
+            <a:r>
+              <a:rPr lang="en-US" sz="2500" dirty="0"/>
+              <a:t>User stories:</a:t>
+            </a:r>
+          </a:p>
+        </p:txBody>
+      </p:sp>
+    </p:spTree>
+    <p:extLst>
+      <p:ext uri="{BB962C8B-B14F-4D97-AF65-F5344CB8AC3E}">
+        <p14:creationId xmlns:p14="http://schemas.microsoft.com/office/powerpoint/2010/main" val="373756801"/>
       </p:ext>
     </p:extLst>
   </p:cSld>

--- a/sprint review.pptx
+++ b/sprint review.pptx
@@ -6674,25 +6674,8 @@
                   </a:srgbClr>
                 </a:solidFill>
               </a:rPr>
-              <a:t>Sprint 3: 15 t/</a:t>
+              <a:t>Sprint 3: 15 t/m 24</a:t>
             </a:r>
-            <a:r>
-              <a:rPr lang="nl-NL" noProof="0">
-                <a:solidFill>
-                  <a:srgbClr val="FFFFFF">
-                    <a:alpha val="58000"/>
-                  </a:srgbClr>
-                </a:solidFill>
-              </a:rPr>
-              <a:t>m 24</a:t>
-            </a:r>
-            <a:endParaRPr lang="nl-NL" noProof="0" dirty="0">
-              <a:solidFill>
-                <a:srgbClr val="FFFFFF">
-                  <a:alpha val="58000"/>
-                </a:srgbClr>
-              </a:solidFill>
-            </a:endParaRPr>
           </a:p>
         </p:txBody>
       </p:sp>
